--- a/outputs/03_说话人1_投资观点.pptx
+++ b/outputs/03_说话人1_投资观点.pptx
@@ -19,6 +19,7 @@
     <p:sldId id="267" r:id="rId18"/>
     <p:sldId id="268" r:id="rId19"/>
     <p:sldId id="269" r:id="rId20"/>
+    <p:sldId id="270" r:id="rId21"/>
   </p:sldIdLst>
   <p:sldSz cx="12191695" cy="6858000" type="screen4x3"/>
   <p:notesSz cx="6858000" cy="9144000"/>
@@ -3667,7 +3668,7 @@
                 </a:solidFill>
                 <a:latin typeface="Microsoft YaHei"/>
               </a:rPr>
-              <a:t>05 · 特斯拉四大赛道</a:t>
+              <a:t>04 · 重点股票</a:t>
             </a:r>
           </a:p>
         </p:txBody>
@@ -3702,7 +3703,7 @@
                 </a:solidFill>
                 <a:latin typeface="Microsoft YaHei"/>
               </a:rPr>
-              <a:t>引领全球商业的「四辆车」</a:t>
+              <a:t>回避清单 · 看空逻辑</a:t>
             </a:r>
           </a:p>
         </p:txBody>
@@ -3715,350 +3716,8 @@
         </p:nvSpPr>
         <p:spPr>
           <a:xfrm>
-            <a:off x="548640" y="1371600"/>
-            <a:ext cx="5486400" cy="1828800"/>
-          </a:xfrm>
-          <a:prstGeom prst="rect">
-            <a:avLst/>
-          </a:prstGeom>
-          <a:solidFill>
-            <a:srgbClr val="0B1F3A"/>
-          </a:solidFill>
-          <a:ln>
-            <a:noFill/>
-          </a:ln>
-          <a:effectLst/>
-        </p:spPr>
-        <p:style>
-          <a:lnRef idx="1">
-            <a:schemeClr val="accent1"/>
-          </a:lnRef>
-          <a:fillRef idx="3">
-            <a:schemeClr val="accent1"/>
-          </a:fillRef>
-          <a:effectRef idx="2">
-            <a:schemeClr val="accent1"/>
-          </a:effectRef>
-          <a:fontRef idx="minor">
-            <a:schemeClr val="lt1"/>
-          </a:fontRef>
-        </p:style>
-        <p:txBody>
-          <a:bodyPr rtlCol="0" anchor="ctr"/>
-          <a:lstStyle/>
-          <a:p>
-            <a:pPr algn="ctr"/>
-          </a:p>
-        </p:txBody>
-      </p:sp>
-      <p:sp>
-        <p:nvSpPr>
-          <p:cNvPr id="7" name="TextBox 6"/>
-          <p:cNvSpPr txBox="1"/>
-          <p:nvPr/>
-        </p:nvSpPr>
-        <p:spPr>
-          <a:xfrm>
-            <a:off x="822960" y="1600200"/>
-            <a:ext cx="5029200" cy="548640"/>
-          </a:xfrm>
-          <a:prstGeom prst="rect">
-            <a:avLst/>
-          </a:prstGeom>
-          <a:noFill/>
-        </p:spPr>
-        <p:txBody>
-          <a:bodyPr wrap="square" lIns="0" rIns="0" tIns="0" bIns="0" anchor="t">
-            <a:spAutoFit/>
-          </a:bodyPr>
-          <a:lstStyle/>
-          <a:p>
-            <a:pPr algn="l"/>
-            <a:r>
-              <a:rPr sz="2200" b="1">
-                <a:solidFill>
-                  <a:srgbClr val="C9A227"/>
-                </a:solidFill>
-                <a:latin typeface="Microsoft YaHei"/>
-              </a:rPr>
-              <a:t>机器人</a:t>
-            </a:r>
-          </a:p>
-        </p:txBody>
-      </p:sp>
-      <p:sp>
-        <p:nvSpPr>
-          <p:cNvPr id="8" name="TextBox 7"/>
-          <p:cNvSpPr txBox="1"/>
-          <p:nvPr/>
-        </p:nvSpPr>
-        <p:spPr>
-          <a:xfrm>
-            <a:off x="822960" y="2240280"/>
-            <a:ext cx="5029200" cy="914400"/>
-          </a:xfrm>
-          <a:prstGeom prst="rect">
-            <a:avLst/>
-          </a:prstGeom>
-          <a:noFill/>
-        </p:spPr>
-        <p:txBody>
-          <a:bodyPr wrap="square" lIns="0" rIns="0" tIns="0" bIns="0" anchor="t">
-            <a:spAutoFit/>
-          </a:bodyPr>
-          <a:lstStyle/>
-          <a:p>
-            <a:pPr algn="l"/>
-            <a:r>
-              <a:rPr sz="1500" b="0">
-                <a:solidFill>
-                  <a:srgbClr val="FFFFFF"/>
-                </a:solidFill>
-                <a:latin typeface="Microsoft YaHei"/>
-              </a:rPr>
-              <a:t>Optimus 持续迭代</a:t>
-            </a:r>
-          </a:p>
-        </p:txBody>
-      </p:sp>
-      <p:sp>
-        <p:nvSpPr>
-          <p:cNvPr id="9" name="Rectangle 8"/>
-          <p:cNvSpPr/>
-          <p:nvPr/>
-        </p:nvSpPr>
-        <p:spPr>
-          <a:xfrm>
-            <a:off x="6400800" y="1371600"/>
-            <a:ext cx="5486400" cy="1828800"/>
-          </a:xfrm>
-          <a:prstGeom prst="rect">
-            <a:avLst/>
-          </a:prstGeom>
-          <a:solidFill>
-            <a:srgbClr val="0B1F3A"/>
-          </a:solidFill>
-          <a:ln>
-            <a:noFill/>
-          </a:ln>
-          <a:effectLst/>
-        </p:spPr>
-        <p:style>
-          <a:lnRef idx="1">
-            <a:schemeClr val="accent1"/>
-          </a:lnRef>
-          <a:fillRef idx="3">
-            <a:schemeClr val="accent1"/>
-          </a:fillRef>
-          <a:effectRef idx="2">
-            <a:schemeClr val="accent1"/>
-          </a:effectRef>
-          <a:fontRef idx="minor">
-            <a:schemeClr val="lt1"/>
-          </a:fontRef>
-        </p:style>
-        <p:txBody>
-          <a:bodyPr rtlCol="0" anchor="ctr"/>
-          <a:lstStyle/>
-          <a:p>
-            <a:pPr algn="ctr"/>
-          </a:p>
-        </p:txBody>
-      </p:sp>
-      <p:sp>
-        <p:nvSpPr>
-          <p:cNvPr id="10" name="TextBox 9"/>
-          <p:cNvSpPr txBox="1"/>
-          <p:nvPr/>
-        </p:nvSpPr>
-        <p:spPr>
-          <a:xfrm>
-            <a:off x="6675120" y="1600200"/>
-            <a:ext cx="5029200" cy="548640"/>
-          </a:xfrm>
-          <a:prstGeom prst="rect">
-            <a:avLst/>
-          </a:prstGeom>
-          <a:noFill/>
-        </p:spPr>
-        <p:txBody>
-          <a:bodyPr wrap="square" lIns="0" rIns="0" tIns="0" bIns="0" anchor="t">
-            <a:spAutoFit/>
-          </a:bodyPr>
-          <a:lstStyle/>
-          <a:p>
-            <a:pPr algn="l"/>
-            <a:r>
-              <a:rPr sz="2200" b="1">
-                <a:solidFill>
-                  <a:srgbClr val="C9A227"/>
-                </a:solidFill>
-                <a:latin typeface="Microsoft YaHei"/>
-              </a:rPr>
-              <a:t>无人驾驶</a:t>
-            </a:r>
-          </a:p>
-        </p:txBody>
-      </p:sp>
-      <p:sp>
-        <p:nvSpPr>
-          <p:cNvPr id="11" name="TextBox 10"/>
-          <p:cNvSpPr txBox="1"/>
-          <p:nvPr/>
-        </p:nvSpPr>
-        <p:spPr>
-          <a:xfrm>
-            <a:off x="6675120" y="2240280"/>
-            <a:ext cx="5029200" cy="914400"/>
-          </a:xfrm>
-          <a:prstGeom prst="rect">
-            <a:avLst/>
-          </a:prstGeom>
-          <a:noFill/>
-        </p:spPr>
-        <p:txBody>
-          <a:bodyPr wrap="square" lIns="0" rIns="0" tIns="0" bIns="0" anchor="t">
-            <a:spAutoFit/>
-          </a:bodyPr>
-          <a:lstStyle/>
-          <a:p>
-            <a:pPr algn="l"/>
-            <a:r>
-              <a:rPr sz="1500" b="0">
-                <a:solidFill>
-                  <a:srgbClr val="FFFFFF"/>
-                </a:solidFill>
-                <a:latin typeface="Microsoft YaHei"/>
-              </a:rPr>
-              <a:t>即将全线铺开</a:t>
-            </a:r>
-          </a:p>
-        </p:txBody>
-      </p:sp>
-      <p:sp>
-        <p:nvSpPr>
-          <p:cNvPr id="12" name="Rectangle 11"/>
-          <p:cNvSpPr/>
-          <p:nvPr/>
-        </p:nvSpPr>
-        <p:spPr>
-          <a:xfrm>
-            <a:off x="548640" y="3474720"/>
-            <a:ext cx="5486400" cy="1828800"/>
-          </a:xfrm>
-          <a:prstGeom prst="rect">
-            <a:avLst/>
-          </a:prstGeom>
-          <a:solidFill>
-            <a:srgbClr val="0B1F3A"/>
-          </a:solidFill>
-          <a:ln>
-            <a:noFill/>
-          </a:ln>
-          <a:effectLst/>
-        </p:spPr>
-        <p:style>
-          <a:lnRef idx="1">
-            <a:schemeClr val="accent1"/>
-          </a:lnRef>
-          <a:fillRef idx="3">
-            <a:schemeClr val="accent1"/>
-          </a:fillRef>
-          <a:effectRef idx="2">
-            <a:schemeClr val="accent1"/>
-          </a:effectRef>
-          <a:fontRef idx="minor">
-            <a:schemeClr val="lt1"/>
-          </a:fontRef>
-        </p:style>
-        <p:txBody>
-          <a:bodyPr rtlCol="0" anchor="ctr"/>
-          <a:lstStyle/>
-          <a:p>
-            <a:pPr algn="ctr"/>
-          </a:p>
-        </p:txBody>
-      </p:sp>
-      <p:sp>
-        <p:nvSpPr>
-          <p:cNvPr id="13" name="TextBox 12"/>
-          <p:cNvSpPr txBox="1"/>
-          <p:nvPr/>
-        </p:nvSpPr>
-        <p:spPr>
-          <a:xfrm>
-            <a:off x="822960" y="3703320"/>
-            <a:ext cx="5029200" cy="548640"/>
-          </a:xfrm>
-          <a:prstGeom prst="rect">
-            <a:avLst/>
-          </a:prstGeom>
-          <a:noFill/>
-        </p:spPr>
-        <p:txBody>
-          <a:bodyPr wrap="square" lIns="0" rIns="0" tIns="0" bIns="0" anchor="t">
-            <a:spAutoFit/>
-          </a:bodyPr>
-          <a:lstStyle/>
-          <a:p>
-            <a:pPr algn="l"/>
-            <a:r>
-              <a:rPr sz="2200" b="1">
-                <a:solidFill>
-                  <a:srgbClr val="C9A227"/>
-                </a:solidFill>
-                <a:latin typeface="Microsoft YaHei"/>
-              </a:rPr>
-              <a:t>太空法律 / 太空经济</a:t>
-            </a:r>
-          </a:p>
-        </p:txBody>
-      </p:sp>
-      <p:sp>
-        <p:nvSpPr>
-          <p:cNvPr id="14" name="TextBox 13"/>
-          <p:cNvSpPr txBox="1"/>
-          <p:nvPr/>
-        </p:nvSpPr>
-        <p:spPr>
-          <a:xfrm>
-            <a:off x="822960" y="4343400"/>
-            <a:ext cx="5029200" cy="914400"/>
-          </a:xfrm>
-          <a:prstGeom prst="rect">
-            <a:avLst/>
-          </a:prstGeom>
-          <a:noFill/>
-        </p:spPr>
-        <p:txBody>
-          <a:bodyPr wrap="square" lIns="0" rIns="0" tIns="0" bIns="0" anchor="t">
-            <a:spAutoFit/>
-          </a:bodyPr>
-          <a:lstStyle/>
-          <a:p>
-            <a:pPr algn="l"/>
-            <a:r>
-              <a:rPr sz="1500" b="0">
-                <a:solidFill>
-                  <a:srgbClr val="FFFFFF"/>
-                </a:solidFill>
-                <a:latin typeface="Microsoft YaHei"/>
-              </a:rPr>
-              <a:t>马上开放;芯片厂量产 7nm</a:t>
-            </a:r>
-          </a:p>
-        </p:txBody>
-      </p:sp>
-      <p:sp>
-        <p:nvSpPr>
-          <p:cNvPr id="15" name="Rectangle 14"/>
-          <p:cNvSpPr/>
-          <p:nvPr/>
-        </p:nvSpPr>
-        <p:spPr>
-          <a:xfrm>
-            <a:off x="6400800" y="3474720"/>
-            <a:ext cx="5486400" cy="1828800"/>
+            <a:off x="548640" y="1234440"/>
+            <a:ext cx="457200" cy="530352"/>
           </a:xfrm>
           <a:prstGeom prst="rect">
             <a:avLst/>
@@ -4095,102 +3754,55 @@
       </p:sp>
       <p:sp>
         <p:nvSpPr>
-          <p:cNvPr id="16" name="TextBox 15"/>
-          <p:cNvSpPr txBox="1"/>
-          <p:nvPr/>
-        </p:nvSpPr>
-        <p:spPr>
-          <a:xfrm>
-            <a:off x="6675120" y="3703320"/>
-            <a:ext cx="5029200" cy="548640"/>
-          </a:xfrm>
-          <a:prstGeom prst="rect">
-            <a:avLst/>
-          </a:prstGeom>
-          <a:noFill/>
-        </p:spPr>
-        <p:txBody>
-          <a:bodyPr wrap="square" lIns="0" rIns="0" tIns="0" bIns="0" anchor="t">
-            <a:spAutoFit/>
-          </a:bodyPr>
-          <a:lstStyle/>
-          <a:p>
-            <a:pPr algn="l"/>
+          <p:cNvPr id="7" name="TextBox 6"/>
+          <p:cNvSpPr txBox="1"/>
+          <p:nvPr/>
+        </p:nvSpPr>
+        <p:spPr>
+          <a:xfrm>
+            <a:off x="548640" y="1234440"/>
+            <a:ext cx="457200" cy="530352"/>
+          </a:xfrm>
+          <a:prstGeom prst="rect">
+            <a:avLst/>
+          </a:prstGeom>
+          <a:noFill/>
+        </p:spPr>
+        <p:txBody>
+          <a:bodyPr wrap="square" lIns="0" rIns="0" tIns="0" bIns="0" anchor="ctr">
+            <a:spAutoFit/>
+          </a:bodyPr>
+          <a:lstStyle/>
+          <a:p>
+            <a:pPr algn="ctr"/>
             <a:r>
               <a:rPr sz="2200" b="1">
                 <a:solidFill>
-                  <a:srgbClr val="C9A227"/>
-                </a:solidFill>
-                <a:latin typeface="Microsoft YaHei"/>
-              </a:rPr>
-              <a:t>消灭银行</a:t>
-            </a:r>
-          </a:p>
-        </p:txBody>
-      </p:sp>
-      <p:sp>
-        <p:nvSpPr>
-          <p:cNvPr id="17" name="TextBox 16"/>
-          <p:cNvSpPr txBox="1"/>
-          <p:nvPr/>
-        </p:nvSpPr>
-        <p:spPr>
-          <a:xfrm>
-            <a:off x="6675120" y="4343400"/>
-            <a:ext cx="5029200" cy="914400"/>
-          </a:xfrm>
-          <a:prstGeom prst="rect">
-            <a:avLst/>
-          </a:prstGeom>
-          <a:noFill/>
-        </p:spPr>
-        <p:txBody>
-          <a:bodyPr wrap="square" lIns="0" rIns="0" tIns="0" bIns="0" anchor="t">
-            <a:spAutoFit/>
-          </a:bodyPr>
-          <a:lstStyle/>
-          <a:p>
-            <a:pPr algn="l"/>
-            <a:r>
-              <a:rPr sz="1500" b="0">
-                <a:solidFill>
                   <a:srgbClr val="FFFFFF"/>
                 </a:solidFill>
                 <a:latin typeface="Microsoft YaHei"/>
               </a:rPr>
-              <a:t>特斯拉版微信·年息 6%</a:t>
-            </a:r>
-          </a:p>
-          <a:p>
-            <a:pPr algn="l"/>
-            <a:r>
-              <a:rPr sz="1500" b="0">
-                <a:solidFill>
-                  <a:srgbClr val="FFFFFF"/>
-                </a:solidFill>
-                <a:latin typeface="Microsoft YaHei"/>
-              </a:rPr>
-              <a:t>随时转换为任意股票</a:t>
-            </a:r>
-          </a:p>
-        </p:txBody>
-      </p:sp>
-      <p:sp>
-        <p:nvSpPr>
-          <p:cNvPr id="18" name="Rectangle 17"/>
+              <a:t>✕</a:t>
+            </a:r>
+          </a:p>
+        </p:txBody>
+      </p:sp>
+      <p:sp>
+        <p:nvSpPr>
+          <p:cNvPr id="8" name="Rectangle 7"/>
           <p:cNvSpPr/>
           <p:nvPr/>
         </p:nvSpPr>
         <p:spPr>
           <a:xfrm>
-            <a:off x="548640" y="5669280"/>
-            <a:ext cx="11064240" cy="548640"/>
+            <a:off x="1005840" y="1234440"/>
+            <a:ext cx="10607040" cy="530352"/>
           </a:xfrm>
           <a:prstGeom prst="rect">
             <a:avLst/>
           </a:prstGeom>
           <a:solidFill>
-            <a:srgbClr val="C9A227"/>
+            <a:srgbClr val="F5F1E6"/>
           </a:solidFill>
           <a:ln>
             <a:noFill/>
@@ -4221,14 +3833,400 @@
       </p:sp>
       <p:sp>
         <p:nvSpPr>
+          <p:cNvPr id="9" name="TextBox 8"/>
+          <p:cNvSpPr txBox="1"/>
+          <p:nvPr/>
+        </p:nvSpPr>
+        <p:spPr>
+          <a:xfrm>
+            <a:off x="1188720" y="1271016"/>
+            <a:ext cx="2743200" cy="457200"/>
+          </a:xfrm>
+          <a:prstGeom prst="rect">
+            <a:avLst/>
+          </a:prstGeom>
+          <a:noFill/>
+        </p:spPr>
+        <p:txBody>
+          <a:bodyPr wrap="square" lIns="0" rIns="0" tIns="0" bIns="0" anchor="ctr">
+            <a:spAutoFit/>
+          </a:bodyPr>
+          <a:lstStyle/>
+          <a:p>
+            <a:pPr algn="l"/>
+            <a:r>
+              <a:rPr sz="1400" b="1">
+                <a:solidFill>
+                  <a:srgbClr val="0B1F3A"/>
+                </a:solidFill>
+                <a:latin typeface="Microsoft YaHei"/>
+              </a:rPr>
+              <a:t>华为及关联平台</a:t>
+            </a:r>
+          </a:p>
+        </p:txBody>
+      </p:sp>
+      <p:sp>
+        <p:nvSpPr>
+          <p:cNvPr id="10" name="TextBox 9"/>
+          <p:cNvSpPr txBox="1"/>
+          <p:nvPr/>
+        </p:nvSpPr>
+        <p:spPr>
+          <a:xfrm>
+            <a:off x="4023360" y="1271016"/>
+            <a:ext cx="7498079" cy="457200"/>
+          </a:xfrm>
+          <a:prstGeom prst="rect">
+            <a:avLst/>
+          </a:prstGeom>
+          <a:noFill/>
+        </p:spPr>
+        <p:txBody>
+          <a:bodyPr wrap="square" lIns="0" rIns="0" tIns="0" bIns="0" anchor="ctr">
+            <a:spAutoFit/>
+          </a:bodyPr>
+          <a:lstStyle/>
+          <a:p>
+            <a:pPr algn="l"/>
+            <a:r>
+              <a:rPr sz="1100" b="0">
+                <a:solidFill>
+                  <a:srgbClr val="222222"/>
+                </a:solidFill>
+                <a:latin typeface="Microsoft YaHei"/>
+              </a:rPr>
+              <a:t>中国最无耻的公司;压榨供应链(同芯片国内2000元/欧洲2000欧元);赛力斯卖一辆车给华为14万;机柜90%仍是电信号→被光模块时代淘汰;AI迭代落后阿里/腾讯。</a:t>
+            </a:r>
+          </a:p>
+        </p:txBody>
+      </p:sp>
+      <p:sp>
+        <p:nvSpPr>
+          <p:cNvPr id="11" name="Rectangle 10"/>
+          <p:cNvSpPr/>
+          <p:nvPr/>
+        </p:nvSpPr>
+        <p:spPr>
+          <a:xfrm>
+            <a:off x="548640" y="1837944"/>
+            <a:ext cx="457200" cy="530352"/>
+          </a:xfrm>
+          <a:prstGeom prst="rect">
+            <a:avLst/>
+          </a:prstGeom>
+          <a:solidFill>
+            <a:srgbClr val="B01F24"/>
+          </a:solidFill>
+          <a:ln>
+            <a:noFill/>
+          </a:ln>
+          <a:effectLst/>
+        </p:spPr>
+        <p:style>
+          <a:lnRef idx="1">
+            <a:schemeClr val="accent1"/>
+          </a:lnRef>
+          <a:fillRef idx="3">
+            <a:schemeClr val="accent1"/>
+          </a:fillRef>
+          <a:effectRef idx="2">
+            <a:schemeClr val="accent1"/>
+          </a:effectRef>
+          <a:fontRef idx="minor">
+            <a:schemeClr val="lt1"/>
+          </a:fontRef>
+        </p:style>
+        <p:txBody>
+          <a:bodyPr rtlCol="0" anchor="ctr"/>
+          <a:lstStyle/>
+          <a:p>
+            <a:pPr algn="ctr"/>
+          </a:p>
+        </p:txBody>
+      </p:sp>
+      <p:sp>
+        <p:nvSpPr>
+          <p:cNvPr id="12" name="TextBox 11"/>
+          <p:cNvSpPr txBox="1"/>
+          <p:nvPr/>
+        </p:nvSpPr>
+        <p:spPr>
+          <a:xfrm>
+            <a:off x="548640" y="1837944"/>
+            <a:ext cx="457200" cy="530352"/>
+          </a:xfrm>
+          <a:prstGeom prst="rect">
+            <a:avLst/>
+          </a:prstGeom>
+          <a:noFill/>
+        </p:spPr>
+        <p:txBody>
+          <a:bodyPr wrap="square" lIns="0" rIns="0" tIns="0" bIns="0" anchor="ctr">
+            <a:spAutoFit/>
+          </a:bodyPr>
+          <a:lstStyle/>
+          <a:p>
+            <a:pPr algn="ctr"/>
+            <a:r>
+              <a:rPr sz="2200" b="1">
+                <a:solidFill>
+                  <a:srgbClr val="FFFFFF"/>
+                </a:solidFill>
+                <a:latin typeface="Microsoft YaHei"/>
+              </a:rPr>
+              <a:t>✕</a:t>
+            </a:r>
+          </a:p>
+        </p:txBody>
+      </p:sp>
+      <p:sp>
+        <p:nvSpPr>
+          <p:cNvPr id="13" name="Rectangle 12"/>
+          <p:cNvSpPr/>
+          <p:nvPr/>
+        </p:nvSpPr>
+        <p:spPr>
+          <a:xfrm>
+            <a:off x="1005840" y="1837944"/>
+            <a:ext cx="10607040" cy="530352"/>
+          </a:xfrm>
+          <a:prstGeom prst="rect">
+            <a:avLst/>
+          </a:prstGeom>
+          <a:solidFill>
+            <a:srgbClr val="F5F1E6"/>
+          </a:solidFill>
+          <a:ln>
+            <a:noFill/>
+          </a:ln>
+          <a:effectLst/>
+        </p:spPr>
+        <p:style>
+          <a:lnRef idx="1">
+            <a:schemeClr val="accent1"/>
+          </a:lnRef>
+          <a:fillRef idx="3">
+            <a:schemeClr val="accent1"/>
+          </a:fillRef>
+          <a:effectRef idx="2">
+            <a:schemeClr val="accent1"/>
+          </a:effectRef>
+          <a:fontRef idx="minor">
+            <a:schemeClr val="lt1"/>
+          </a:fontRef>
+        </p:style>
+        <p:txBody>
+          <a:bodyPr rtlCol="0" anchor="ctr"/>
+          <a:lstStyle/>
+          <a:p>
+            <a:pPr algn="ctr"/>
+          </a:p>
+        </p:txBody>
+      </p:sp>
+      <p:sp>
+        <p:nvSpPr>
+          <p:cNvPr id="14" name="TextBox 13"/>
+          <p:cNvSpPr txBox="1"/>
+          <p:nvPr/>
+        </p:nvSpPr>
+        <p:spPr>
+          <a:xfrm>
+            <a:off x="1188720" y="1874520"/>
+            <a:ext cx="2743200" cy="457200"/>
+          </a:xfrm>
+          <a:prstGeom prst="rect">
+            <a:avLst/>
+          </a:prstGeom>
+          <a:noFill/>
+        </p:spPr>
+        <p:txBody>
+          <a:bodyPr wrap="square" lIns="0" rIns="0" tIns="0" bIns="0" anchor="ctr">
+            <a:spAutoFit/>
+          </a:bodyPr>
+          <a:lstStyle/>
+          <a:p>
+            <a:pPr algn="l"/>
+            <a:r>
+              <a:rPr sz="1400" b="1">
+                <a:solidFill>
+                  <a:srgbClr val="0B1F3A"/>
+                </a:solidFill>
+                <a:latin typeface="Microsoft YaHei"/>
+              </a:rPr>
+              <a:t>比亚迪</a:t>
+            </a:r>
+          </a:p>
+        </p:txBody>
+      </p:sp>
+      <p:sp>
+        <p:nvSpPr>
+          <p:cNvPr id="15" name="TextBox 14"/>
+          <p:cNvSpPr txBox="1"/>
+          <p:nvPr/>
+        </p:nvSpPr>
+        <p:spPr>
+          <a:xfrm>
+            <a:off x="4023360" y="1874520"/>
+            <a:ext cx="7498079" cy="457200"/>
+          </a:xfrm>
+          <a:prstGeom prst="rect">
+            <a:avLst/>
+          </a:prstGeom>
+          <a:noFill/>
+        </p:spPr>
+        <p:txBody>
+          <a:bodyPr wrap="square" lIns="0" rIns="0" tIns="0" bIns="0" anchor="ctr">
+            <a:spAutoFit/>
+          </a:bodyPr>
+          <a:lstStyle/>
+          <a:p>
+            <a:pPr algn="l"/>
+            <a:r>
+              <a:rPr sz="1100" b="0">
+                <a:solidFill>
+                  <a:srgbClr val="222222"/>
+                </a:solidFill>
+                <a:latin typeface="Microsoft YaHei"/>
+              </a:rPr>
+              <a:t>事实上已破产;拖欠/压榨供应商,业内口碑差;钠电池替代锂电池后冲击最大。</a:t>
+            </a:r>
+          </a:p>
+        </p:txBody>
+      </p:sp>
+      <p:sp>
+        <p:nvSpPr>
+          <p:cNvPr id="16" name="Rectangle 15"/>
+          <p:cNvSpPr/>
+          <p:nvPr/>
+        </p:nvSpPr>
+        <p:spPr>
+          <a:xfrm>
+            <a:off x="548640" y="2441448"/>
+            <a:ext cx="457200" cy="530352"/>
+          </a:xfrm>
+          <a:prstGeom prst="rect">
+            <a:avLst/>
+          </a:prstGeom>
+          <a:solidFill>
+            <a:srgbClr val="B01F24"/>
+          </a:solidFill>
+          <a:ln>
+            <a:noFill/>
+          </a:ln>
+          <a:effectLst/>
+        </p:spPr>
+        <p:style>
+          <a:lnRef idx="1">
+            <a:schemeClr val="accent1"/>
+          </a:lnRef>
+          <a:fillRef idx="3">
+            <a:schemeClr val="accent1"/>
+          </a:fillRef>
+          <a:effectRef idx="2">
+            <a:schemeClr val="accent1"/>
+          </a:effectRef>
+          <a:fontRef idx="minor">
+            <a:schemeClr val="lt1"/>
+          </a:fontRef>
+        </p:style>
+        <p:txBody>
+          <a:bodyPr rtlCol="0" anchor="ctr"/>
+          <a:lstStyle/>
+          <a:p>
+            <a:pPr algn="ctr"/>
+          </a:p>
+        </p:txBody>
+      </p:sp>
+      <p:sp>
+        <p:nvSpPr>
+          <p:cNvPr id="17" name="TextBox 16"/>
+          <p:cNvSpPr txBox="1"/>
+          <p:nvPr/>
+        </p:nvSpPr>
+        <p:spPr>
+          <a:xfrm>
+            <a:off x="548640" y="2441448"/>
+            <a:ext cx="457200" cy="530352"/>
+          </a:xfrm>
+          <a:prstGeom prst="rect">
+            <a:avLst/>
+          </a:prstGeom>
+          <a:noFill/>
+        </p:spPr>
+        <p:txBody>
+          <a:bodyPr wrap="square" lIns="0" rIns="0" tIns="0" bIns="0" anchor="ctr">
+            <a:spAutoFit/>
+          </a:bodyPr>
+          <a:lstStyle/>
+          <a:p>
+            <a:pPr algn="ctr"/>
+            <a:r>
+              <a:rPr sz="2200" b="1">
+                <a:solidFill>
+                  <a:srgbClr val="FFFFFF"/>
+                </a:solidFill>
+                <a:latin typeface="Microsoft YaHei"/>
+              </a:rPr>
+              <a:t>✕</a:t>
+            </a:r>
+          </a:p>
+        </p:txBody>
+      </p:sp>
+      <p:sp>
+        <p:nvSpPr>
+          <p:cNvPr id="18" name="Rectangle 17"/>
+          <p:cNvSpPr/>
+          <p:nvPr/>
+        </p:nvSpPr>
+        <p:spPr>
+          <a:xfrm>
+            <a:off x="1005840" y="2441448"/>
+            <a:ext cx="10607040" cy="530352"/>
+          </a:xfrm>
+          <a:prstGeom prst="rect">
+            <a:avLst/>
+          </a:prstGeom>
+          <a:solidFill>
+            <a:srgbClr val="F5F1E6"/>
+          </a:solidFill>
+          <a:ln>
+            <a:noFill/>
+          </a:ln>
+          <a:effectLst/>
+        </p:spPr>
+        <p:style>
+          <a:lnRef idx="1">
+            <a:schemeClr val="accent1"/>
+          </a:lnRef>
+          <a:fillRef idx="3">
+            <a:schemeClr val="accent1"/>
+          </a:fillRef>
+          <a:effectRef idx="2">
+            <a:schemeClr val="accent1"/>
+          </a:effectRef>
+          <a:fontRef idx="minor">
+            <a:schemeClr val="lt1"/>
+          </a:fontRef>
+        </p:style>
+        <p:txBody>
+          <a:bodyPr rtlCol="0" anchor="ctr"/>
+          <a:lstStyle/>
+          <a:p>
+            <a:pPr algn="ctr"/>
+          </a:p>
+        </p:txBody>
+      </p:sp>
+      <p:sp>
+        <p:nvSpPr>
           <p:cNvPr id="19" name="TextBox 18"/>
           <p:cNvSpPr txBox="1"/>
           <p:nvPr/>
         </p:nvSpPr>
         <p:spPr>
           <a:xfrm>
-            <a:off x="731520" y="5669280"/>
-            <a:ext cx="10698480" cy="548640"/>
+            <a:off x="1188720" y="2478024"/>
+            <a:ext cx="2743200" cy="457200"/>
           </a:xfrm>
           <a:prstGeom prst="rect">
             <a:avLst/>
@@ -4243,13 +4241,13 @@
           <a:p>
             <a:pPr algn="l"/>
             <a:r>
-              <a:rPr sz="1500" b="1">
+              <a:rPr sz="1400" b="1">
                 <a:solidFill>
                   <a:srgbClr val="0B1F3A"/>
                 </a:solidFill>
                 <a:latin typeface="Microsoft YaHei"/>
               </a:rPr>
-              <a:t>未来同时是:全球最大金融公司 · 芯片公司 · 太空公司 · 机器人公司</a:t>
+              <a:t>银行业(整体)</a:t>
             </a:r>
           </a:p>
         </p:txBody>
@@ -4257,6 +4255,1006 @@
       <p:sp>
         <p:nvSpPr>
           <p:cNvPr id="20" name="TextBox 19"/>
+          <p:cNvSpPr txBox="1"/>
+          <p:nvPr/>
+        </p:nvSpPr>
+        <p:spPr>
+          <a:xfrm>
+            <a:off x="4023360" y="2478024"/>
+            <a:ext cx="7498079" cy="457200"/>
+          </a:xfrm>
+          <a:prstGeom prst="rect">
+            <a:avLst/>
+          </a:prstGeom>
+          <a:noFill/>
+        </p:spPr>
+        <p:txBody>
+          <a:bodyPr wrap="square" lIns="0" rIns="0" tIns="0" bIns="0" anchor="ctr">
+            <a:spAutoFit/>
+          </a:bodyPr>
+          <a:lstStyle/>
+          <a:p>
+            <a:pPr algn="l"/>
+            <a:r>
+              <a:rPr sz="1100" b="0">
+                <a:solidFill>
+                  <a:srgbClr val="222222"/>
+                </a:solidFill>
+                <a:latin typeface="Microsoft YaHei"/>
+              </a:rPr>
+              <a:t>「玩银行的时代彻底结束」;特斯拉版微信(年息6%)进一步消灭银行。</a:t>
+            </a:r>
+          </a:p>
+        </p:txBody>
+      </p:sp>
+      <p:sp>
+        <p:nvSpPr>
+          <p:cNvPr id="21" name="Rectangle 20"/>
+          <p:cNvSpPr/>
+          <p:nvPr/>
+        </p:nvSpPr>
+        <p:spPr>
+          <a:xfrm>
+            <a:off x="548640" y="3044952"/>
+            <a:ext cx="457200" cy="530352"/>
+          </a:xfrm>
+          <a:prstGeom prst="rect">
+            <a:avLst/>
+          </a:prstGeom>
+          <a:solidFill>
+            <a:srgbClr val="B01F24"/>
+          </a:solidFill>
+          <a:ln>
+            <a:noFill/>
+          </a:ln>
+          <a:effectLst/>
+        </p:spPr>
+        <p:style>
+          <a:lnRef idx="1">
+            <a:schemeClr val="accent1"/>
+          </a:lnRef>
+          <a:fillRef idx="3">
+            <a:schemeClr val="accent1"/>
+          </a:fillRef>
+          <a:effectRef idx="2">
+            <a:schemeClr val="accent1"/>
+          </a:effectRef>
+          <a:fontRef idx="minor">
+            <a:schemeClr val="lt1"/>
+          </a:fontRef>
+        </p:style>
+        <p:txBody>
+          <a:bodyPr rtlCol="0" anchor="ctr"/>
+          <a:lstStyle/>
+          <a:p>
+            <a:pPr algn="ctr"/>
+          </a:p>
+        </p:txBody>
+      </p:sp>
+      <p:sp>
+        <p:nvSpPr>
+          <p:cNvPr id="22" name="TextBox 21"/>
+          <p:cNvSpPr txBox="1"/>
+          <p:nvPr/>
+        </p:nvSpPr>
+        <p:spPr>
+          <a:xfrm>
+            <a:off x="548640" y="3044952"/>
+            <a:ext cx="457200" cy="530352"/>
+          </a:xfrm>
+          <a:prstGeom prst="rect">
+            <a:avLst/>
+          </a:prstGeom>
+          <a:noFill/>
+        </p:spPr>
+        <p:txBody>
+          <a:bodyPr wrap="square" lIns="0" rIns="0" tIns="0" bIns="0" anchor="ctr">
+            <a:spAutoFit/>
+          </a:bodyPr>
+          <a:lstStyle/>
+          <a:p>
+            <a:pPr algn="ctr"/>
+            <a:r>
+              <a:rPr sz="2200" b="1">
+                <a:solidFill>
+                  <a:srgbClr val="FFFFFF"/>
+                </a:solidFill>
+                <a:latin typeface="Microsoft YaHei"/>
+              </a:rPr>
+              <a:t>✕</a:t>
+            </a:r>
+          </a:p>
+        </p:txBody>
+      </p:sp>
+      <p:sp>
+        <p:nvSpPr>
+          <p:cNvPr id="23" name="Rectangle 22"/>
+          <p:cNvSpPr/>
+          <p:nvPr/>
+        </p:nvSpPr>
+        <p:spPr>
+          <a:xfrm>
+            <a:off x="1005840" y="3044952"/>
+            <a:ext cx="10607040" cy="530352"/>
+          </a:xfrm>
+          <a:prstGeom prst="rect">
+            <a:avLst/>
+          </a:prstGeom>
+          <a:solidFill>
+            <a:srgbClr val="F5F1E6"/>
+          </a:solidFill>
+          <a:ln>
+            <a:noFill/>
+          </a:ln>
+          <a:effectLst/>
+        </p:spPr>
+        <p:style>
+          <a:lnRef idx="1">
+            <a:schemeClr val="accent1"/>
+          </a:lnRef>
+          <a:fillRef idx="3">
+            <a:schemeClr val="accent1"/>
+          </a:fillRef>
+          <a:effectRef idx="2">
+            <a:schemeClr val="accent1"/>
+          </a:effectRef>
+          <a:fontRef idx="minor">
+            <a:schemeClr val="lt1"/>
+          </a:fontRef>
+        </p:style>
+        <p:txBody>
+          <a:bodyPr rtlCol="0" anchor="ctr"/>
+          <a:lstStyle/>
+          <a:p>
+            <a:pPr algn="ctr"/>
+          </a:p>
+        </p:txBody>
+      </p:sp>
+      <p:sp>
+        <p:nvSpPr>
+          <p:cNvPr id="24" name="TextBox 23"/>
+          <p:cNvSpPr txBox="1"/>
+          <p:nvPr/>
+        </p:nvSpPr>
+        <p:spPr>
+          <a:xfrm>
+            <a:off x="1188720" y="3081528"/>
+            <a:ext cx="2743200" cy="457200"/>
+          </a:xfrm>
+          <a:prstGeom prst="rect">
+            <a:avLst/>
+          </a:prstGeom>
+          <a:noFill/>
+        </p:spPr>
+        <p:txBody>
+          <a:bodyPr wrap="square" lIns="0" rIns="0" tIns="0" bIns="0" anchor="ctr">
+            <a:spAutoFit/>
+          </a:bodyPr>
+          <a:lstStyle/>
+          <a:p>
+            <a:pPr algn="l"/>
+            <a:r>
+              <a:rPr sz="1400" b="1">
+                <a:solidFill>
+                  <a:srgbClr val="0B1F3A"/>
+                </a:solidFill>
+                <a:latin typeface="Microsoft YaHei"/>
+              </a:rPr>
+              <a:t>传统汽车</a:t>
+            </a:r>
+          </a:p>
+        </p:txBody>
+      </p:sp>
+      <p:sp>
+        <p:nvSpPr>
+          <p:cNvPr id="25" name="TextBox 24"/>
+          <p:cNvSpPr txBox="1"/>
+          <p:nvPr/>
+        </p:nvSpPr>
+        <p:spPr>
+          <a:xfrm>
+            <a:off x="4023360" y="3081528"/>
+            <a:ext cx="7498079" cy="457200"/>
+          </a:xfrm>
+          <a:prstGeom prst="rect">
+            <a:avLst/>
+          </a:prstGeom>
+          <a:noFill/>
+        </p:spPr>
+        <p:txBody>
+          <a:bodyPr wrap="square" lIns="0" rIns="0" tIns="0" bIns="0" anchor="ctr">
+            <a:spAutoFit/>
+          </a:bodyPr>
+          <a:lstStyle/>
+          <a:p>
+            <a:pPr algn="l"/>
+            <a:r>
+              <a:rPr sz="1100" b="0">
+                <a:solidFill>
+                  <a:srgbClr val="222222"/>
+                </a:solidFill>
+                <a:latin typeface="Microsoft YaHei"/>
+              </a:rPr>
+              <a:t>房地产之后下一个全线崩溃赛道;特斯拉无人驾驶/机器人化将摧毁传统车企。</a:t>
+            </a:r>
+          </a:p>
+        </p:txBody>
+      </p:sp>
+      <p:sp>
+        <p:nvSpPr>
+          <p:cNvPr id="26" name="Rectangle 25"/>
+          <p:cNvSpPr/>
+          <p:nvPr/>
+        </p:nvSpPr>
+        <p:spPr>
+          <a:xfrm>
+            <a:off x="548640" y="3648456"/>
+            <a:ext cx="457200" cy="530352"/>
+          </a:xfrm>
+          <a:prstGeom prst="rect">
+            <a:avLst/>
+          </a:prstGeom>
+          <a:solidFill>
+            <a:srgbClr val="B01F24"/>
+          </a:solidFill>
+          <a:ln>
+            <a:noFill/>
+          </a:ln>
+          <a:effectLst/>
+        </p:spPr>
+        <p:style>
+          <a:lnRef idx="1">
+            <a:schemeClr val="accent1"/>
+          </a:lnRef>
+          <a:fillRef idx="3">
+            <a:schemeClr val="accent1"/>
+          </a:fillRef>
+          <a:effectRef idx="2">
+            <a:schemeClr val="accent1"/>
+          </a:effectRef>
+          <a:fontRef idx="minor">
+            <a:schemeClr val="lt1"/>
+          </a:fontRef>
+        </p:style>
+        <p:txBody>
+          <a:bodyPr rtlCol="0" anchor="ctr"/>
+          <a:lstStyle/>
+          <a:p>
+            <a:pPr algn="ctr"/>
+          </a:p>
+        </p:txBody>
+      </p:sp>
+      <p:sp>
+        <p:nvSpPr>
+          <p:cNvPr id="27" name="TextBox 26"/>
+          <p:cNvSpPr txBox="1"/>
+          <p:nvPr/>
+        </p:nvSpPr>
+        <p:spPr>
+          <a:xfrm>
+            <a:off x="548640" y="3648456"/>
+            <a:ext cx="457200" cy="530352"/>
+          </a:xfrm>
+          <a:prstGeom prst="rect">
+            <a:avLst/>
+          </a:prstGeom>
+          <a:noFill/>
+        </p:spPr>
+        <p:txBody>
+          <a:bodyPr wrap="square" lIns="0" rIns="0" tIns="0" bIns="0" anchor="ctr">
+            <a:spAutoFit/>
+          </a:bodyPr>
+          <a:lstStyle/>
+          <a:p>
+            <a:pPr algn="ctr"/>
+            <a:r>
+              <a:rPr sz="2200" b="1">
+                <a:solidFill>
+                  <a:srgbClr val="FFFFFF"/>
+                </a:solidFill>
+                <a:latin typeface="Microsoft YaHei"/>
+              </a:rPr>
+              <a:t>✕</a:t>
+            </a:r>
+          </a:p>
+        </p:txBody>
+      </p:sp>
+      <p:sp>
+        <p:nvSpPr>
+          <p:cNvPr id="28" name="Rectangle 27"/>
+          <p:cNvSpPr/>
+          <p:nvPr/>
+        </p:nvSpPr>
+        <p:spPr>
+          <a:xfrm>
+            <a:off x="1005840" y="3648456"/>
+            <a:ext cx="10607040" cy="530352"/>
+          </a:xfrm>
+          <a:prstGeom prst="rect">
+            <a:avLst/>
+          </a:prstGeom>
+          <a:solidFill>
+            <a:srgbClr val="F5F1E6"/>
+          </a:solidFill>
+          <a:ln>
+            <a:noFill/>
+          </a:ln>
+          <a:effectLst/>
+        </p:spPr>
+        <p:style>
+          <a:lnRef idx="1">
+            <a:schemeClr val="accent1"/>
+          </a:lnRef>
+          <a:fillRef idx="3">
+            <a:schemeClr val="accent1"/>
+          </a:fillRef>
+          <a:effectRef idx="2">
+            <a:schemeClr val="accent1"/>
+          </a:effectRef>
+          <a:fontRef idx="minor">
+            <a:schemeClr val="lt1"/>
+          </a:fontRef>
+        </p:style>
+        <p:txBody>
+          <a:bodyPr rtlCol="0" anchor="ctr"/>
+          <a:lstStyle/>
+          <a:p>
+            <a:pPr algn="ctr"/>
+          </a:p>
+        </p:txBody>
+      </p:sp>
+      <p:sp>
+        <p:nvSpPr>
+          <p:cNvPr id="29" name="TextBox 28"/>
+          <p:cNvSpPr txBox="1"/>
+          <p:nvPr/>
+        </p:nvSpPr>
+        <p:spPr>
+          <a:xfrm>
+            <a:off x="1188720" y="3685032"/>
+            <a:ext cx="2743200" cy="457200"/>
+          </a:xfrm>
+          <a:prstGeom prst="rect">
+            <a:avLst/>
+          </a:prstGeom>
+          <a:noFill/>
+        </p:spPr>
+        <p:txBody>
+          <a:bodyPr wrap="square" lIns="0" rIns="0" tIns="0" bIns="0" anchor="ctr">
+            <a:spAutoFit/>
+          </a:bodyPr>
+          <a:lstStyle/>
+          <a:p>
+            <a:pPr algn="l"/>
+            <a:r>
+              <a:rPr sz="1400" b="1">
+                <a:solidFill>
+                  <a:srgbClr val="0B1F3A"/>
+                </a:solidFill>
+                <a:latin typeface="Microsoft YaHei"/>
+              </a:rPr>
+              <a:t>房地产</a:t>
+            </a:r>
+          </a:p>
+        </p:txBody>
+      </p:sp>
+      <p:sp>
+        <p:nvSpPr>
+          <p:cNvPr id="30" name="TextBox 29"/>
+          <p:cNvSpPr txBox="1"/>
+          <p:nvPr/>
+        </p:nvSpPr>
+        <p:spPr>
+          <a:xfrm>
+            <a:off x="4023360" y="3685032"/>
+            <a:ext cx="7498079" cy="457200"/>
+          </a:xfrm>
+          <a:prstGeom prst="rect">
+            <a:avLst/>
+          </a:prstGeom>
+          <a:noFill/>
+        </p:spPr>
+        <p:txBody>
+          <a:bodyPr wrap="square" lIns="0" rIns="0" tIns="0" bIns="0" anchor="ctr">
+            <a:spAutoFit/>
+          </a:bodyPr>
+          <a:lstStyle/>
+          <a:p>
+            <a:pPr algn="l"/>
+            <a:r>
+              <a:rPr sz="1100" b="0">
+                <a:solidFill>
+                  <a:srgbClr val="222222"/>
+                </a:solidFill>
+                <a:latin typeface="Microsoft YaHei"/>
+              </a:rPr>
+              <a:t>「50年起不来」;万科类大窟窿太多;商铺99%必死无疑。</a:t>
+            </a:r>
+          </a:p>
+        </p:txBody>
+      </p:sp>
+      <p:sp>
+        <p:nvSpPr>
+          <p:cNvPr id="31" name="Rectangle 30"/>
+          <p:cNvSpPr/>
+          <p:nvPr/>
+        </p:nvSpPr>
+        <p:spPr>
+          <a:xfrm>
+            <a:off x="548640" y="4251960"/>
+            <a:ext cx="457200" cy="530352"/>
+          </a:xfrm>
+          <a:prstGeom prst="rect">
+            <a:avLst/>
+          </a:prstGeom>
+          <a:solidFill>
+            <a:srgbClr val="B01F24"/>
+          </a:solidFill>
+          <a:ln>
+            <a:noFill/>
+          </a:ln>
+          <a:effectLst/>
+        </p:spPr>
+        <p:style>
+          <a:lnRef idx="1">
+            <a:schemeClr val="accent1"/>
+          </a:lnRef>
+          <a:fillRef idx="3">
+            <a:schemeClr val="accent1"/>
+          </a:fillRef>
+          <a:effectRef idx="2">
+            <a:schemeClr val="accent1"/>
+          </a:effectRef>
+          <a:fontRef idx="minor">
+            <a:schemeClr val="lt1"/>
+          </a:fontRef>
+        </p:style>
+        <p:txBody>
+          <a:bodyPr rtlCol="0" anchor="ctr"/>
+          <a:lstStyle/>
+          <a:p>
+            <a:pPr algn="ctr"/>
+          </a:p>
+        </p:txBody>
+      </p:sp>
+      <p:sp>
+        <p:nvSpPr>
+          <p:cNvPr id="32" name="TextBox 31"/>
+          <p:cNvSpPr txBox="1"/>
+          <p:nvPr/>
+        </p:nvSpPr>
+        <p:spPr>
+          <a:xfrm>
+            <a:off x="548640" y="4251960"/>
+            <a:ext cx="457200" cy="530352"/>
+          </a:xfrm>
+          <a:prstGeom prst="rect">
+            <a:avLst/>
+          </a:prstGeom>
+          <a:noFill/>
+        </p:spPr>
+        <p:txBody>
+          <a:bodyPr wrap="square" lIns="0" rIns="0" tIns="0" bIns="0" anchor="ctr">
+            <a:spAutoFit/>
+          </a:bodyPr>
+          <a:lstStyle/>
+          <a:p>
+            <a:pPr algn="ctr"/>
+            <a:r>
+              <a:rPr sz="2200" b="1">
+                <a:solidFill>
+                  <a:srgbClr val="FFFFFF"/>
+                </a:solidFill>
+                <a:latin typeface="Microsoft YaHei"/>
+              </a:rPr>
+              <a:t>✕</a:t>
+            </a:r>
+          </a:p>
+        </p:txBody>
+      </p:sp>
+      <p:sp>
+        <p:nvSpPr>
+          <p:cNvPr id="33" name="Rectangle 32"/>
+          <p:cNvSpPr/>
+          <p:nvPr/>
+        </p:nvSpPr>
+        <p:spPr>
+          <a:xfrm>
+            <a:off x="1005840" y="4251960"/>
+            <a:ext cx="10607040" cy="530352"/>
+          </a:xfrm>
+          <a:prstGeom prst="rect">
+            <a:avLst/>
+          </a:prstGeom>
+          <a:solidFill>
+            <a:srgbClr val="F5F1E6"/>
+          </a:solidFill>
+          <a:ln>
+            <a:noFill/>
+          </a:ln>
+          <a:effectLst/>
+        </p:spPr>
+        <p:style>
+          <a:lnRef idx="1">
+            <a:schemeClr val="accent1"/>
+          </a:lnRef>
+          <a:fillRef idx="3">
+            <a:schemeClr val="accent1"/>
+          </a:fillRef>
+          <a:effectRef idx="2">
+            <a:schemeClr val="accent1"/>
+          </a:effectRef>
+          <a:fontRef idx="minor">
+            <a:schemeClr val="lt1"/>
+          </a:fontRef>
+        </p:style>
+        <p:txBody>
+          <a:bodyPr rtlCol="0" anchor="ctr"/>
+          <a:lstStyle/>
+          <a:p>
+            <a:pPr algn="ctr"/>
+          </a:p>
+        </p:txBody>
+      </p:sp>
+      <p:sp>
+        <p:nvSpPr>
+          <p:cNvPr id="34" name="TextBox 33"/>
+          <p:cNvSpPr txBox="1"/>
+          <p:nvPr/>
+        </p:nvSpPr>
+        <p:spPr>
+          <a:xfrm>
+            <a:off x="1188720" y="4288536"/>
+            <a:ext cx="2743200" cy="457200"/>
+          </a:xfrm>
+          <a:prstGeom prst="rect">
+            <a:avLst/>
+          </a:prstGeom>
+          <a:noFill/>
+        </p:spPr>
+        <p:txBody>
+          <a:bodyPr wrap="square" lIns="0" rIns="0" tIns="0" bIns="0" anchor="ctr">
+            <a:spAutoFit/>
+          </a:bodyPr>
+          <a:lstStyle/>
+          <a:p>
+            <a:pPr algn="l"/>
+            <a:r>
+              <a:rPr sz="1400" b="1">
+                <a:solidFill>
+                  <a:srgbClr val="0B1F3A"/>
+                </a:solidFill>
+                <a:latin typeface="Microsoft YaHei"/>
+              </a:rPr>
+              <a:t>国企(整体)</a:t>
+            </a:r>
+          </a:p>
+        </p:txBody>
+      </p:sp>
+      <p:sp>
+        <p:nvSpPr>
+          <p:cNvPr id="35" name="TextBox 34"/>
+          <p:cNvSpPr txBox="1"/>
+          <p:nvPr/>
+        </p:nvSpPr>
+        <p:spPr>
+          <a:xfrm>
+            <a:off x="4023360" y="4288536"/>
+            <a:ext cx="7498079" cy="457200"/>
+          </a:xfrm>
+          <a:prstGeom prst="rect">
+            <a:avLst/>
+          </a:prstGeom>
+          <a:noFill/>
+        </p:spPr>
+        <p:txBody>
+          <a:bodyPr wrap="square" lIns="0" rIns="0" tIns="0" bIns="0" anchor="ctr">
+            <a:spAutoFit/>
+          </a:bodyPr>
+          <a:lstStyle/>
+          <a:p>
+            <a:pPr algn="l"/>
+            <a:r>
+              <a:rPr sz="1100" b="0">
+                <a:solidFill>
+                  <a:srgbClr val="222222"/>
+                </a:solidFill>
+                <a:latin typeface="Microsoft YaHei"/>
+              </a:rPr>
+              <a:t>三光:赔光/偷光/抢光;万科即深圳国资委窟窿;基本都是烂账。</a:t>
+            </a:r>
+          </a:p>
+        </p:txBody>
+      </p:sp>
+      <p:sp>
+        <p:nvSpPr>
+          <p:cNvPr id="36" name="Rectangle 35"/>
+          <p:cNvSpPr/>
+          <p:nvPr/>
+        </p:nvSpPr>
+        <p:spPr>
+          <a:xfrm>
+            <a:off x="548640" y="4855464"/>
+            <a:ext cx="457200" cy="530352"/>
+          </a:xfrm>
+          <a:prstGeom prst="rect">
+            <a:avLst/>
+          </a:prstGeom>
+          <a:solidFill>
+            <a:srgbClr val="B01F24"/>
+          </a:solidFill>
+          <a:ln>
+            <a:noFill/>
+          </a:ln>
+          <a:effectLst/>
+        </p:spPr>
+        <p:style>
+          <a:lnRef idx="1">
+            <a:schemeClr val="accent1"/>
+          </a:lnRef>
+          <a:fillRef idx="3">
+            <a:schemeClr val="accent1"/>
+          </a:fillRef>
+          <a:effectRef idx="2">
+            <a:schemeClr val="accent1"/>
+          </a:effectRef>
+          <a:fontRef idx="minor">
+            <a:schemeClr val="lt1"/>
+          </a:fontRef>
+        </p:style>
+        <p:txBody>
+          <a:bodyPr rtlCol="0" anchor="ctr"/>
+          <a:lstStyle/>
+          <a:p>
+            <a:pPr algn="ctr"/>
+          </a:p>
+        </p:txBody>
+      </p:sp>
+      <p:sp>
+        <p:nvSpPr>
+          <p:cNvPr id="37" name="TextBox 36"/>
+          <p:cNvSpPr txBox="1"/>
+          <p:nvPr/>
+        </p:nvSpPr>
+        <p:spPr>
+          <a:xfrm>
+            <a:off x="548640" y="4855464"/>
+            <a:ext cx="457200" cy="530352"/>
+          </a:xfrm>
+          <a:prstGeom prst="rect">
+            <a:avLst/>
+          </a:prstGeom>
+          <a:noFill/>
+        </p:spPr>
+        <p:txBody>
+          <a:bodyPr wrap="square" lIns="0" rIns="0" tIns="0" bIns="0" anchor="ctr">
+            <a:spAutoFit/>
+          </a:bodyPr>
+          <a:lstStyle/>
+          <a:p>
+            <a:pPr algn="ctr"/>
+            <a:r>
+              <a:rPr sz="2200" b="1">
+                <a:solidFill>
+                  <a:srgbClr val="FFFFFF"/>
+                </a:solidFill>
+                <a:latin typeface="Microsoft YaHei"/>
+              </a:rPr>
+              <a:t>✕</a:t>
+            </a:r>
+          </a:p>
+        </p:txBody>
+      </p:sp>
+      <p:sp>
+        <p:nvSpPr>
+          <p:cNvPr id="38" name="Rectangle 37"/>
+          <p:cNvSpPr/>
+          <p:nvPr/>
+        </p:nvSpPr>
+        <p:spPr>
+          <a:xfrm>
+            <a:off x="1005840" y="4855464"/>
+            <a:ext cx="10607040" cy="530352"/>
+          </a:xfrm>
+          <a:prstGeom prst="rect">
+            <a:avLst/>
+          </a:prstGeom>
+          <a:solidFill>
+            <a:srgbClr val="F5F1E6"/>
+          </a:solidFill>
+          <a:ln>
+            <a:noFill/>
+          </a:ln>
+          <a:effectLst/>
+        </p:spPr>
+        <p:style>
+          <a:lnRef idx="1">
+            <a:schemeClr val="accent1"/>
+          </a:lnRef>
+          <a:fillRef idx="3">
+            <a:schemeClr val="accent1"/>
+          </a:fillRef>
+          <a:effectRef idx="2">
+            <a:schemeClr val="accent1"/>
+          </a:effectRef>
+          <a:fontRef idx="minor">
+            <a:schemeClr val="lt1"/>
+          </a:fontRef>
+        </p:style>
+        <p:txBody>
+          <a:bodyPr rtlCol="0" anchor="ctr"/>
+          <a:lstStyle/>
+          <a:p>
+            <a:pPr algn="ctr"/>
+          </a:p>
+        </p:txBody>
+      </p:sp>
+      <p:sp>
+        <p:nvSpPr>
+          <p:cNvPr id="39" name="TextBox 38"/>
+          <p:cNvSpPr txBox="1"/>
+          <p:nvPr/>
+        </p:nvSpPr>
+        <p:spPr>
+          <a:xfrm>
+            <a:off x="1188720" y="4892040"/>
+            <a:ext cx="2743200" cy="457200"/>
+          </a:xfrm>
+          <a:prstGeom prst="rect">
+            <a:avLst/>
+          </a:prstGeom>
+          <a:noFill/>
+        </p:spPr>
+        <p:txBody>
+          <a:bodyPr wrap="square" lIns="0" rIns="0" tIns="0" bIns="0" anchor="ctr">
+            <a:spAutoFit/>
+          </a:bodyPr>
+          <a:lstStyle/>
+          <a:p>
+            <a:pPr algn="l"/>
+            <a:r>
+              <a:rPr sz="1400" b="1">
+                <a:solidFill>
+                  <a:srgbClr val="0B1F3A"/>
+                </a:solidFill>
+                <a:latin typeface="Microsoft YaHei"/>
+              </a:rPr>
+              <a:t>东山精密(谨慎)</a:t>
+            </a:r>
+          </a:p>
+        </p:txBody>
+      </p:sp>
+      <p:sp>
+        <p:nvSpPr>
+          <p:cNvPr id="40" name="TextBox 39"/>
+          <p:cNvSpPr txBox="1"/>
+          <p:nvPr/>
+        </p:nvSpPr>
+        <p:spPr>
+          <a:xfrm>
+            <a:off x="4023360" y="4892040"/>
+            <a:ext cx="7498079" cy="457200"/>
+          </a:xfrm>
+          <a:prstGeom prst="rect">
+            <a:avLst/>
+          </a:prstGeom>
+          <a:noFill/>
+        </p:spPr>
+        <p:txBody>
+          <a:bodyPr wrap="square" lIns="0" rIns="0" tIns="0" bIns="0" anchor="ctr">
+            <a:spAutoFit/>
+          </a:bodyPr>
+          <a:lstStyle/>
+          <a:p>
+            <a:pPr algn="l"/>
+            <a:r>
+              <a:rPr sz="1100" b="0">
+                <a:solidFill>
+                  <a:srgbClr val="222222"/>
+                </a:solidFill>
+                <a:latin typeface="Microsoft YaHei"/>
+              </a:rPr>
+              <a:t>唯一不太确定项;华西村出身;财报水分大;卖不动产59亿、有600亿债。</a:t>
+            </a:r>
+          </a:p>
+        </p:txBody>
+      </p:sp>
+      <p:sp>
+        <p:nvSpPr>
+          <p:cNvPr id="41" name="Rectangle 40"/>
+          <p:cNvSpPr/>
+          <p:nvPr/>
+        </p:nvSpPr>
+        <p:spPr>
+          <a:xfrm>
+            <a:off x="548640" y="5458968"/>
+            <a:ext cx="457200" cy="530352"/>
+          </a:xfrm>
+          <a:prstGeom prst="rect">
+            <a:avLst/>
+          </a:prstGeom>
+          <a:solidFill>
+            <a:srgbClr val="B01F24"/>
+          </a:solidFill>
+          <a:ln>
+            <a:noFill/>
+          </a:ln>
+          <a:effectLst/>
+        </p:spPr>
+        <p:style>
+          <a:lnRef idx="1">
+            <a:schemeClr val="accent1"/>
+          </a:lnRef>
+          <a:fillRef idx="3">
+            <a:schemeClr val="accent1"/>
+          </a:fillRef>
+          <a:effectRef idx="2">
+            <a:schemeClr val="accent1"/>
+          </a:effectRef>
+          <a:fontRef idx="minor">
+            <a:schemeClr val="lt1"/>
+          </a:fontRef>
+        </p:style>
+        <p:txBody>
+          <a:bodyPr rtlCol="0" anchor="ctr"/>
+          <a:lstStyle/>
+          <a:p>
+            <a:pPr algn="ctr"/>
+          </a:p>
+        </p:txBody>
+      </p:sp>
+      <p:sp>
+        <p:nvSpPr>
+          <p:cNvPr id="42" name="TextBox 41"/>
+          <p:cNvSpPr txBox="1"/>
+          <p:nvPr/>
+        </p:nvSpPr>
+        <p:spPr>
+          <a:xfrm>
+            <a:off x="548640" y="5458968"/>
+            <a:ext cx="457200" cy="530352"/>
+          </a:xfrm>
+          <a:prstGeom prst="rect">
+            <a:avLst/>
+          </a:prstGeom>
+          <a:noFill/>
+        </p:spPr>
+        <p:txBody>
+          <a:bodyPr wrap="square" lIns="0" rIns="0" tIns="0" bIns="0" anchor="ctr">
+            <a:spAutoFit/>
+          </a:bodyPr>
+          <a:lstStyle/>
+          <a:p>
+            <a:pPr algn="ctr"/>
+            <a:r>
+              <a:rPr sz="2200" b="1">
+                <a:solidFill>
+                  <a:srgbClr val="FFFFFF"/>
+                </a:solidFill>
+                <a:latin typeface="Microsoft YaHei"/>
+              </a:rPr>
+              <a:t>✕</a:t>
+            </a:r>
+          </a:p>
+        </p:txBody>
+      </p:sp>
+      <p:sp>
+        <p:nvSpPr>
+          <p:cNvPr id="43" name="Rectangle 42"/>
+          <p:cNvSpPr/>
+          <p:nvPr/>
+        </p:nvSpPr>
+        <p:spPr>
+          <a:xfrm>
+            <a:off x="1005840" y="5458968"/>
+            <a:ext cx="10607040" cy="530352"/>
+          </a:xfrm>
+          <a:prstGeom prst="rect">
+            <a:avLst/>
+          </a:prstGeom>
+          <a:solidFill>
+            <a:srgbClr val="F5F1E6"/>
+          </a:solidFill>
+          <a:ln>
+            <a:noFill/>
+          </a:ln>
+          <a:effectLst/>
+        </p:spPr>
+        <p:style>
+          <a:lnRef idx="1">
+            <a:schemeClr val="accent1"/>
+          </a:lnRef>
+          <a:fillRef idx="3">
+            <a:schemeClr val="accent1"/>
+          </a:fillRef>
+          <a:effectRef idx="2">
+            <a:schemeClr val="accent1"/>
+          </a:effectRef>
+          <a:fontRef idx="minor">
+            <a:schemeClr val="lt1"/>
+          </a:fontRef>
+        </p:style>
+        <p:txBody>
+          <a:bodyPr rtlCol="0" anchor="ctr"/>
+          <a:lstStyle/>
+          <a:p>
+            <a:pPr algn="ctr"/>
+          </a:p>
+        </p:txBody>
+      </p:sp>
+      <p:sp>
+        <p:nvSpPr>
+          <p:cNvPr id="44" name="TextBox 43"/>
+          <p:cNvSpPr txBox="1"/>
+          <p:nvPr/>
+        </p:nvSpPr>
+        <p:spPr>
+          <a:xfrm>
+            <a:off x="1188720" y="5495544"/>
+            <a:ext cx="2743200" cy="457200"/>
+          </a:xfrm>
+          <a:prstGeom prst="rect">
+            <a:avLst/>
+          </a:prstGeom>
+          <a:noFill/>
+        </p:spPr>
+        <p:txBody>
+          <a:bodyPr wrap="square" lIns="0" rIns="0" tIns="0" bIns="0" anchor="ctr">
+            <a:spAutoFit/>
+          </a:bodyPr>
+          <a:lstStyle/>
+          <a:p>
+            <a:pPr algn="l"/>
+            <a:r>
+              <a:rPr sz="1400" b="1">
+                <a:solidFill>
+                  <a:srgbClr val="0B1F3A"/>
+                </a:solidFill>
+                <a:latin typeface="Microsoft YaHei"/>
+              </a:rPr>
+              <a:t>青龙行者</a:t>
+            </a:r>
+          </a:p>
+        </p:txBody>
+      </p:sp>
+      <p:sp>
+        <p:nvSpPr>
+          <p:cNvPr id="45" name="TextBox 44"/>
+          <p:cNvSpPr txBox="1"/>
+          <p:nvPr/>
+        </p:nvSpPr>
+        <p:spPr>
+          <a:xfrm>
+            <a:off x="4023360" y="5495544"/>
+            <a:ext cx="7498079" cy="457200"/>
+          </a:xfrm>
+          <a:prstGeom prst="rect">
+            <a:avLst/>
+          </a:prstGeom>
+          <a:noFill/>
+        </p:spPr>
+        <p:txBody>
+          <a:bodyPr wrap="square" lIns="0" rIns="0" tIns="0" bIns="0" anchor="ctr">
+            <a:spAutoFit/>
+          </a:bodyPr>
+          <a:lstStyle/>
+          <a:p>
+            <a:pPr algn="l"/>
+            <a:r>
+              <a:rPr sz="1100" b="0">
+                <a:solidFill>
+                  <a:srgbClr val="222222"/>
+                </a:solidFill>
+                <a:latin typeface="Microsoft YaHei"/>
+              </a:rPr>
+              <a:t>15种品种中3种被淘汰,不要碰。</a:t>
+            </a:r>
+          </a:p>
+        </p:txBody>
+      </p:sp>
+      <p:sp>
+        <p:nvSpPr>
+          <p:cNvPr id="46" name="TextBox 45"/>
           <p:cNvSpPr txBox="1"/>
           <p:nvPr/>
         </p:nvSpPr>
@@ -4291,7 +5289,7 @@
       </p:sp>
       <p:sp>
         <p:nvSpPr>
-          <p:cNvPr id="21" name="TextBox 20"/>
+          <p:cNvPr id="47" name="TextBox 46"/>
           <p:cNvSpPr txBox="1"/>
           <p:nvPr/>
         </p:nvSpPr>
@@ -4319,7 +5317,7 @@
                 </a:solidFill>
                 <a:latin typeface="Microsoft YaHei"/>
               </a:rPr>
-              <a:t>10</a:t>
+              <a:t>9</a:t>
             </a:r>
           </a:p>
         </p:txBody>
@@ -4460,7 +5458,7 @@
                 </a:solidFill>
                 <a:latin typeface="Microsoft YaHei"/>
               </a:rPr>
-              <a:t>06 · 「老登」行业</a:t>
+              <a:t>05 · 特斯拉四大赛道</a:t>
             </a:r>
           </a:p>
         </p:txBody>
@@ -4495,7 +5493,7 @@
                 </a:solidFill>
                 <a:latin typeface="Microsoft YaHei"/>
               </a:rPr>
-              <a:t>八大资产/领域贬值清单</a:t>
+              <a:t>引领全球商业的「四辆车」</a:t>
             </a:r>
           </a:p>
         </p:txBody>
@@ -4508,14 +5506,14 @@
         </p:nvSpPr>
         <p:spPr>
           <a:xfrm>
-            <a:off x="548640" y="1280160"/>
-            <a:ext cx="5577840" cy="1097280"/>
+            <a:off x="548640" y="1371600"/>
+            <a:ext cx="5486400" cy="1828800"/>
           </a:xfrm>
           <a:prstGeom prst="rect">
             <a:avLst/>
           </a:prstGeom>
           <a:solidFill>
-            <a:srgbClr val="F5F1E6"/>
+            <a:srgbClr val="0B1F3A"/>
           </a:solidFill>
           <a:ln>
             <a:noFill/>
@@ -4546,14 +5544,312 @@
       </p:sp>
       <p:sp>
         <p:nvSpPr>
-          <p:cNvPr id="7" name="Rectangle 6"/>
+          <p:cNvPr id="7" name="TextBox 6"/>
+          <p:cNvSpPr txBox="1"/>
+          <p:nvPr/>
+        </p:nvSpPr>
+        <p:spPr>
+          <a:xfrm>
+            <a:off x="822960" y="1600200"/>
+            <a:ext cx="5029200" cy="548640"/>
+          </a:xfrm>
+          <a:prstGeom prst="rect">
+            <a:avLst/>
+          </a:prstGeom>
+          <a:noFill/>
+        </p:spPr>
+        <p:txBody>
+          <a:bodyPr wrap="square" lIns="0" rIns="0" tIns="0" bIns="0" anchor="t">
+            <a:spAutoFit/>
+          </a:bodyPr>
+          <a:lstStyle/>
+          <a:p>
+            <a:pPr algn="l"/>
+            <a:r>
+              <a:rPr sz="2200" b="1">
+                <a:solidFill>
+                  <a:srgbClr val="C9A227"/>
+                </a:solidFill>
+                <a:latin typeface="Microsoft YaHei"/>
+              </a:rPr>
+              <a:t>机器人</a:t>
+            </a:r>
+          </a:p>
+        </p:txBody>
+      </p:sp>
+      <p:sp>
+        <p:nvSpPr>
+          <p:cNvPr id="8" name="TextBox 7"/>
+          <p:cNvSpPr txBox="1"/>
+          <p:nvPr/>
+        </p:nvSpPr>
+        <p:spPr>
+          <a:xfrm>
+            <a:off x="822960" y="2240280"/>
+            <a:ext cx="5029200" cy="914400"/>
+          </a:xfrm>
+          <a:prstGeom prst="rect">
+            <a:avLst/>
+          </a:prstGeom>
+          <a:noFill/>
+        </p:spPr>
+        <p:txBody>
+          <a:bodyPr wrap="square" lIns="0" rIns="0" tIns="0" bIns="0" anchor="t">
+            <a:spAutoFit/>
+          </a:bodyPr>
+          <a:lstStyle/>
+          <a:p>
+            <a:pPr algn="l"/>
+            <a:r>
+              <a:rPr sz="1500" b="0">
+                <a:solidFill>
+                  <a:srgbClr val="FFFFFF"/>
+                </a:solidFill>
+                <a:latin typeface="Microsoft YaHei"/>
+              </a:rPr>
+              <a:t>Optimus 持续迭代</a:t>
+            </a:r>
+          </a:p>
+        </p:txBody>
+      </p:sp>
+      <p:sp>
+        <p:nvSpPr>
+          <p:cNvPr id="9" name="Rectangle 8"/>
           <p:cNvSpPr/>
           <p:nvPr/>
         </p:nvSpPr>
         <p:spPr>
           <a:xfrm>
-            <a:off x="548640" y="1280160"/>
-            <a:ext cx="822960" cy="1097280"/>
+            <a:off x="6400800" y="1371600"/>
+            <a:ext cx="5486400" cy="1828800"/>
+          </a:xfrm>
+          <a:prstGeom prst="rect">
+            <a:avLst/>
+          </a:prstGeom>
+          <a:solidFill>
+            <a:srgbClr val="0B1F3A"/>
+          </a:solidFill>
+          <a:ln>
+            <a:noFill/>
+          </a:ln>
+          <a:effectLst/>
+        </p:spPr>
+        <p:style>
+          <a:lnRef idx="1">
+            <a:schemeClr val="accent1"/>
+          </a:lnRef>
+          <a:fillRef idx="3">
+            <a:schemeClr val="accent1"/>
+          </a:fillRef>
+          <a:effectRef idx="2">
+            <a:schemeClr val="accent1"/>
+          </a:effectRef>
+          <a:fontRef idx="minor">
+            <a:schemeClr val="lt1"/>
+          </a:fontRef>
+        </p:style>
+        <p:txBody>
+          <a:bodyPr rtlCol="0" anchor="ctr"/>
+          <a:lstStyle/>
+          <a:p>
+            <a:pPr algn="ctr"/>
+          </a:p>
+        </p:txBody>
+      </p:sp>
+      <p:sp>
+        <p:nvSpPr>
+          <p:cNvPr id="10" name="TextBox 9"/>
+          <p:cNvSpPr txBox="1"/>
+          <p:nvPr/>
+        </p:nvSpPr>
+        <p:spPr>
+          <a:xfrm>
+            <a:off x="6675120" y="1600200"/>
+            <a:ext cx="5029200" cy="548640"/>
+          </a:xfrm>
+          <a:prstGeom prst="rect">
+            <a:avLst/>
+          </a:prstGeom>
+          <a:noFill/>
+        </p:spPr>
+        <p:txBody>
+          <a:bodyPr wrap="square" lIns="0" rIns="0" tIns="0" bIns="0" anchor="t">
+            <a:spAutoFit/>
+          </a:bodyPr>
+          <a:lstStyle/>
+          <a:p>
+            <a:pPr algn="l"/>
+            <a:r>
+              <a:rPr sz="2200" b="1">
+                <a:solidFill>
+                  <a:srgbClr val="C9A227"/>
+                </a:solidFill>
+                <a:latin typeface="Microsoft YaHei"/>
+              </a:rPr>
+              <a:t>无人驾驶</a:t>
+            </a:r>
+          </a:p>
+        </p:txBody>
+      </p:sp>
+      <p:sp>
+        <p:nvSpPr>
+          <p:cNvPr id="11" name="TextBox 10"/>
+          <p:cNvSpPr txBox="1"/>
+          <p:nvPr/>
+        </p:nvSpPr>
+        <p:spPr>
+          <a:xfrm>
+            <a:off x="6675120" y="2240280"/>
+            <a:ext cx="5029200" cy="914400"/>
+          </a:xfrm>
+          <a:prstGeom prst="rect">
+            <a:avLst/>
+          </a:prstGeom>
+          <a:noFill/>
+        </p:spPr>
+        <p:txBody>
+          <a:bodyPr wrap="square" lIns="0" rIns="0" tIns="0" bIns="0" anchor="t">
+            <a:spAutoFit/>
+          </a:bodyPr>
+          <a:lstStyle/>
+          <a:p>
+            <a:pPr algn="l"/>
+            <a:r>
+              <a:rPr sz="1500" b="0">
+                <a:solidFill>
+                  <a:srgbClr val="FFFFFF"/>
+                </a:solidFill>
+                <a:latin typeface="Microsoft YaHei"/>
+              </a:rPr>
+              <a:t>即将全线铺开</a:t>
+            </a:r>
+          </a:p>
+        </p:txBody>
+      </p:sp>
+      <p:sp>
+        <p:nvSpPr>
+          <p:cNvPr id="12" name="Rectangle 11"/>
+          <p:cNvSpPr/>
+          <p:nvPr/>
+        </p:nvSpPr>
+        <p:spPr>
+          <a:xfrm>
+            <a:off x="548640" y="3474720"/>
+            <a:ext cx="5486400" cy="1828800"/>
+          </a:xfrm>
+          <a:prstGeom prst="rect">
+            <a:avLst/>
+          </a:prstGeom>
+          <a:solidFill>
+            <a:srgbClr val="0B1F3A"/>
+          </a:solidFill>
+          <a:ln>
+            <a:noFill/>
+          </a:ln>
+          <a:effectLst/>
+        </p:spPr>
+        <p:style>
+          <a:lnRef idx="1">
+            <a:schemeClr val="accent1"/>
+          </a:lnRef>
+          <a:fillRef idx="3">
+            <a:schemeClr val="accent1"/>
+          </a:fillRef>
+          <a:effectRef idx="2">
+            <a:schemeClr val="accent1"/>
+          </a:effectRef>
+          <a:fontRef idx="minor">
+            <a:schemeClr val="lt1"/>
+          </a:fontRef>
+        </p:style>
+        <p:txBody>
+          <a:bodyPr rtlCol="0" anchor="ctr"/>
+          <a:lstStyle/>
+          <a:p>
+            <a:pPr algn="ctr"/>
+          </a:p>
+        </p:txBody>
+      </p:sp>
+      <p:sp>
+        <p:nvSpPr>
+          <p:cNvPr id="13" name="TextBox 12"/>
+          <p:cNvSpPr txBox="1"/>
+          <p:nvPr/>
+        </p:nvSpPr>
+        <p:spPr>
+          <a:xfrm>
+            <a:off x="822960" y="3703320"/>
+            <a:ext cx="5029200" cy="548640"/>
+          </a:xfrm>
+          <a:prstGeom prst="rect">
+            <a:avLst/>
+          </a:prstGeom>
+          <a:noFill/>
+        </p:spPr>
+        <p:txBody>
+          <a:bodyPr wrap="square" lIns="0" rIns="0" tIns="0" bIns="0" anchor="t">
+            <a:spAutoFit/>
+          </a:bodyPr>
+          <a:lstStyle/>
+          <a:p>
+            <a:pPr algn="l"/>
+            <a:r>
+              <a:rPr sz="2200" b="1">
+                <a:solidFill>
+                  <a:srgbClr val="C9A227"/>
+                </a:solidFill>
+                <a:latin typeface="Microsoft YaHei"/>
+              </a:rPr>
+              <a:t>太空法律 / 太空经济</a:t>
+            </a:r>
+          </a:p>
+        </p:txBody>
+      </p:sp>
+      <p:sp>
+        <p:nvSpPr>
+          <p:cNvPr id="14" name="TextBox 13"/>
+          <p:cNvSpPr txBox="1"/>
+          <p:nvPr/>
+        </p:nvSpPr>
+        <p:spPr>
+          <a:xfrm>
+            <a:off x="822960" y="4343400"/>
+            <a:ext cx="5029200" cy="914400"/>
+          </a:xfrm>
+          <a:prstGeom prst="rect">
+            <a:avLst/>
+          </a:prstGeom>
+          <a:noFill/>
+        </p:spPr>
+        <p:txBody>
+          <a:bodyPr wrap="square" lIns="0" rIns="0" tIns="0" bIns="0" anchor="t">
+            <a:spAutoFit/>
+          </a:bodyPr>
+          <a:lstStyle/>
+          <a:p>
+            <a:pPr algn="l"/>
+            <a:r>
+              <a:rPr sz="1500" b="0">
+                <a:solidFill>
+                  <a:srgbClr val="FFFFFF"/>
+                </a:solidFill>
+                <a:latin typeface="Microsoft YaHei"/>
+              </a:rPr>
+              <a:t>马上开放;芯片厂量产 7nm</a:t>
+            </a:r>
+          </a:p>
+        </p:txBody>
+      </p:sp>
+      <p:sp>
+        <p:nvSpPr>
+          <p:cNvPr id="15" name="Rectangle 14"/>
+          <p:cNvSpPr/>
+          <p:nvPr/>
+        </p:nvSpPr>
+        <p:spPr>
+          <a:xfrm>
+            <a:off x="6400800" y="3474720"/>
+            <a:ext cx="5486400" cy="1828800"/>
           </a:xfrm>
           <a:prstGeom prst="rect">
             <a:avLst/>
@@ -4590,125 +5886,102 @@
       </p:sp>
       <p:sp>
         <p:nvSpPr>
-          <p:cNvPr id="8" name="TextBox 7"/>
-          <p:cNvSpPr txBox="1"/>
-          <p:nvPr/>
-        </p:nvSpPr>
-        <p:spPr>
-          <a:xfrm>
-            <a:off x="548640" y="1280160"/>
-            <a:ext cx="822960" cy="1097280"/>
-          </a:xfrm>
-          <a:prstGeom prst="rect">
-            <a:avLst/>
-          </a:prstGeom>
-          <a:noFill/>
-        </p:spPr>
-        <p:txBody>
-          <a:bodyPr wrap="square" lIns="0" rIns="0" tIns="0" bIns="0" anchor="ctr">
-            <a:spAutoFit/>
-          </a:bodyPr>
-          <a:lstStyle/>
-          <a:p>
-            <a:pPr algn="ctr"/>
-            <a:r>
-              <a:rPr sz="2600" b="1">
+          <p:cNvPr id="16" name="TextBox 15"/>
+          <p:cNvSpPr txBox="1"/>
+          <p:nvPr/>
+        </p:nvSpPr>
+        <p:spPr>
+          <a:xfrm>
+            <a:off x="6675120" y="3703320"/>
+            <a:ext cx="5029200" cy="548640"/>
+          </a:xfrm>
+          <a:prstGeom prst="rect">
+            <a:avLst/>
+          </a:prstGeom>
+          <a:noFill/>
+        </p:spPr>
+        <p:txBody>
+          <a:bodyPr wrap="square" lIns="0" rIns="0" tIns="0" bIns="0" anchor="t">
+            <a:spAutoFit/>
+          </a:bodyPr>
+          <a:lstStyle/>
+          <a:p>
+            <a:pPr algn="l"/>
+            <a:r>
+              <a:rPr sz="2200" b="1">
+                <a:solidFill>
+                  <a:srgbClr val="C9A227"/>
+                </a:solidFill>
+                <a:latin typeface="Microsoft YaHei"/>
+              </a:rPr>
+              <a:t>消灭银行</a:t>
+            </a:r>
+          </a:p>
+        </p:txBody>
+      </p:sp>
+      <p:sp>
+        <p:nvSpPr>
+          <p:cNvPr id="17" name="TextBox 16"/>
+          <p:cNvSpPr txBox="1"/>
+          <p:nvPr/>
+        </p:nvSpPr>
+        <p:spPr>
+          <a:xfrm>
+            <a:off x="6675120" y="4343400"/>
+            <a:ext cx="5029200" cy="914400"/>
+          </a:xfrm>
+          <a:prstGeom prst="rect">
+            <a:avLst/>
+          </a:prstGeom>
+          <a:noFill/>
+        </p:spPr>
+        <p:txBody>
+          <a:bodyPr wrap="square" lIns="0" rIns="0" tIns="0" bIns="0" anchor="t">
+            <a:spAutoFit/>
+          </a:bodyPr>
+          <a:lstStyle/>
+          <a:p>
+            <a:pPr algn="l"/>
+            <a:r>
+              <a:rPr sz="1500" b="0">
                 <a:solidFill>
                   <a:srgbClr val="FFFFFF"/>
                 </a:solidFill>
                 <a:latin typeface="Microsoft YaHei"/>
               </a:rPr>
-              <a:t>01</a:t>
-            </a:r>
-          </a:p>
-        </p:txBody>
-      </p:sp>
-      <p:sp>
-        <p:nvSpPr>
-          <p:cNvPr id="9" name="TextBox 8"/>
-          <p:cNvSpPr txBox="1"/>
-          <p:nvPr/>
-        </p:nvSpPr>
-        <p:spPr>
-          <a:xfrm>
-            <a:off x="1554480" y="1371600"/>
-            <a:ext cx="4480560" cy="457200"/>
-          </a:xfrm>
-          <a:prstGeom prst="rect">
-            <a:avLst/>
-          </a:prstGeom>
-          <a:noFill/>
-        </p:spPr>
-        <p:txBody>
-          <a:bodyPr wrap="square" lIns="0" rIns="0" tIns="0" bIns="0" anchor="t">
-            <a:spAutoFit/>
-          </a:bodyPr>
-          <a:lstStyle/>
+              <a:t>特斯拉版微信·年息 6%</a:t>
+            </a:r>
+          </a:p>
           <a:p>
             <a:pPr algn="l"/>
             <a:r>
-              <a:rPr sz="1700" b="1">
-                <a:solidFill>
-                  <a:srgbClr val="0B1F3A"/>
-                </a:solidFill>
-                <a:latin typeface="Microsoft YaHei"/>
-              </a:rPr>
-              <a:t>房地产</a:t>
-            </a:r>
-          </a:p>
-        </p:txBody>
-      </p:sp>
-      <p:sp>
-        <p:nvSpPr>
-          <p:cNvPr id="10" name="TextBox 9"/>
-          <p:cNvSpPr txBox="1"/>
-          <p:nvPr/>
-        </p:nvSpPr>
-        <p:spPr>
-          <a:xfrm>
-            <a:off x="1554480" y="1828800"/>
-            <a:ext cx="4480560" cy="548640"/>
-          </a:xfrm>
-          <a:prstGeom prst="rect">
-            <a:avLst/>
-          </a:prstGeom>
-          <a:noFill/>
-        </p:spPr>
-        <p:txBody>
-          <a:bodyPr wrap="square" lIns="0" rIns="0" tIns="0" bIns="0" anchor="t">
-            <a:spAutoFit/>
-          </a:bodyPr>
-          <a:lstStyle/>
-          <a:p>
-            <a:pPr algn="l"/>
-            <a:r>
-              <a:rPr sz="1200" b="0">
-                <a:solidFill>
-                  <a:srgbClr val="222222"/>
-                </a:solidFill>
-                <a:latin typeface="Microsoft YaHei"/>
-              </a:rPr>
-              <a:t>99% 必死,仅约 1% 可活;50 年起不来</a:t>
-            </a:r>
-          </a:p>
-        </p:txBody>
-      </p:sp>
-      <p:sp>
-        <p:nvSpPr>
-          <p:cNvPr id="11" name="Rectangle 10"/>
+              <a:rPr sz="1500" b="0">
+                <a:solidFill>
+                  <a:srgbClr val="FFFFFF"/>
+                </a:solidFill>
+                <a:latin typeface="Microsoft YaHei"/>
+              </a:rPr>
+              <a:t>随时转换为任意股票</a:t>
+            </a:r>
+          </a:p>
+        </p:txBody>
+      </p:sp>
+      <p:sp>
+        <p:nvSpPr>
+          <p:cNvPr id="18" name="Rectangle 17"/>
           <p:cNvSpPr/>
           <p:nvPr/>
         </p:nvSpPr>
         <p:spPr>
           <a:xfrm>
-            <a:off x="6355079" y="1280160"/>
-            <a:ext cx="5577840" cy="1097280"/>
+            <a:off x="548640" y="5669280"/>
+            <a:ext cx="11064240" cy="548640"/>
           </a:xfrm>
           <a:prstGeom prst="rect">
             <a:avLst/>
           </a:prstGeom>
           <a:solidFill>
-            <a:srgbClr val="F5F1E6"/>
+            <a:srgbClr val="C9A227"/>
           </a:solidFill>
           <a:ln>
             <a:noFill/>
@@ -4739,58 +6012,14 @@
       </p:sp>
       <p:sp>
         <p:nvSpPr>
-          <p:cNvPr id="12" name="Rectangle 11"/>
-          <p:cNvSpPr/>
-          <p:nvPr/>
-        </p:nvSpPr>
-        <p:spPr>
-          <a:xfrm>
-            <a:off x="6355079" y="1280160"/>
-            <a:ext cx="822960" cy="1097280"/>
-          </a:xfrm>
-          <a:prstGeom prst="rect">
-            <a:avLst/>
-          </a:prstGeom>
-          <a:solidFill>
-            <a:srgbClr val="B01F24"/>
-          </a:solidFill>
-          <a:ln>
-            <a:noFill/>
-          </a:ln>
-          <a:effectLst/>
-        </p:spPr>
-        <p:style>
-          <a:lnRef idx="1">
-            <a:schemeClr val="accent1"/>
-          </a:lnRef>
-          <a:fillRef idx="3">
-            <a:schemeClr val="accent1"/>
-          </a:fillRef>
-          <a:effectRef idx="2">
-            <a:schemeClr val="accent1"/>
-          </a:effectRef>
-          <a:fontRef idx="minor">
-            <a:schemeClr val="lt1"/>
-          </a:fontRef>
-        </p:style>
-        <p:txBody>
-          <a:bodyPr rtlCol="0" anchor="ctr"/>
-          <a:lstStyle/>
-          <a:p>
-            <a:pPr algn="ctr"/>
-          </a:p>
-        </p:txBody>
-      </p:sp>
-      <p:sp>
-        <p:nvSpPr>
-          <p:cNvPr id="13" name="TextBox 12"/>
-          <p:cNvSpPr txBox="1"/>
-          <p:nvPr/>
-        </p:nvSpPr>
-        <p:spPr>
-          <a:xfrm>
-            <a:off x="6355079" y="1280160"/>
-            <a:ext cx="822960" cy="1097280"/>
+          <p:cNvPr id="19" name="TextBox 18"/>
+          <p:cNvSpPr txBox="1"/>
+          <p:nvPr/>
+        </p:nvSpPr>
+        <p:spPr>
+          <a:xfrm>
+            <a:off x="731520" y="5669280"/>
+            <a:ext cx="10698480" cy="548640"/>
           </a:xfrm>
           <a:prstGeom prst="rect">
             <a:avLst/>
@@ -4803,243 +6032,15 @@
           </a:bodyPr>
           <a:lstStyle/>
           <a:p>
-            <a:pPr algn="ctr"/>
-            <a:r>
-              <a:rPr sz="2600" b="1">
-                <a:solidFill>
-                  <a:srgbClr val="FFFFFF"/>
-                </a:solidFill>
-                <a:latin typeface="Microsoft YaHei"/>
-              </a:rPr>
-              <a:t>02</a:t>
-            </a:r>
-          </a:p>
-        </p:txBody>
-      </p:sp>
-      <p:sp>
-        <p:nvSpPr>
-          <p:cNvPr id="14" name="TextBox 13"/>
-          <p:cNvSpPr txBox="1"/>
-          <p:nvPr/>
-        </p:nvSpPr>
-        <p:spPr>
-          <a:xfrm>
-            <a:off x="7360919" y="1371600"/>
-            <a:ext cx="4480560" cy="457200"/>
-          </a:xfrm>
-          <a:prstGeom prst="rect">
-            <a:avLst/>
-          </a:prstGeom>
-          <a:noFill/>
-        </p:spPr>
-        <p:txBody>
-          <a:bodyPr wrap="square" lIns="0" rIns="0" tIns="0" bIns="0" anchor="t">
-            <a:spAutoFit/>
-          </a:bodyPr>
-          <a:lstStyle/>
-          <a:p>
             <a:pPr algn="l"/>
             <a:r>
-              <a:rPr sz="1700" b="1">
+              <a:rPr sz="1500" b="1">
                 <a:solidFill>
                   <a:srgbClr val="0B1F3A"/>
                 </a:solidFill>
                 <a:latin typeface="Microsoft YaHei"/>
               </a:rPr>
-              <a:t>商铺</a:t>
-            </a:r>
-          </a:p>
-        </p:txBody>
-      </p:sp>
-      <p:sp>
-        <p:nvSpPr>
-          <p:cNvPr id="15" name="TextBox 14"/>
-          <p:cNvSpPr txBox="1"/>
-          <p:nvPr/>
-        </p:nvSpPr>
-        <p:spPr>
-          <a:xfrm>
-            <a:off x="7360919" y="1828800"/>
-            <a:ext cx="4480560" cy="548640"/>
-          </a:xfrm>
-          <a:prstGeom prst="rect">
-            <a:avLst/>
-          </a:prstGeom>
-          <a:noFill/>
-        </p:spPr>
-        <p:txBody>
-          <a:bodyPr wrap="square" lIns="0" rIns="0" tIns="0" bIns="0" anchor="t">
-            <a:spAutoFit/>
-          </a:bodyPr>
-          <a:lstStyle/>
-          <a:p>
-            <a:pPr algn="l"/>
-            <a:r>
-              <a:rPr sz="1200" b="0">
-                <a:solidFill>
-                  <a:srgbClr val="222222"/>
-                </a:solidFill>
-                <a:latin typeface="Microsoft YaHei"/>
-              </a:rPr>
-              <a:t>99% 必死无疑</a:t>
-            </a:r>
-          </a:p>
-        </p:txBody>
-      </p:sp>
-      <p:sp>
-        <p:nvSpPr>
-          <p:cNvPr id="16" name="Rectangle 15"/>
-          <p:cNvSpPr/>
-          <p:nvPr/>
-        </p:nvSpPr>
-        <p:spPr>
-          <a:xfrm>
-            <a:off x="548640" y="2514600"/>
-            <a:ext cx="5577840" cy="1097280"/>
-          </a:xfrm>
-          <a:prstGeom prst="rect">
-            <a:avLst/>
-          </a:prstGeom>
-          <a:solidFill>
-            <a:srgbClr val="F5F1E6"/>
-          </a:solidFill>
-          <a:ln>
-            <a:noFill/>
-          </a:ln>
-          <a:effectLst/>
-        </p:spPr>
-        <p:style>
-          <a:lnRef idx="1">
-            <a:schemeClr val="accent1"/>
-          </a:lnRef>
-          <a:fillRef idx="3">
-            <a:schemeClr val="accent1"/>
-          </a:fillRef>
-          <a:effectRef idx="2">
-            <a:schemeClr val="accent1"/>
-          </a:effectRef>
-          <a:fontRef idx="minor">
-            <a:schemeClr val="lt1"/>
-          </a:fontRef>
-        </p:style>
-        <p:txBody>
-          <a:bodyPr rtlCol="0" anchor="ctr"/>
-          <a:lstStyle/>
-          <a:p>
-            <a:pPr algn="ctr"/>
-          </a:p>
-        </p:txBody>
-      </p:sp>
-      <p:sp>
-        <p:nvSpPr>
-          <p:cNvPr id="17" name="Rectangle 16"/>
-          <p:cNvSpPr/>
-          <p:nvPr/>
-        </p:nvSpPr>
-        <p:spPr>
-          <a:xfrm>
-            <a:off x="548640" y="2514600"/>
-            <a:ext cx="822960" cy="1097280"/>
-          </a:xfrm>
-          <a:prstGeom prst="rect">
-            <a:avLst/>
-          </a:prstGeom>
-          <a:solidFill>
-            <a:srgbClr val="B01F24"/>
-          </a:solidFill>
-          <a:ln>
-            <a:noFill/>
-          </a:ln>
-          <a:effectLst/>
-        </p:spPr>
-        <p:style>
-          <a:lnRef idx="1">
-            <a:schemeClr val="accent1"/>
-          </a:lnRef>
-          <a:fillRef idx="3">
-            <a:schemeClr val="accent1"/>
-          </a:fillRef>
-          <a:effectRef idx="2">
-            <a:schemeClr val="accent1"/>
-          </a:effectRef>
-          <a:fontRef idx="minor">
-            <a:schemeClr val="lt1"/>
-          </a:fontRef>
-        </p:style>
-        <p:txBody>
-          <a:bodyPr rtlCol="0" anchor="ctr"/>
-          <a:lstStyle/>
-          <a:p>
-            <a:pPr algn="ctr"/>
-          </a:p>
-        </p:txBody>
-      </p:sp>
-      <p:sp>
-        <p:nvSpPr>
-          <p:cNvPr id="18" name="TextBox 17"/>
-          <p:cNvSpPr txBox="1"/>
-          <p:nvPr/>
-        </p:nvSpPr>
-        <p:spPr>
-          <a:xfrm>
-            <a:off x="548640" y="2514600"/>
-            <a:ext cx="822960" cy="1097280"/>
-          </a:xfrm>
-          <a:prstGeom prst="rect">
-            <a:avLst/>
-          </a:prstGeom>
-          <a:noFill/>
-        </p:spPr>
-        <p:txBody>
-          <a:bodyPr wrap="square" lIns="0" rIns="0" tIns="0" bIns="0" anchor="ctr">
-            <a:spAutoFit/>
-          </a:bodyPr>
-          <a:lstStyle/>
-          <a:p>
-            <a:pPr algn="ctr"/>
-            <a:r>
-              <a:rPr sz="2600" b="1">
-                <a:solidFill>
-                  <a:srgbClr val="FFFFFF"/>
-                </a:solidFill>
-                <a:latin typeface="Microsoft YaHei"/>
-              </a:rPr>
-              <a:t>03</a:t>
-            </a:r>
-          </a:p>
-        </p:txBody>
-      </p:sp>
-      <p:sp>
-        <p:nvSpPr>
-          <p:cNvPr id="19" name="TextBox 18"/>
-          <p:cNvSpPr txBox="1"/>
-          <p:nvPr/>
-        </p:nvSpPr>
-        <p:spPr>
-          <a:xfrm>
-            <a:off x="1554480" y="2606040"/>
-            <a:ext cx="4480560" cy="457200"/>
-          </a:xfrm>
-          <a:prstGeom prst="rect">
-            <a:avLst/>
-          </a:prstGeom>
-          <a:noFill/>
-        </p:spPr>
-        <p:txBody>
-          <a:bodyPr wrap="square" lIns="0" rIns="0" tIns="0" bIns="0" anchor="t">
-            <a:spAutoFit/>
-          </a:bodyPr>
-          <a:lstStyle/>
-          <a:p>
-            <a:pPr algn="l"/>
-            <a:r>
-              <a:rPr sz="1700" b="1">
-                <a:solidFill>
-                  <a:srgbClr val="0B1F3A"/>
-                </a:solidFill>
-                <a:latin typeface="Microsoft YaHei"/>
-              </a:rPr>
-              <a:t>知识</a:t>
+              <a:t>未来同时是:全球最大金融公司 · 芯片公司 · 太空公司 · 机器人公司</a:t>
             </a:r>
           </a:p>
         </p:txBody>
@@ -5047,1006 +6048,6 @@
       <p:sp>
         <p:nvSpPr>
           <p:cNvPr id="20" name="TextBox 19"/>
-          <p:cNvSpPr txBox="1"/>
-          <p:nvPr/>
-        </p:nvSpPr>
-        <p:spPr>
-          <a:xfrm>
-            <a:off x="1554480" y="3063240"/>
-            <a:ext cx="4480560" cy="548640"/>
-          </a:xfrm>
-          <a:prstGeom prst="rect">
-            <a:avLst/>
-          </a:prstGeom>
-          <a:noFill/>
-        </p:spPr>
-        <p:txBody>
-          <a:bodyPr wrap="square" lIns="0" rIns="0" tIns="0" bIns="0" anchor="t">
-            <a:spAutoFit/>
-          </a:bodyPr>
-          <a:lstStyle/>
-          <a:p>
-            <a:pPr algn="l"/>
-            <a:r>
-              <a:rPr sz="1200" b="0">
-                <a:solidFill>
-                  <a:srgbClr val="222222"/>
-                </a:solidFill>
-                <a:latin typeface="Microsoft YaHei"/>
-              </a:rPr>
-              <a:t>中低档大模型 &gt; 90% 大专院校教授</a:t>
-            </a:r>
-          </a:p>
-        </p:txBody>
-      </p:sp>
-      <p:sp>
-        <p:nvSpPr>
-          <p:cNvPr id="21" name="Rectangle 20"/>
-          <p:cNvSpPr/>
-          <p:nvPr/>
-        </p:nvSpPr>
-        <p:spPr>
-          <a:xfrm>
-            <a:off x="6355079" y="2514600"/>
-            <a:ext cx="5577840" cy="1097280"/>
-          </a:xfrm>
-          <a:prstGeom prst="rect">
-            <a:avLst/>
-          </a:prstGeom>
-          <a:solidFill>
-            <a:srgbClr val="F5F1E6"/>
-          </a:solidFill>
-          <a:ln>
-            <a:noFill/>
-          </a:ln>
-          <a:effectLst/>
-        </p:spPr>
-        <p:style>
-          <a:lnRef idx="1">
-            <a:schemeClr val="accent1"/>
-          </a:lnRef>
-          <a:fillRef idx="3">
-            <a:schemeClr val="accent1"/>
-          </a:fillRef>
-          <a:effectRef idx="2">
-            <a:schemeClr val="accent1"/>
-          </a:effectRef>
-          <a:fontRef idx="minor">
-            <a:schemeClr val="lt1"/>
-          </a:fontRef>
-        </p:style>
-        <p:txBody>
-          <a:bodyPr rtlCol="0" anchor="ctr"/>
-          <a:lstStyle/>
-          <a:p>
-            <a:pPr algn="ctr"/>
-          </a:p>
-        </p:txBody>
-      </p:sp>
-      <p:sp>
-        <p:nvSpPr>
-          <p:cNvPr id="22" name="Rectangle 21"/>
-          <p:cNvSpPr/>
-          <p:nvPr/>
-        </p:nvSpPr>
-        <p:spPr>
-          <a:xfrm>
-            <a:off x="6355079" y="2514600"/>
-            <a:ext cx="822960" cy="1097280"/>
-          </a:xfrm>
-          <a:prstGeom prst="rect">
-            <a:avLst/>
-          </a:prstGeom>
-          <a:solidFill>
-            <a:srgbClr val="B01F24"/>
-          </a:solidFill>
-          <a:ln>
-            <a:noFill/>
-          </a:ln>
-          <a:effectLst/>
-        </p:spPr>
-        <p:style>
-          <a:lnRef idx="1">
-            <a:schemeClr val="accent1"/>
-          </a:lnRef>
-          <a:fillRef idx="3">
-            <a:schemeClr val="accent1"/>
-          </a:fillRef>
-          <a:effectRef idx="2">
-            <a:schemeClr val="accent1"/>
-          </a:effectRef>
-          <a:fontRef idx="minor">
-            <a:schemeClr val="lt1"/>
-          </a:fontRef>
-        </p:style>
-        <p:txBody>
-          <a:bodyPr rtlCol="0" anchor="ctr"/>
-          <a:lstStyle/>
-          <a:p>
-            <a:pPr algn="ctr"/>
-          </a:p>
-        </p:txBody>
-      </p:sp>
-      <p:sp>
-        <p:nvSpPr>
-          <p:cNvPr id="23" name="TextBox 22"/>
-          <p:cNvSpPr txBox="1"/>
-          <p:nvPr/>
-        </p:nvSpPr>
-        <p:spPr>
-          <a:xfrm>
-            <a:off x="6355079" y="2514600"/>
-            <a:ext cx="822960" cy="1097280"/>
-          </a:xfrm>
-          <a:prstGeom prst="rect">
-            <a:avLst/>
-          </a:prstGeom>
-          <a:noFill/>
-        </p:spPr>
-        <p:txBody>
-          <a:bodyPr wrap="square" lIns="0" rIns="0" tIns="0" bIns="0" anchor="ctr">
-            <a:spAutoFit/>
-          </a:bodyPr>
-          <a:lstStyle/>
-          <a:p>
-            <a:pPr algn="ctr"/>
-            <a:r>
-              <a:rPr sz="2600" b="1">
-                <a:solidFill>
-                  <a:srgbClr val="FFFFFF"/>
-                </a:solidFill>
-                <a:latin typeface="Microsoft YaHei"/>
-              </a:rPr>
-              <a:t>04</a:t>
-            </a:r>
-          </a:p>
-        </p:txBody>
-      </p:sp>
-      <p:sp>
-        <p:nvSpPr>
-          <p:cNvPr id="24" name="TextBox 23"/>
-          <p:cNvSpPr txBox="1"/>
-          <p:nvPr/>
-        </p:nvSpPr>
-        <p:spPr>
-          <a:xfrm>
-            <a:off x="7360919" y="2606040"/>
-            <a:ext cx="4480560" cy="457200"/>
-          </a:xfrm>
-          <a:prstGeom prst="rect">
-            <a:avLst/>
-          </a:prstGeom>
-          <a:noFill/>
-        </p:spPr>
-        <p:txBody>
-          <a:bodyPr wrap="square" lIns="0" rIns="0" tIns="0" bIns="0" anchor="t">
-            <a:spAutoFit/>
-          </a:bodyPr>
-          <a:lstStyle/>
-          <a:p>
-            <a:pPr algn="l"/>
-            <a:r>
-              <a:rPr sz="1700" b="1">
-                <a:solidFill>
-                  <a:srgbClr val="0B1F3A"/>
-                </a:solidFill>
-                <a:latin typeface="Microsoft YaHei"/>
-              </a:rPr>
-              <a:t>学历</a:t>
-            </a:r>
-          </a:p>
-        </p:txBody>
-      </p:sp>
-      <p:sp>
-        <p:nvSpPr>
-          <p:cNvPr id="25" name="TextBox 24"/>
-          <p:cNvSpPr txBox="1"/>
-          <p:nvPr/>
-        </p:nvSpPr>
-        <p:spPr>
-          <a:xfrm>
-            <a:off x="7360919" y="3063240"/>
-            <a:ext cx="4480560" cy="548640"/>
-          </a:xfrm>
-          <a:prstGeom prst="rect">
-            <a:avLst/>
-          </a:prstGeom>
-          <a:noFill/>
-        </p:spPr>
-        <p:txBody>
-          <a:bodyPr wrap="square" lIns="0" rIns="0" tIns="0" bIns="0" anchor="t">
-            <a:spAutoFit/>
-          </a:bodyPr>
-          <a:lstStyle/>
-          <a:p>
-            <a:pPr algn="l"/>
-            <a:r>
-              <a:rPr sz="1200" b="0">
-                <a:solidFill>
-                  <a:srgbClr val="222222"/>
-                </a:solidFill>
-                <a:latin typeface="Microsoft YaHei"/>
-              </a:rPr>
-              <a:t>美国改招高中生;个案出现 1 亿美金薪酬</a:t>
-            </a:r>
-          </a:p>
-        </p:txBody>
-      </p:sp>
-      <p:sp>
-        <p:nvSpPr>
-          <p:cNvPr id="26" name="Rectangle 25"/>
-          <p:cNvSpPr/>
-          <p:nvPr/>
-        </p:nvSpPr>
-        <p:spPr>
-          <a:xfrm>
-            <a:off x="548640" y="3749039"/>
-            <a:ext cx="5577840" cy="1097280"/>
-          </a:xfrm>
-          <a:prstGeom prst="rect">
-            <a:avLst/>
-          </a:prstGeom>
-          <a:solidFill>
-            <a:srgbClr val="F5F1E6"/>
-          </a:solidFill>
-          <a:ln>
-            <a:noFill/>
-          </a:ln>
-          <a:effectLst/>
-        </p:spPr>
-        <p:style>
-          <a:lnRef idx="1">
-            <a:schemeClr val="accent1"/>
-          </a:lnRef>
-          <a:fillRef idx="3">
-            <a:schemeClr val="accent1"/>
-          </a:fillRef>
-          <a:effectRef idx="2">
-            <a:schemeClr val="accent1"/>
-          </a:effectRef>
-          <a:fontRef idx="minor">
-            <a:schemeClr val="lt1"/>
-          </a:fontRef>
-        </p:style>
-        <p:txBody>
-          <a:bodyPr rtlCol="0" anchor="ctr"/>
-          <a:lstStyle/>
-          <a:p>
-            <a:pPr algn="ctr"/>
-          </a:p>
-        </p:txBody>
-      </p:sp>
-      <p:sp>
-        <p:nvSpPr>
-          <p:cNvPr id="27" name="Rectangle 26"/>
-          <p:cNvSpPr/>
-          <p:nvPr/>
-        </p:nvSpPr>
-        <p:spPr>
-          <a:xfrm>
-            <a:off x="548640" y="3749039"/>
-            <a:ext cx="822960" cy="1097280"/>
-          </a:xfrm>
-          <a:prstGeom prst="rect">
-            <a:avLst/>
-          </a:prstGeom>
-          <a:solidFill>
-            <a:srgbClr val="B01F24"/>
-          </a:solidFill>
-          <a:ln>
-            <a:noFill/>
-          </a:ln>
-          <a:effectLst/>
-        </p:spPr>
-        <p:style>
-          <a:lnRef idx="1">
-            <a:schemeClr val="accent1"/>
-          </a:lnRef>
-          <a:fillRef idx="3">
-            <a:schemeClr val="accent1"/>
-          </a:fillRef>
-          <a:effectRef idx="2">
-            <a:schemeClr val="accent1"/>
-          </a:effectRef>
-          <a:fontRef idx="minor">
-            <a:schemeClr val="lt1"/>
-          </a:fontRef>
-        </p:style>
-        <p:txBody>
-          <a:bodyPr rtlCol="0" anchor="ctr"/>
-          <a:lstStyle/>
-          <a:p>
-            <a:pPr algn="ctr"/>
-          </a:p>
-        </p:txBody>
-      </p:sp>
-      <p:sp>
-        <p:nvSpPr>
-          <p:cNvPr id="28" name="TextBox 27"/>
-          <p:cNvSpPr txBox="1"/>
-          <p:nvPr/>
-        </p:nvSpPr>
-        <p:spPr>
-          <a:xfrm>
-            <a:off x="548640" y="3749039"/>
-            <a:ext cx="822960" cy="1097280"/>
-          </a:xfrm>
-          <a:prstGeom prst="rect">
-            <a:avLst/>
-          </a:prstGeom>
-          <a:noFill/>
-        </p:spPr>
-        <p:txBody>
-          <a:bodyPr wrap="square" lIns="0" rIns="0" tIns="0" bIns="0" anchor="ctr">
-            <a:spAutoFit/>
-          </a:bodyPr>
-          <a:lstStyle/>
-          <a:p>
-            <a:pPr algn="ctr"/>
-            <a:r>
-              <a:rPr sz="2600" b="1">
-                <a:solidFill>
-                  <a:srgbClr val="FFFFFF"/>
-                </a:solidFill>
-                <a:latin typeface="Microsoft YaHei"/>
-              </a:rPr>
-              <a:t>05</a:t>
-            </a:r>
-          </a:p>
-        </p:txBody>
-      </p:sp>
-      <p:sp>
-        <p:nvSpPr>
-          <p:cNvPr id="29" name="TextBox 28"/>
-          <p:cNvSpPr txBox="1"/>
-          <p:nvPr/>
-        </p:nvSpPr>
-        <p:spPr>
-          <a:xfrm>
-            <a:off x="1554480" y="3840479"/>
-            <a:ext cx="4480560" cy="457200"/>
-          </a:xfrm>
-          <a:prstGeom prst="rect">
-            <a:avLst/>
-          </a:prstGeom>
-          <a:noFill/>
-        </p:spPr>
-        <p:txBody>
-          <a:bodyPr wrap="square" lIns="0" rIns="0" tIns="0" bIns="0" anchor="t">
-            <a:spAutoFit/>
-          </a:bodyPr>
-          <a:lstStyle/>
-          <a:p>
-            <a:pPr algn="l"/>
-            <a:r>
-              <a:rPr sz="1700" b="1">
-                <a:solidFill>
-                  <a:srgbClr val="0B1F3A"/>
-                </a:solidFill>
-                <a:latin typeface="Microsoft YaHei"/>
-              </a:rPr>
-              <a:t>软件 / 码农</a:t>
-            </a:r>
-          </a:p>
-        </p:txBody>
-      </p:sp>
-      <p:sp>
-        <p:nvSpPr>
-          <p:cNvPr id="30" name="TextBox 29"/>
-          <p:cNvSpPr txBox="1"/>
-          <p:nvPr/>
-        </p:nvSpPr>
-        <p:spPr>
-          <a:xfrm>
-            <a:off x="1554480" y="4297679"/>
-            <a:ext cx="4480560" cy="548640"/>
-          </a:xfrm>
-          <a:prstGeom prst="rect">
-            <a:avLst/>
-          </a:prstGeom>
-          <a:noFill/>
-        </p:spPr>
-        <p:txBody>
-          <a:bodyPr wrap="square" lIns="0" rIns="0" tIns="0" bIns="0" anchor="t">
-            <a:spAutoFit/>
-          </a:bodyPr>
-          <a:lstStyle/>
-          <a:p>
-            <a:pPr algn="l"/>
-            <a:r>
-              <a:rPr sz="1200" b="0">
-                <a:solidFill>
-                  <a:srgbClr val="222222"/>
-                </a:solidFill>
-                <a:latin typeface="Microsoft YaHei"/>
-              </a:rPr>
-              <a:t>AI 出代码;五大行/地产软件开源后无价值</a:t>
-            </a:r>
-          </a:p>
-        </p:txBody>
-      </p:sp>
-      <p:sp>
-        <p:nvSpPr>
-          <p:cNvPr id="31" name="Rectangle 30"/>
-          <p:cNvSpPr/>
-          <p:nvPr/>
-        </p:nvSpPr>
-        <p:spPr>
-          <a:xfrm>
-            <a:off x="6355079" y="3749039"/>
-            <a:ext cx="5577840" cy="1097280"/>
-          </a:xfrm>
-          <a:prstGeom prst="rect">
-            <a:avLst/>
-          </a:prstGeom>
-          <a:solidFill>
-            <a:srgbClr val="F5F1E6"/>
-          </a:solidFill>
-          <a:ln>
-            <a:noFill/>
-          </a:ln>
-          <a:effectLst/>
-        </p:spPr>
-        <p:style>
-          <a:lnRef idx="1">
-            <a:schemeClr val="accent1"/>
-          </a:lnRef>
-          <a:fillRef idx="3">
-            <a:schemeClr val="accent1"/>
-          </a:fillRef>
-          <a:effectRef idx="2">
-            <a:schemeClr val="accent1"/>
-          </a:effectRef>
-          <a:fontRef idx="minor">
-            <a:schemeClr val="lt1"/>
-          </a:fontRef>
-        </p:style>
-        <p:txBody>
-          <a:bodyPr rtlCol="0" anchor="ctr"/>
-          <a:lstStyle/>
-          <a:p>
-            <a:pPr algn="ctr"/>
-          </a:p>
-        </p:txBody>
-      </p:sp>
-      <p:sp>
-        <p:nvSpPr>
-          <p:cNvPr id="32" name="Rectangle 31"/>
-          <p:cNvSpPr/>
-          <p:nvPr/>
-        </p:nvSpPr>
-        <p:spPr>
-          <a:xfrm>
-            <a:off x="6355079" y="3749039"/>
-            <a:ext cx="822960" cy="1097280"/>
-          </a:xfrm>
-          <a:prstGeom prst="rect">
-            <a:avLst/>
-          </a:prstGeom>
-          <a:solidFill>
-            <a:srgbClr val="B01F24"/>
-          </a:solidFill>
-          <a:ln>
-            <a:noFill/>
-          </a:ln>
-          <a:effectLst/>
-        </p:spPr>
-        <p:style>
-          <a:lnRef idx="1">
-            <a:schemeClr val="accent1"/>
-          </a:lnRef>
-          <a:fillRef idx="3">
-            <a:schemeClr val="accent1"/>
-          </a:fillRef>
-          <a:effectRef idx="2">
-            <a:schemeClr val="accent1"/>
-          </a:effectRef>
-          <a:fontRef idx="minor">
-            <a:schemeClr val="lt1"/>
-          </a:fontRef>
-        </p:style>
-        <p:txBody>
-          <a:bodyPr rtlCol="0" anchor="ctr"/>
-          <a:lstStyle/>
-          <a:p>
-            <a:pPr algn="ctr"/>
-          </a:p>
-        </p:txBody>
-      </p:sp>
-      <p:sp>
-        <p:nvSpPr>
-          <p:cNvPr id="33" name="TextBox 32"/>
-          <p:cNvSpPr txBox="1"/>
-          <p:nvPr/>
-        </p:nvSpPr>
-        <p:spPr>
-          <a:xfrm>
-            <a:off x="6355079" y="3749039"/>
-            <a:ext cx="822960" cy="1097280"/>
-          </a:xfrm>
-          <a:prstGeom prst="rect">
-            <a:avLst/>
-          </a:prstGeom>
-          <a:noFill/>
-        </p:spPr>
-        <p:txBody>
-          <a:bodyPr wrap="square" lIns="0" rIns="0" tIns="0" bIns="0" anchor="ctr">
-            <a:spAutoFit/>
-          </a:bodyPr>
-          <a:lstStyle/>
-          <a:p>
-            <a:pPr algn="ctr"/>
-            <a:r>
-              <a:rPr sz="2600" b="1">
-                <a:solidFill>
-                  <a:srgbClr val="FFFFFF"/>
-                </a:solidFill>
-                <a:latin typeface="Microsoft YaHei"/>
-              </a:rPr>
-              <a:t>06</a:t>
-            </a:r>
-          </a:p>
-        </p:txBody>
-      </p:sp>
-      <p:sp>
-        <p:nvSpPr>
-          <p:cNvPr id="34" name="TextBox 33"/>
-          <p:cNvSpPr txBox="1"/>
-          <p:nvPr/>
-        </p:nvSpPr>
-        <p:spPr>
-          <a:xfrm>
-            <a:off x="7360919" y="3840479"/>
-            <a:ext cx="4480560" cy="457200"/>
-          </a:xfrm>
-          <a:prstGeom prst="rect">
-            <a:avLst/>
-          </a:prstGeom>
-          <a:noFill/>
-        </p:spPr>
-        <p:txBody>
-          <a:bodyPr wrap="square" lIns="0" rIns="0" tIns="0" bIns="0" anchor="t">
-            <a:spAutoFit/>
-          </a:bodyPr>
-          <a:lstStyle/>
-          <a:p>
-            <a:pPr algn="l"/>
-            <a:r>
-              <a:rPr sz="1700" b="1">
-                <a:solidFill>
-                  <a:srgbClr val="0B1F3A"/>
-                </a:solidFill>
-                <a:latin typeface="Microsoft YaHei"/>
-              </a:rPr>
-              <a:t>传统车企</a:t>
-            </a:r>
-          </a:p>
-        </p:txBody>
-      </p:sp>
-      <p:sp>
-        <p:nvSpPr>
-          <p:cNvPr id="35" name="TextBox 34"/>
-          <p:cNvSpPr txBox="1"/>
-          <p:nvPr/>
-        </p:nvSpPr>
-        <p:spPr>
-          <a:xfrm>
-            <a:off x="7360919" y="4297679"/>
-            <a:ext cx="4480560" cy="548640"/>
-          </a:xfrm>
-          <a:prstGeom prst="rect">
-            <a:avLst/>
-          </a:prstGeom>
-          <a:noFill/>
-        </p:spPr>
-        <p:txBody>
-          <a:bodyPr wrap="square" lIns="0" rIns="0" tIns="0" bIns="0" anchor="t">
-            <a:spAutoFit/>
-          </a:bodyPr>
-          <a:lstStyle/>
-          <a:p>
-            <a:pPr algn="l"/>
-            <a:r>
-              <a:rPr sz="1200" b="0">
-                <a:solidFill>
-                  <a:srgbClr val="222222"/>
-                </a:solidFill>
-                <a:latin typeface="Microsoft YaHei"/>
-              </a:rPr>
-              <a:t>下一个全线崩溃的赛道</a:t>
-            </a:r>
-          </a:p>
-        </p:txBody>
-      </p:sp>
-      <p:sp>
-        <p:nvSpPr>
-          <p:cNvPr id="36" name="Rectangle 35"/>
-          <p:cNvSpPr/>
-          <p:nvPr/>
-        </p:nvSpPr>
-        <p:spPr>
-          <a:xfrm>
-            <a:off x="548640" y="4983480"/>
-            <a:ext cx="5577840" cy="1097280"/>
-          </a:xfrm>
-          <a:prstGeom prst="rect">
-            <a:avLst/>
-          </a:prstGeom>
-          <a:solidFill>
-            <a:srgbClr val="F5F1E6"/>
-          </a:solidFill>
-          <a:ln>
-            <a:noFill/>
-          </a:ln>
-          <a:effectLst/>
-        </p:spPr>
-        <p:style>
-          <a:lnRef idx="1">
-            <a:schemeClr val="accent1"/>
-          </a:lnRef>
-          <a:fillRef idx="3">
-            <a:schemeClr val="accent1"/>
-          </a:fillRef>
-          <a:effectRef idx="2">
-            <a:schemeClr val="accent1"/>
-          </a:effectRef>
-          <a:fontRef idx="minor">
-            <a:schemeClr val="lt1"/>
-          </a:fontRef>
-        </p:style>
-        <p:txBody>
-          <a:bodyPr rtlCol="0" anchor="ctr"/>
-          <a:lstStyle/>
-          <a:p>
-            <a:pPr algn="ctr"/>
-          </a:p>
-        </p:txBody>
-      </p:sp>
-      <p:sp>
-        <p:nvSpPr>
-          <p:cNvPr id="37" name="Rectangle 36"/>
-          <p:cNvSpPr/>
-          <p:nvPr/>
-        </p:nvSpPr>
-        <p:spPr>
-          <a:xfrm>
-            <a:off x="548640" y="4983480"/>
-            <a:ext cx="822960" cy="1097280"/>
-          </a:xfrm>
-          <a:prstGeom prst="rect">
-            <a:avLst/>
-          </a:prstGeom>
-          <a:solidFill>
-            <a:srgbClr val="B01F24"/>
-          </a:solidFill>
-          <a:ln>
-            <a:noFill/>
-          </a:ln>
-          <a:effectLst/>
-        </p:spPr>
-        <p:style>
-          <a:lnRef idx="1">
-            <a:schemeClr val="accent1"/>
-          </a:lnRef>
-          <a:fillRef idx="3">
-            <a:schemeClr val="accent1"/>
-          </a:fillRef>
-          <a:effectRef idx="2">
-            <a:schemeClr val="accent1"/>
-          </a:effectRef>
-          <a:fontRef idx="minor">
-            <a:schemeClr val="lt1"/>
-          </a:fontRef>
-        </p:style>
-        <p:txBody>
-          <a:bodyPr rtlCol="0" anchor="ctr"/>
-          <a:lstStyle/>
-          <a:p>
-            <a:pPr algn="ctr"/>
-          </a:p>
-        </p:txBody>
-      </p:sp>
-      <p:sp>
-        <p:nvSpPr>
-          <p:cNvPr id="38" name="TextBox 37"/>
-          <p:cNvSpPr txBox="1"/>
-          <p:nvPr/>
-        </p:nvSpPr>
-        <p:spPr>
-          <a:xfrm>
-            <a:off x="548640" y="4983480"/>
-            <a:ext cx="822960" cy="1097280"/>
-          </a:xfrm>
-          <a:prstGeom prst="rect">
-            <a:avLst/>
-          </a:prstGeom>
-          <a:noFill/>
-        </p:spPr>
-        <p:txBody>
-          <a:bodyPr wrap="square" lIns="0" rIns="0" tIns="0" bIns="0" anchor="ctr">
-            <a:spAutoFit/>
-          </a:bodyPr>
-          <a:lstStyle/>
-          <a:p>
-            <a:pPr algn="ctr"/>
-            <a:r>
-              <a:rPr sz="2600" b="1">
-                <a:solidFill>
-                  <a:srgbClr val="FFFFFF"/>
-                </a:solidFill>
-                <a:latin typeface="Microsoft YaHei"/>
-              </a:rPr>
-              <a:t>07</a:t>
-            </a:r>
-          </a:p>
-        </p:txBody>
-      </p:sp>
-      <p:sp>
-        <p:nvSpPr>
-          <p:cNvPr id="39" name="TextBox 38"/>
-          <p:cNvSpPr txBox="1"/>
-          <p:nvPr/>
-        </p:nvSpPr>
-        <p:spPr>
-          <a:xfrm>
-            <a:off x="1554480" y="5074920"/>
-            <a:ext cx="4480560" cy="457200"/>
-          </a:xfrm>
-          <a:prstGeom prst="rect">
-            <a:avLst/>
-          </a:prstGeom>
-          <a:noFill/>
-        </p:spPr>
-        <p:txBody>
-          <a:bodyPr wrap="square" lIns="0" rIns="0" tIns="0" bIns="0" anchor="t">
-            <a:spAutoFit/>
-          </a:bodyPr>
-          <a:lstStyle/>
-          <a:p>
-            <a:pPr algn="l"/>
-            <a:r>
-              <a:rPr sz="1700" b="1">
-                <a:solidFill>
-                  <a:srgbClr val="0B1F3A"/>
-                </a:solidFill>
-                <a:latin typeface="Microsoft YaHei"/>
-              </a:rPr>
-              <a:t>银行</a:t>
-            </a:r>
-          </a:p>
-        </p:txBody>
-      </p:sp>
-      <p:sp>
-        <p:nvSpPr>
-          <p:cNvPr id="40" name="TextBox 39"/>
-          <p:cNvSpPr txBox="1"/>
-          <p:nvPr/>
-        </p:nvSpPr>
-        <p:spPr>
-          <a:xfrm>
-            <a:off x="1554480" y="5532120"/>
-            <a:ext cx="4480560" cy="548640"/>
-          </a:xfrm>
-          <a:prstGeom prst="rect">
-            <a:avLst/>
-          </a:prstGeom>
-          <a:noFill/>
-        </p:spPr>
-        <p:txBody>
-          <a:bodyPr wrap="square" lIns="0" rIns="0" tIns="0" bIns="0" anchor="t">
-            <a:spAutoFit/>
-          </a:bodyPr>
-          <a:lstStyle/>
-          <a:p>
-            <a:pPr algn="l"/>
-            <a:r>
-              <a:rPr sz="1200" b="0">
-                <a:solidFill>
-                  <a:srgbClr val="222222"/>
-                </a:solidFill>
-                <a:latin typeface="Microsoft YaHei"/>
-              </a:rPr>
-              <a:t>玩银行的时代彻底结束</a:t>
-            </a:r>
-          </a:p>
-        </p:txBody>
-      </p:sp>
-      <p:sp>
-        <p:nvSpPr>
-          <p:cNvPr id="41" name="Rectangle 40"/>
-          <p:cNvSpPr/>
-          <p:nvPr/>
-        </p:nvSpPr>
-        <p:spPr>
-          <a:xfrm>
-            <a:off x="6355079" y="4983480"/>
-            <a:ext cx="5577840" cy="1097280"/>
-          </a:xfrm>
-          <a:prstGeom prst="rect">
-            <a:avLst/>
-          </a:prstGeom>
-          <a:solidFill>
-            <a:srgbClr val="F5F1E6"/>
-          </a:solidFill>
-          <a:ln>
-            <a:noFill/>
-          </a:ln>
-          <a:effectLst/>
-        </p:spPr>
-        <p:style>
-          <a:lnRef idx="1">
-            <a:schemeClr val="accent1"/>
-          </a:lnRef>
-          <a:fillRef idx="3">
-            <a:schemeClr val="accent1"/>
-          </a:fillRef>
-          <a:effectRef idx="2">
-            <a:schemeClr val="accent1"/>
-          </a:effectRef>
-          <a:fontRef idx="minor">
-            <a:schemeClr val="lt1"/>
-          </a:fontRef>
-        </p:style>
-        <p:txBody>
-          <a:bodyPr rtlCol="0" anchor="ctr"/>
-          <a:lstStyle/>
-          <a:p>
-            <a:pPr algn="ctr"/>
-          </a:p>
-        </p:txBody>
-      </p:sp>
-      <p:sp>
-        <p:nvSpPr>
-          <p:cNvPr id="42" name="Rectangle 41"/>
-          <p:cNvSpPr/>
-          <p:nvPr/>
-        </p:nvSpPr>
-        <p:spPr>
-          <a:xfrm>
-            <a:off x="6355079" y="4983480"/>
-            <a:ext cx="822960" cy="1097280"/>
-          </a:xfrm>
-          <a:prstGeom prst="rect">
-            <a:avLst/>
-          </a:prstGeom>
-          <a:solidFill>
-            <a:srgbClr val="B01F24"/>
-          </a:solidFill>
-          <a:ln>
-            <a:noFill/>
-          </a:ln>
-          <a:effectLst/>
-        </p:spPr>
-        <p:style>
-          <a:lnRef idx="1">
-            <a:schemeClr val="accent1"/>
-          </a:lnRef>
-          <a:fillRef idx="3">
-            <a:schemeClr val="accent1"/>
-          </a:fillRef>
-          <a:effectRef idx="2">
-            <a:schemeClr val="accent1"/>
-          </a:effectRef>
-          <a:fontRef idx="minor">
-            <a:schemeClr val="lt1"/>
-          </a:fontRef>
-        </p:style>
-        <p:txBody>
-          <a:bodyPr rtlCol="0" anchor="ctr"/>
-          <a:lstStyle/>
-          <a:p>
-            <a:pPr algn="ctr"/>
-          </a:p>
-        </p:txBody>
-      </p:sp>
-      <p:sp>
-        <p:nvSpPr>
-          <p:cNvPr id="43" name="TextBox 42"/>
-          <p:cNvSpPr txBox="1"/>
-          <p:nvPr/>
-        </p:nvSpPr>
-        <p:spPr>
-          <a:xfrm>
-            <a:off x="6355079" y="4983480"/>
-            <a:ext cx="822960" cy="1097280"/>
-          </a:xfrm>
-          <a:prstGeom prst="rect">
-            <a:avLst/>
-          </a:prstGeom>
-          <a:noFill/>
-        </p:spPr>
-        <p:txBody>
-          <a:bodyPr wrap="square" lIns="0" rIns="0" tIns="0" bIns="0" anchor="ctr">
-            <a:spAutoFit/>
-          </a:bodyPr>
-          <a:lstStyle/>
-          <a:p>
-            <a:pPr algn="ctr"/>
-            <a:r>
-              <a:rPr sz="2600" b="1">
-                <a:solidFill>
-                  <a:srgbClr val="FFFFFF"/>
-                </a:solidFill>
-                <a:latin typeface="Microsoft YaHei"/>
-              </a:rPr>
-              <a:t>08</a:t>
-            </a:r>
-          </a:p>
-        </p:txBody>
-      </p:sp>
-      <p:sp>
-        <p:nvSpPr>
-          <p:cNvPr id="44" name="TextBox 43"/>
-          <p:cNvSpPr txBox="1"/>
-          <p:nvPr/>
-        </p:nvSpPr>
-        <p:spPr>
-          <a:xfrm>
-            <a:off x="7360919" y="5074920"/>
-            <a:ext cx="4480560" cy="457200"/>
-          </a:xfrm>
-          <a:prstGeom prst="rect">
-            <a:avLst/>
-          </a:prstGeom>
-          <a:noFill/>
-        </p:spPr>
-        <p:txBody>
-          <a:bodyPr wrap="square" lIns="0" rIns="0" tIns="0" bIns="0" anchor="t">
-            <a:spAutoFit/>
-          </a:bodyPr>
-          <a:lstStyle/>
-          <a:p>
-            <a:pPr algn="l"/>
-            <a:r>
-              <a:rPr sz="1700" b="1">
-                <a:solidFill>
-                  <a:srgbClr val="0B1F3A"/>
-                </a:solidFill>
-                <a:latin typeface="Microsoft YaHei"/>
-              </a:rPr>
-              <a:t>国企(普遍)</a:t>
-            </a:r>
-          </a:p>
-        </p:txBody>
-      </p:sp>
-      <p:sp>
-        <p:nvSpPr>
-          <p:cNvPr id="45" name="TextBox 44"/>
-          <p:cNvSpPr txBox="1"/>
-          <p:nvPr/>
-        </p:nvSpPr>
-        <p:spPr>
-          <a:xfrm>
-            <a:off x="7360919" y="5532120"/>
-            <a:ext cx="4480560" cy="548640"/>
-          </a:xfrm>
-          <a:prstGeom prst="rect">
-            <a:avLst/>
-          </a:prstGeom>
-          <a:noFill/>
-        </p:spPr>
-        <p:txBody>
-          <a:bodyPr wrap="square" lIns="0" rIns="0" tIns="0" bIns="0" anchor="t">
-            <a:spAutoFit/>
-          </a:bodyPr>
-          <a:lstStyle/>
-          <a:p>
-            <a:pPr algn="l"/>
-            <a:r>
-              <a:rPr sz="1200" b="0">
-                <a:solidFill>
-                  <a:srgbClr val="222222"/>
-                </a:solidFill>
-                <a:latin typeface="Microsoft YaHei"/>
-              </a:rPr>
-              <a:t>三光:赔光/偷光/抢光</a:t>
-            </a:r>
-          </a:p>
-        </p:txBody>
-      </p:sp>
-      <p:sp>
-        <p:nvSpPr>
-          <p:cNvPr id="46" name="TextBox 45"/>
           <p:cNvSpPr txBox="1"/>
           <p:nvPr/>
         </p:nvSpPr>
@@ -6081,7 +6082,7 @@
       </p:sp>
       <p:sp>
         <p:nvSpPr>
-          <p:cNvPr id="47" name="TextBox 46"/>
+          <p:cNvPr id="21" name="TextBox 20"/>
           <p:cNvSpPr txBox="1"/>
           <p:nvPr/>
         </p:nvSpPr>
@@ -6109,7 +6110,7 @@
                 </a:solidFill>
                 <a:latin typeface="Microsoft YaHei"/>
               </a:rPr>
-              <a:t>11</a:t>
+              <a:t>10</a:t>
             </a:r>
           </a:p>
         </p:txBody>
@@ -6250,7 +6251,7 @@
                 </a:solidFill>
                 <a:latin typeface="Microsoft YaHei"/>
               </a:rPr>
-              <a:t>07 · AI · 外资 · 香港</a:t>
+              <a:t>06 · 「老登」行业</a:t>
             </a:r>
           </a:p>
         </p:txBody>
@@ -6285,7 +6286,7 @@
                 </a:solidFill>
                 <a:latin typeface="Microsoft YaHei"/>
               </a:rPr>
-              <a:t>其他重要趋势</a:t>
+              <a:t>八大资产/领域贬值清单</a:t>
             </a:r>
           </a:p>
         </p:txBody>
@@ -6299,284 +6300,7 @@
         <p:spPr>
           <a:xfrm>
             <a:off x="548640" y="1280160"/>
-            <a:ext cx="5532120" cy="4937760"/>
-          </a:xfrm>
-          <a:prstGeom prst="rect">
-            <a:avLst/>
-          </a:prstGeom>
-          <a:solidFill>
-            <a:srgbClr val="0B1F3A"/>
-          </a:solidFill>
-          <a:ln>
-            <a:noFill/>
-          </a:ln>
-          <a:effectLst/>
-        </p:spPr>
-        <p:style>
-          <a:lnRef idx="1">
-            <a:schemeClr val="accent1"/>
-          </a:lnRef>
-          <a:fillRef idx="3">
-            <a:schemeClr val="accent1"/>
-          </a:fillRef>
-          <a:effectRef idx="2">
-            <a:schemeClr val="accent1"/>
-          </a:effectRef>
-          <a:fontRef idx="minor">
-            <a:schemeClr val="lt1"/>
-          </a:fontRef>
-        </p:style>
-        <p:txBody>
-          <a:bodyPr rtlCol="0" anchor="ctr"/>
-          <a:lstStyle/>
-          <a:p>
-            <a:pPr algn="ctr"/>
-          </a:p>
-        </p:txBody>
-      </p:sp>
-      <p:sp>
-        <p:nvSpPr>
-          <p:cNvPr id="7" name="TextBox 6"/>
-          <p:cNvSpPr txBox="1"/>
-          <p:nvPr/>
-        </p:nvSpPr>
-        <p:spPr>
-          <a:xfrm>
-            <a:off x="731520" y="1417320"/>
-            <a:ext cx="5303520" cy="457200"/>
-          </a:xfrm>
-          <a:prstGeom prst="rect">
-            <a:avLst/>
-          </a:prstGeom>
-          <a:noFill/>
-        </p:spPr>
-        <p:txBody>
-          <a:bodyPr wrap="square" lIns="0" rIns="0" tIns="0" bIns="0" anchor="t">
-            <a:spAutoFit/>
-          </a:bodyPr>
-          <a:lstStyle/>
-          <a:p>
-            <a:pPr algn="l"/>
-            <a:r>
-              <a:rPr sz="2000" b="1">
-                <a:solidFill>
-                  <a:srgbClr val="C9A227"/>
-                </a:solidFill>
-                <a:latin typeface="Microsoft YaHei"/>
-              </a:rPr>
-              <a:t>AI 智能体</a:t>
-            </a:r>
-          </a:p>
-        </p:txBody>
-      </p:sp>
-      <p:sp>
-        <p:nvSpPr>
-          <p:cNvPr id="8" name="TextBox 7"/>
-          <p:cNvSpPr txBox="1"/>
-          <p:nvPr/>
-        </p:nvSpPr>
-        <p:spPr>
-          <a:xfrm>
-            <a:off x="777240" y="1965960"/>
-            <a:ext cx="5212080" cy="4114800"/>
-          </a:xfrm>
-          <a:prstGeom prst="rect">
-            <a:avLst/>
-          </a:prstGeom>
-          <a:noFill/>
-        </p:spPr>
-        <p:txBody>
-          <a:bodyPr wrap="square" lIns="0" rIns="0" tIns="0" bIns="0">
-            <a:spAutoFit/>
-          </a:bodyPr>
-          <a:lstStyle/>
-          <a:p>
-            <a:pPr algn="l">
-              <a:lnSpc>
-                <a:spcPct val="125000"/>
-              </a:lnSpc>
-            </a:pPr>
-            <a:r>
-              <a:rPr sz="1300">
-                <a:solidFill>
-                  <a:srgbClr val="C9A227"/>
-                </a:solidFill>
-                <a:latin typeface="Microsoft YaHei"/>
-              </a:rPr>
-              <a:t>●  </a:t>
-            </a:r>
-            <a:r>
-              <a:rPr sz="1300">
-                <a:solidFill>
-                  <a:srgbClr val="FFFFFF"/>
-                </a:solidFill>
-                <a:latin typeface="Microsoft YaHei"/>
-              </a:rPr>
-              <a:t>「看不见的智能体」= 真正的爆发点(指节盖大小)</a:t>
-            </a:r>
-          </a:p>
-          <a:p>
-            <a:pPr algn="l">
-              <a:lnSpc>
-                <a:spcPct val="125000"/>
-              </a:lnSpc>
-            </a:pPr>
-            <a:r>
-              <a:rPr sz="1300">
-                <a:solidFill>
-                  <a:srgbClr val="C9A227"/>
-                </a:solidFill>
-                <a:latin typeface="Microsoft YaHei"/>
-              </a:rPr>
-              <a:t>●  </a:t>
-            </a:r>
-            <a:r>
-              <a:rPr sz="1300">
-                <a:solidFill>
-                  <a:srgbClr val="FFFFFF"/>
-                </a:solidFill>
-                <a:latin typeface="Microsoft YaHei"/>
-              </a:rPr>
-              <a:t>看得见的机器人(酒店/产线)= 低价值</a:t>
-            </a:r>
-          </a:p>
-          <a:p>
-            <a:pPr algn="l">
-              <a:lnSpc>
-                <a:spcPct val="125000"/>
-              </a:lnSpc>
-            </a:pPr>
-            <a:r>
-              <a:rPr sz="1300">
-                <a:solidFill>
-                  <a:srgbClr val="C9A227"/>
-                </a:solidFill>
-                <a:latin typeface="Microsoft YaHei"/>
-              </a:rPr>
-              <a:t>●  </a:t>
-            </a:r>
-            <a:r>
-              <a:rPr sz="1300">
-                <a:solidFill>
-                  <a:srgbClr val="FFFFFF"/>
-                </a:solidFill>
-                <a:latin typeface="Microsoft YaHei"/>
-              </a:rPr>
-              <a:t>看不见的智能体 = 看得见的 × 10</a:t>
-            </a:r>
-          </a:p>
-          <a:p>
-            <a:pPr algn="l">
-              <a:lnSpc>
-                <a:spcPct val="125000"/>
-              </a:lnSpc>
-            </a:pPr>
-            <a:r>
-              <a:rPr sz="1300">
-                <a:solidFill>
-                  <a:srgbClr val="C9A227"/>
-                </a:solidFill>
-                <a:latin typeface="Microsoft YaHei"/>
-              </a:rPr>
-              <a:t>●  </a:t>
-            </a:r>
-            <a:r>
-              <a:rPr sz="1300">
-                <a:solidFill>
-                  <a:srgbClr val="FFFFFF"/>
-                </a:solidFill>
-                <a:latin typeface="Microsoft YaHei"/>
-              </a:rPr>
-              <a:t>AI 时代中文重新重要:提示词越精准,完成度越高</a:t>
-            </a:r>
-          </a:p>
-          <a:p>
-            <a:pPr algn="l">
-              <a:lnSpc>
-                <a:spcPct val="125000"/>
-              </a:lnSpc>
-            </a:pPr>
-            <a:r>
-              <a:rPr sz="1300">
-                <a:solidFill>
-                  <a:srgbClr val="C9A227"/>
-                </a:solidFill>
-                <a:latin typeface="Microsoft YaHei"/>
-              </a:rPr>
-              <a:t>●  </a:t>
-            </a:r>
-            <a:r>
-              <a:rPr sz="1300">
-                <a:solidFill>
-                  <a:srgbClr val="FFFFFF"/>
-                </a:solidFill>
-                <a:latin typeface="Microsoft YaHei"/>
-              </a:rPr>
-              <a:t>可用模型:DeepSeek、Kimi 2.6、赤浦、Cursor、Cloud 4.7</a:t>
-            </a:r>
-          </a:p>
-          <a:p>
-            <a:pPr algn="l">
-              <a:lnSpc>
-                <a:spcPct val="125000"/>
-              </a:lnSpc>
-            </a:pPr>
-            <a:r>
-              <a:rPr sz="1300">
-                <a:solidFill>
-                  <a:srgbClr val="C9A227"/>
-                </a:solidFill>
-                <a:latin typeface="Microsoft YaHei"/>
-              </a:rPr>
-              <a:t>●  </a:t>
-            </a:r>
-            <a:r>
-              <a:rPr sz="1300">
-                <a:solidFill>
-                  <a:srgbClr val="FFFFFF"/>
-                </a:solidFill>
-                <a:latin typeface="Microsoft YaHei"/>
-              </a:rPr>
-              <a:t>豆包基本不能用</a:t>
-            </a:r>
-          </a:p>
-          <a:p>
-            <a:pPr algn="l">
-              <a:lnSpc>
-                <a:spcPct val="125000"/>
-              </a:lnSpc>
-            </a:pPr>
-            <a:r>
-              <a:rPr sz="1300">
-                <a:solidFill>
-                  <a:srgbClr val="C9A227"/>
-                </a:solidFill>
-                <a:latin typeface="Microsoft YaHei"/>
-              </a:rPr>
-              <a:t>●  </a:t>
-            </a:r>
-            <a:r>
-              <a:rPr sz="1300">
-                <a:solidFill>
-                  <a:srgbClr val="FFFFFF"/>
-                </a:solidFill>
-                <a:latin typeface="Microsoft YaHei"/>
-              </a:rPr>
-              <a:t>大芯片新趋势:美国公司直接做「盘子那么大」芯片挑战英伟达</a:t>
-            </a:r>
-          </a:p>
-        </p:txBody>
-      </p:sp>
-      <p:sp>
-        <p:nvSpPr>
-          <p:cNvPr id="9" name="Rectangle 8"/>
-          <p:cNvSpPr/>
-          <p:nvPr/>
-        </p:nvSpPr>
-        <p:spPr>
-          <a:xfrm>
-            <a:off x="6172200" y="1280160"/>
-            <a:ext cx="5440680" cy="2377440"/>
+            <a:ext cx="5577840" cy="1097280"/>
           </a:xfrm>
           <a:prstGeom prst="rect">
             <a:avLst/>
@@ -6613,14 +6337,128 @@
       </p:sp>
       <p:sp>
         <p:nvSpPr>
+          <p:cNvPr id="7" name="Rectangle 6"/>
+          <p:cNvSpPr/>
+          <p:nvPr/>
+        </p:nvSpPr>
+        <p:spPr>
+          <a:xfrm>
+            <a:off x="548640" y="1280160"/>
+            <a:ext cx="822960" cy="1097280"/>
+          </a:xfrm>
+          <a:prstGeom prst="rect">
+            <a:avLst/>
+          </a:prstGeom>
+          <a:solidFill>
+            <a:srgbClr val="B01F24"/>
+          </a:solidFill>
+          <a:ln>
+            <a:noFill/>
+          </a:ln>
+          <a:effectLst/>
+        </p:spPr>
+        <p:style>
+          <a:lnRef idx="1">
+            <a:schemeClr val="accent1"/>
+          </a:lnRef>
+          <a:fillRef idx="3">
+            <a:schemeClr val="accent1"/>
+          </a:fillRef>
+          <a:effectRef idx="2">
+            <a:schemeClr val="accent1"/>
+          </a:effectRef>
+          <a:fontRef idx="minor">
+            <a:schemeClr val="lt1"/>
+          </a:fontRef>
+        </p:style>
+        <p:txBody>
+          <a:bodyPr rtlCol="0" anchor="ctr"/>
+          <a:lstStyle/>
+          <a:p>
+            <a:pPr algn="ctr"/>
+          </a:p>
+        </p:txBody>
+      </p:sp>
+      <p:sp>
+        <p:nvSpPr>
+          <p:cNvPr id="8" name="TextBox 7"/>
+          <p:cNvSpPr txBox="1"/>
+          <p:nvPr/>
+        </p:nvSpPr>
+        <p:spPr>
+          <a:xfrm>
+            <a:off x="548640" y="1280160"/>
+            <a:ext cx="822960" cy="1097280"/>
+          </a:xfrm>
+          <a:prstGeom prst="rect">
+            <a:avLst/>
+          </a:prstGeom>
+          <a:noFill/>
+        </p:spPr>
+        <p:txBody>
+          <a:bodyPr wrap="square" lIns="0" rIns="0" tIns="0" bIns="0" anchor="ctr">
+            <a:spAutoFit/>
+          </a:bodyPr>
+          <a:lstStyle/>
+          <a:p>
+            <a:pPr algn="ctr"/>
+            <a:r>
+              <a:rPr sz="2600" b="1">
+                <a:solidFill>
+                  <a:srgbClr val="FFFFFF"/>
+                </a:solidFill>
+                <a:latin typeface="Microsoft YaHei"/>
+              </a:rPr>
+              <a:t>01</a:t>
+            </a:r>
+          </a:p>
+        </p:txBody>
+      </p:sp>
+      <p:sp>
+        <p:nvSpPr>
+          <p:cNvPr id="9" name="TextBox 8"/>
+          <p:cNvSpPr txBox="1"/>
+          <p:nvPr/>
+        </p:nvSpPr>
+        <p:spPr>
+          <a:xfrm>
+            <a:off x="1554480" y="1371600"/>
+            <a:ext cx="4480560" cy="457200"/>
+          </a:xfrm>
+          <a:prstGeom prst="rect">
+            <a:avLst/>
+          </a:prstGeom>
+          <a:noFill/>
+        </p:spPr>
+        <p:txBody>
+          <a:bodyPr wrap="square" lIns="0" rIns="0" tIns="0" bIns="0" anchor="t">
+            <a:spAutoFit/>
+          </a:bodyPr>
+          <a:lstStyle/>
+          <a:p>
+            <a:pPr algn="l"/>
+            <a:r>
+              <a:rPr sz="1700" b="1">
+                <a:solidFill>
+                  <a:srgbClr val="0B1F3A"/>
+                </a:solidFill>
+                <a:latin typeface="Microsoft YaHei"/>
+              </a:rPr>
+              <a:t>房地产</a:t>
+            </a:r>
+          </a:p>
+        </p:txBody>
+      </p:sp>
+      <p:sp>
+        <p:nvSpPr>
           <p:cNvPr id="10" name="TextBox 9"/>
           <p:cNvSpPr txBox="1"/>
           <p:nvPr/>
         </p:nvSpPr>
         <p:spPr>
           <a:xfrm>
-            <a:off x="6355080" y="1371600"/>
-            <a:ext cx="5212080" cy="457200"/>
+            <a:off x="1554480" y="1828800"/>
+            <a:ext cx="4480560" cy="548640"/>
           </a:xfrm>
           <a:prstGeom prst="rect">
             <a:avLst/>
@@ -6635,150 +6473,27 @@
           <a:p>
             <a:pPr algn="l"/>
             <a:r>
-              <a:rPr sz="1800" b="1">
-                <a:solidFill>
-                  <a:srgbClr val="0B1F3A"/>
-                </a:solidFill>
-                <a:latin typeface="Microsoft YaHei"/>
-              </a:rPr>
-              <a:t>外资回流 · 四大主流</a:t>
-            </a:r>
-          </a:p>
-        </p:txBody>
-      </p:sp>
-      <p:sp>
-        <p:nvSpPr>
-          <p:cNvPr id="11" name="TextBox 10"/>
-          <p:cNvSpPr txBox="1"/>
-          <p:nvPr/>
-        </p:nvSpPr>
-        <p:spPr>
-          <a:xfrm>
-            <a:off x="6400800" y="1874519"/>
-            <a:ext cx="5120640" cy="1828800"/>
-          </a:xfrm>
-          <a:prstGeom prst="rect">
-            <a:avLst/>
-          </a:prstGeom>
-          <a:noFill/>
-        </p:spPr>
-        <p:txBody>
-          <a:bodyPr wrap="square" lIns="0" rIns="0" tIns="0" bIns="0">
-            <a:spAutoFit/>
-          </a:bodyPr>
-          <a:lstStyle/>
-          <a:p>
-            <a:pPr algn="l">
-              <a:lnSpc>
-                <a:spcPct val="125000"/>
-              </a:lnSpc>
-            </a:pPr>
-            <a:r>
-              <a:rPr sz="1300">
-                <a:solidFill>
-                  <a:srgbClr val="C9A227"/>
-                </a:solidFill>
-                <a:latin typeface="Microsoft YaHei"/>
-              </a:rPr>
-              <a:t>●  </a:t>
-            </a:r>
-            <a:r>
-              <a:rPr sz="1300">
+              <a:rPr sz="1200" b="0">
                 <a:solidFill>
                   <a:srgbClr val="222222"/>
                 </a:solidFill>
                 <a:latin typeface="Microsoft YaHei"/>
               </a:rPr>
-              <a:t>美国:贝莱德(14万亿)·重仓宁德/阳光电源</a:t>
-            </a:r>
-          </a:p>
-          <a:p>
-            <a:pPr algn="l">
-              <a:lnSpc>
-                <a:spcPct val="125000"/>
-              </a:lnSpc>
-            </a:pPr>
-            <a:r>
-              <a:rPr sz="1300">
-                <a:solidFill>
-                  <a:srgbClr val="C9A227"/>
-                </a:solidFill>
-                <a:latin typeface="Microsoft YaHei"/>
-              </a:rPr>
-              <a:t>●  </a:t>
-            </a:r>
-            <a:r>
-              <a:rPr sz="1300">
-                <a:solidFill>
-                  <a:srgbClr val="222222"/>
-                </a:solidFill>
-                <a:latin typeface="Microsoft YaHei"/>
-              </a:rPr>
-              <a:t>瑞士:欧洲钱通过瑞士进入</a:t>
-            </a:r>
-          </a:p>
-          <a:p>
-            <a:pPr algn="l">
-              <a:lnSpc>
-                <a:spcPct val="125000"/>
-              </a:lnSpc>
-            </a:pPr>
-            <a:r>
-              <a:rPr sz="1300">
-                <a:solidFill>
-                  <a:srgbClr val="C9A227"/>
-                </a:solidFill>
-                <a:latin typeface="Microsoft YaHei"/>
-              </a:rPr>
-              <a:t>●  </a:t>
-            </a:r>
-            <a:r>
-              <a:rPr sz="1300">
-                <a:solidFill>
-                  <a:srgbClr val="222222"/>
-                </a:solidFill>
-                <a:latin typeface="Microsoft YaHei"/>
-              </a:rPr>
-              <a:t>中东:阿布扎比</a:t>
-            </a:r>
-          </a:p>
-          <a:p>
-            <a:pPr algn="l">
-              <a:lnSpc>
-                <a:spcPct val="125000"/>
-              </a:lnSpc>
-            </a:pPr>
-            <a:r>
-              <a:rPr sz="1300">
-                <a:solidFill>
-                  <a:srgbClr val="C9A227"/>
-                </a:solidFill>
-                <a:latin typeface="Microsoft YaHei"/>
-              </a:rPr>
-              <a:t>●  </a:t>
-            </a:r>
-            <a:r>
-              <a:rPr sz="1300">
-                <a:solidFill>
-                  <a:srgbClr val="222222"/>
-                </a:solidFill>
-                <a:latin typeface="Microsoft YaHei"/>
-              </a:rPr>
-              <a:t>中国回流:含潘石屹等</a:t>
-            </a:r>
-          </a:p>
-        </p:txBody>
-      </p:sp>
-      <p:sp>
-        <p:nvSpPr>
-          <p:cNvPr id="12" name="Rectangle 11"/>
+              <a:t>99% 必死,仅约 1% 可活;50 年起不来</a:t>
+            </a:r>
+          </a:p>
+        </p:txBody>
+      </p:sp>
+      <p:sp>
+        <p:nvSpPr>
+          <p:cNvPr id="11" name="Rectangle 10"/>
           <p:cNvSpPr/>
           <p:nvPr/>
         </p:nvSpPr>
         <p:spPr>
           <a:xfrm>
-            <a:off x="6172200" y="3794760"/>
-            <a:ext cx="5440680" cy="2423160"/>
+            <a:off x="6355079" y="1280160"/>
+            <a:ext cx="5577840" cy="1097280"/>
           </a:xfrm>
           <a:prstGeom prst="rect">
             <a:avLst/>
@@ -6815,14 +6530,93 @@
       </p:sp>
       <p:sp>
         <p:nvSpPr>
+          <p:cNvPr id="12" name="Rectangle 11"/>
+          <p:cNvSpPr/>
+          <p:nvPr/>
+        </p:nvSpPr>
+        <p:spPr>
+          <a:xfrm>
+            <a:off x="6355079" y="1280160"/>
+            <a:ext cx="822960" cy="1097280"/>
+          </a:xfrm>
+          <a:prstGeom prst="rect">
+            <a:avLst/>
+          </a:prstGeom>
+          <a:solidFill>
+            <a:srgbClr val="B01F24"/>
+          </a:solidFill>
+          <a:ln>
+            <a:noFill/>
+          </a:ln>
+          <a:effectLst/>
+        </p:spPr>
+        <p:style>
+          <a:lnRef idx="1">
+            <a:schemeClr val="accent1"/>
+          </a:lnRef>
+          <a:fillRef idx="3">
+            <a:schemeClr val="accent1"/>
+          </a:fillRef>
+          <a:effectRef idx="2">
+            <a:schemeClr val="accent1"/>
+          </a:effectRef>
+          <a:fontRef idx="minor">
+            <a:schemeClr val="lt1"/>
+          </a:fontRef>
+        </p:style>
+        <p:txBody>
+          <a:bodyPr rtlCol="0" anchor="ctr"/>
+          <a:lstStyle/>
+          <a:p>
+            <a:pPr algn="ctr"/>
+          </a:p>
+        </p:txBody>
+      </p:sp>
+      <p:sp>
+        <p:nvSpPr>
           <p:cNvPr id="13" name="TextBox 12"/>
           <p:cNvSpPr txBox="1"/>
           <p:nvPr/>
         </p:nvSpPr>
         <p:spPr>
           <a:xfrm>
-            <a:off x="6355080" y="3886200"/>
-            <a:ext cx="5212080" cy="457200"/>
+            <a:off x="6355079" y="1280160"/>
+            <a:ext cx="822960" cy="1097280"/>
+          </a:xfrm>
+          <a:prstGeom prst="rect">
+            <a:avLst/>
+          </a:prstGeom>
+          <a:noFill/>
+        </p:spPr>
+        <p:txBody>
+          <a:bodyPr wrap="square" lIns="0" rIns="0" tIns="0" bIns="0" anchor="ctr">
+            <a:spAutoFit/>
+          </a:bodyPr>
+          <a:lstStyle/>
+          <a:p>
+            <a:pPr algn="ctr"/>
+            <a:r>
+              <a:rPr sz="2600" b="1">
+                <a:solidFill>
+                  <a:srgbClr val="FFFFFF"/>
+                </a:solidFill>
+                <a:latin typeface="Microsoft YaHei"/>
+              </a:rPr>
+              <a:t>02</a:t>
+            </a:r>
+          </a:p>
+        </p:txBody>
+      </p:sp>
+      <p:sp>
+        <p:nvSpPr>
+          <p:cNvPr id="14" name="TextBox 13"/>
+          <p:cNvSpPr txBox="1"/>
+          <p:nvPr/>
+        </p:nvSpPr>
+        <p:spPr>
+          <a:xfrm>
+            <a:off x="7360919" y="1371600"/>
+            <a:ext cx="4480560" cy="457200"/>
           </a:xfrm>
           <a:prstGeom prst="rect">
             <a:avLst/>
@@ -6837,143 +6631,1213 @@
           <a:p>
             <a:pPr algn="l"/>
             <a:r>
-              <a:rPr sz="1800" b="1">
+              <a:rPr sz="1700" b="1">
                 <a:solidFill>
                   <a:srgbClr val="0B1F3A"/>
                 </a:solidFill>
                 <a:latin typeface="Microsoft YaHei"/>
               </a:rPr>
-              <a:t>香港 · 全球资本市场枢纽</a:t>
-            </a:r>
-          </a:p>
-        </p:txBody>
-      </p:sp>
-      <p:sp>
-        <p:nvSpPr>
-          <p:cNvPr id="14" name="TextBox 13"/>
-          <p:cNvSpPr txBox="1"/>
-          <p:nvPr/>
-        </p:nvSpPr>
-        <p:spPr>
-          <a:xfrm>
-            <a:off x="6400800" y="4389120"/>
-            <a:ext cx="5120640" cy="1828800"/>
-          </a:xfrm>
-          <a:prstGeom prst="rect">
-            <a:avLst/>
-          </a:prstGeom>
-          <a:noFill/>
-        </p:spPr>
-        <p:txBody>
-          <a:bodyPr wrap="square" lIns="0" rIns="0" tIns="0" bIns="0">
-            <a:spAutoFit/>
-          </a:bodyPr>
-          <a:lstStyle/>
-          <a:p>
-            <a:pPr algn="l">
-              <a:lnSpc>
-                <a:spcPct val="125000"/>
-              </a:lnSpc>
-            </a:pPr>
-            <a:r>
-              <a:rPr sz="1300">
-                <a:solidFill>
-                  <a:srgbClr val="C9A227"/>
-                </a:solidFill>
-                <a:latin typeface="Microsoft YaHei"/>
-              </a:rPr>
-              <a:t>●  </a:t>
-            </a:r>
-            <a:r>
-              <a:rPr sz="1300">
+              <a:t>商铺</a:t>
+            </a:r>
+          </a:p>
+        </p:txBody>
+      </p:sp>
+      <p:sp>
+        <p:nvSpPr>
+          <p:cNvPr id="15" name="TextBox 14"/>
+          <p:cNvSpPr txBox="1"/>
+          <p:nvPr/>
+        </p:nvSpPr>
+        <p:spPr>
+          <a:xfrm>
+            <a:off x="7360919" y="1828800"/>
+            <a:ext cx="4480560" cy="548640"/>
+          </a:xfrm>
+          <a:prstGeom prst="rect">
+            <a:avLst/>
+          </a:prstGeom>
+          <a:noFill/>
+        </p:spPr>
+        <p:txBody>
+          <a:bodyPr wrap="square" lIns="0" rIns="0" tIns="0" bIns="0" anchor="t">
+            <a:spAutoFit/>
+          </a:bodyPr>
+          <a:lstStyle/>
+          <a:p>
+            <a:pPr algn="l"/>
+            <a:r>
+              <a:rPr sz="1200" b="0">
                 <a:solidFill>
                   <a:srgbClr val="222222"/>
                 </a:solidFill>
                 <a:latin typeface="Microsoft YaHei"/>
               </a:rPr>
-              <a:t>由「金融自由港」升格为「全球资本枢纽」</a:t>
-            </a:r>
-          </a:p>
-          <a:p>
-            <a:pPr algn="l">
-              <a:lnSpc>
-                <a:spcPct val="125000"/>
-              </a:lnSpc>
-            </a:pPr>
-            <a:r>
-              <a:rPr sz="1300">
-                <a:solidFill>
-                  <a:srgbClr val="C9A227"/>
-                </a:solidFill>
-                <a:latin typeface="Microsoft YaHei"/>
-              </a:rPr>
-              <a:t>●  </a:t>
-            </a:r>
-            <a:r>
-              <a:rPr sz="1300">
+              <a:t>99% 必死无疑</a:t>
+            </a:r>
+          </a:p>
+        </p:txBody>
+      </p:sp>
+      <p:sp>
+        <p:nvSpPr>
+          <p:cNvPr id="16" name="Rectangle 15"/>
+          <p:cNvSpPr/>
+          <p:nvPr/>
+        </p:nvSpPr>
+        <p:spPr>
+          <a:xfrm>
+            <a:off x="548640" y="2514600"/>
+            <a:ext cx="5577840" cy="1097280"/>
+          </a:xfrm>
+          <a:prstGeom prst="rect">
+            <a:avLst/>
+          </a:prstGeom>
+          <a:solidFill>
+            <a:srgbClr val="F5F1E6"/>
+          </a:solidFill>
+          <a:ln>
+            <a:noFill/>
+          </a:ln>
+          <a:effectLst/>
+        </p:spPr>
+        <p:style>
+          <a:lnRef idx="1">
+            <a:schemeClr val="accent1"/>
+          </a:lnRef>
+          <a:fillRef idx="3">
+            <a:schemeClr val="accent1"/>
+          </a:fillRef>
+          <a:effectRef idx="2">
+            <a:schemeClr val="accent1"/>
+          </a:effectRef>
+          <a:fontRef idx="minor">
+            <a:schemeClr val="lt1"/>
+          </a:fontRef>
+        </p:style>
+        <p:txBody>
+          <a:bodyPr rtlCol="0" anchor="ctr"/>
+          <a:lstStyle/>
+          <a:p>
+            <a:pPr algn="ctr"/>
+          </a:p>
+        </p:txBody>
+      </p:sp>
+      <p:sp>
+        <p:nvSpPr>
+          <p:cNvPr id="17" name="Rectangle 16"/>
+          <p:cNvSpPr/>
+          <p:nvPr/>
+        </p:nvSpPr>
+        <p:spPr>
+          <a:xfrm>
+            <a:off x="548640" y="2514600"/>
+            <a:ext cx="822960" cy="1097280"/>
+          </a:xfrm>
+          <a:prstGeom prst="rect">
+            <a:avLst/>
+          </a:prstGeom>
+          <a:solidFill>
+            <a:srgbClr val="B01F24"/>
+          </a:solidFill>
+          <a:ln>
+            <a:noFill/>
+          </a:ln>
+          <a:effectLst/>
+        </p:spPr>
+        <p:style>
+          <a:lnRef idx="1">
+            <a:schemeClr val="accent1"/>
+          </a:lnRef>
+          <a:fillRef idx="3">
+            <a:schemeClr val="accent1"/>
+          </a:fillRef>
+          <a:effectRef idx="2">
+            <a:schemeClr val="accent1"/>
+          </a:effectRef>
+          <a:fontRef idx="minor">
+            <a:schemeClr val="lt1"/>
+          </a:fontRef>
+        </p:style>
+        <p:txBody>
+          <a:bodyPr rtlCol="0" anchor="ctr"/>
+          <a:lstStyle/>
+          <a:p>
+            <a:pPr algn="ctr"/>
+          </a:p>
+        </p:txBody>
+      </p:sp>
+      <p:sp>
+        <p:nvSpPr>
+          <p:cNvPr id="18" name="TextBox 17"/>
+          <p:cNvSpPr txBox="1"/>
+          <p:nvPr/>
+        </p:nvSpPr>
+        <p:spPr>
+          <a:xfrm>
+            <a:off x="548640" y="2514600"/>
+            <a:ext cx="822960" cy="1097280"/>
+          </a:xfrm>
+          <a:prstGeom prst="rect">
+            <a:avLst/>
+          </a:prstGeom>
+          <a:noFill/>
+        </p:spPr>
+        <p:txBody>
+          <a:bodyPr wrap="square" lIns="0" rIns="0" tIns="0" bIns="0" anchor="ctr">
+            <a:spAutoFit/>
+          </a:bodyPr>
+          <a:lstStyle/>
+          <a:p>
+            <a:pPr algn="ctr"/>
+            <a:r>
+              <a:rPr sz="2600" b="1">
+                <a:solidFill>
+                  <a:srgbClr val="FFFFFF"/>
+                </a:solidFill>
+                <a:latin typeface="Microsoft YaHei"/>
+              </a:rPr>
+              <a:t>03</a:t>
+            </a:r>
+          </a:p>
+        </p:txBody>
+      </p:sp>
+      <p:sp>
+        <p:nvSpPr>
+          <p:cNvPr id="19" name="TextBox 18"/>
+          <p:cNvSpPr txBox="1"/>
+          <p:nvPr/>
+        </p:nvSpPr>
+        <p:spPr>
+          <a:xfrm>
+            <a:off x="1554480" y="2606040"/>
+            <a:ext cx="4480560" cy="457200"/>
+          </a:xfrm>
+          <a:prstGeom prst="rect">
+            <a:avLst/>
+          </a:prstGeom>
+          <a:noFill/>
+        </p:spPr>
+        <p:txBody>
+          <a:bodyPr wrap="square" lIns="0" rIns="0" tIns="0" bIns="0" anchor="t">
+            <a:spAutoFit/>
+          </a:bodyPr>
+          <a:lstStyle/>
+          <a:p>
+            <a:pPr algn="l"/>
+            <a:r>
+              <a:rPr sz="1700" b="1">
+                <a:solidFill>
+                  <a:srgbClr val="0B1F3A"/>
+                </a:solidFill>
+                <a:latin typeface="Microsoft YaHei"/>
+              </a:rPr>
+              <a:t>知识</a:t>
+            </a:r>
+          </a:p>
+        </p:txBody>
+      </p:sp>
+      <p:sp>
+        <p:nvSpPr>
+          <p:cNvPr id="20" name="TextBox 19"/>
+          <p:cNvSpPr txBox="1"/>
+          <p:nvPr/>
+        </p:nvSpPr>
+        <p:spPr>
+          <a:xfrm>
+            <a:off x="1554480" y="3063240"/>
+            <a:ext cx="4480560" cy="548640"/>
+          </a:xfrm>
+          <a:prstGeom prst="rect">
+            <a:avLst/>
+          </a:prstGeom>
+          <a:noFill/>
+        </p:spPr>
+        <p:txBody>
+          <a:bodyPr wrap="square" lIns="0" rIns="0" tIns="0" bIns="0" anchor="t">
+            <a:spAutoFit/>
+          </a:bodyPr>
+          <a:lstStyle/>
+          <a:p>
+            <a:pPr algn="l"/>
+            <a:r>
+              <a:rPr sz="1200" b="0">
                 <a:solidFill>
                   <a:srgbClr val="222222"/>
                 </a:solidFill>
                 <a:latin typeface="Microsoft YaHei"/>
               </a:rPr>
-              <a:t>下半年大量代币入场,代币市场爆发</a:t>
-            </a:r>
-          </a:p>
-          <a:p>
-            <a:pPr algn="l">
-              <a:lnSpc>
-                <a:spcPct val="125000"/>
-              </a:lnSpc>
-            </a:pPr>
-            <a:r>
-              <a:rPr sz="1300">
-                <a:solidFill>
-                  <a:srgbClr val="C9A227"/>
-                </a:solidFill>
-                <a:latin typeface="Microsoft YaHei"/>
-              </a:rPr>
-              <a:t>●  </a:t>
-            </a:r>
-            <a:r>
-              <a:rPr sz="1300">
+              <a:t>中低档大模型 &gt; 90% 大专院校教授</a:t>
+            </a:r>
+          </a:p>
+        </p:txBody>
+      </p:sp>
+      <p:sp>
+        <p:nvSpPr>
+          <p:cNvPr id="21" name="Rectangle 20"/>
+          <p:cNvSpPr/>
+          <p:nvPr/>
+        </p:nvSpPr>
+        <p:spPr>
+          <a:xfrm>
+            <a:off x="6355079" y="2514600"/>
+            <a:ext cx="5577840" cy="1097280"/>
+          </a:xfrm>
+          <a:prstGeom prst="rect">
+            <a:avLst/>
+          </a:prstGeom>
+          <a:solidFill>
+            <a:srgbClr val="F5F1E6"/>
+          </a:solidFill>
+          <a:ln>
+            <a:noFill/>
+          </a:ln>
+          <a:effectLst/>
+        </p:spPr>
+        <p:style>
+          <a:lnRef idx="1">
+            <a:schemeClr val="accent1"/>
+          </a:lnRef>
+          <a:fillRef idx="3">
+            <a:schemeClr val="accent1"/>
+          </a:fillRef>
+          <a:effectRef idx="2">
+            <a:schemeClr val="accent1"/>
+          </a:effectRef>
+          <a:fontRef idx="minor">
+            <a:schemeClr val="lt1"/>
+          </a:fontRef>
+        </p:style>
+        <p:txBody>
+          <a:bodyPr rtlCol="0" anchor="ctr"/>
+          <a:lstStyle/>
+          <a:p>
+            <a:pPr algn="ctr"/>
+          </a:p>
+        </p:txBody>
+      </p:sp>
+      <p:sp>
+        <p:nvSpPr>
+          <p:cNvPr id="22" name="Rectangle 21"/>
+          <p:cNvSpPr/>
+          <p:nvPr/>
+        </p:nvSpPr>
+        <p:spPr>
+          <a:xfrm>
+            <a:off x="6355079" y="2514600"/>
+            <a:ext cx="822960" cy="1097280"/>
+          </a:xfrm>
+          <a:prstGeom prst="rect">
+            <a:avLst/>
+          </a:prstGeom>
+          <a:solidFill>
+            <a:srgbClr val="B01F24"/>
+          </a:solidFill>
+          <a:ln>
+            <a:noFill/>
+          </a:ln>
+          <a:effectLst/>
+        </p:spPr>
+        <p:style>
+          <a:lnRef idx="1">
+            <a:schemeClr val="accent1"/>
+          </a:lnRef>
+          <a:fillRef idx="3">
+            <a:schemeClr val="accent1"/>
+          </a:fillRef>
+          <a:effectRef idx="2">
+            <a:schemeClr val="accent1"/>
+          </a:effectRef>
+          <a:fontRef idx="minor">
+            <a:schemeClr val="lt1"/>
+          </a:fontRef>
+        </p:style>
+        <p:txBody>
+          <a:bodyPr rtlCol="0" anchor="ctr"/>
+          <a:lstStyle/>
+          <a:p>
+            <a:pPr algn="ctr"/>
+          </a:p>
+        </p:txBody>
+      </p:sp>
+      <p:sp>
+        <p:nvSpPr>
+          <p:cNvPr id="23" name="TextBox 22"/>
+          <p:cNvSpPr txBox="1"/>
+          <p:nvPr/>
+        </p:nvSpPr>
+        <p:spPr>
+          <a:xfrm>
+            <a:off x="6355079" y="2514600"/>
+            <a:ext cx="822960" cy="1097280"/>
+          </a:xfrm>
+          <a:prstGeom prst="rect">
+            <a:avLst/>
+          </a:prstGeom>
+          <a:noFill/>
+        </p:spPr>
+        <p:txBody>
+          <a:bodyPr wrap="square" lIns="0" rIns="0" tIns="0" bIns="0" anchor="ctr">
+            <a:spAutoFit/>
+          </a:bodyPr>
+          <a:lstStyle/>
+          <a:p>
+            <a:pPr algn="ctr"/>
+            <a:r>
+              <a:rPr sz="2600" b="1">
+                <a:solidFill>
+                  <a:srgbClr val="FFFFFF"/>
+                </a:solidFill>
+                <a:latin typeface="Microsoft YaHei"/>
+              </a:rPr>
+              <a:t>04</a:t>
+            </a:r>
+          </a:p>
+        </p:txBody>
+      </p:sp>
+      <p:sp>
+        <p:nvSpPr>
+          <p:cNvPr id="24" name="TextBox 23"/>
+          <p:cNvSpPr txBox="1"/>
+          <p:nvPr/>
+        </p:nvSpPr>
+        <p:spPr>
+          <a:xfrm>
+            <a:off x="7360919" y="2606040"/>
+            <a:ext cx="4480560" cy="457200"/>
+          </a:xfrm>
+          <a:prstGeom prst="rect">
+            <a:avLst/>
+          </a:prstGeom>
+          <a:noFill/>
+        </p:spPr>
+        <p:txBody>
+          <a:bodyPr wrap="square" lIns="0" rIns="0" tIns="0" bIns="0" anchor="t">
+            <a:spAutoFit/>
+          </a:bodyPr>
+          <a:lstStyle/>
+          <a:p>
+            <a:pPr algn="l"/>
+            <a:r>
+              <a:rPr sz="1700" b="1">
+                <a:solidFill>
+                  <a:srgbClr val="0B1F3A"/>
+                </a:solidFill>
+                <a:latin typeface="Microsoft YaHei"/>
+              </a:rPr>
+              <a:t>学历</a:t>
+            </a:r>
+          </a:p>
+        </p:txBody>
+      </p:sp>
+      <p:sp>
+        <p:nvSpPr>
+          <p:cNvPr id="25" name="TextBox 24"/>
+          <p:cNvSpPr txBox="1"/>
+          <p:nvPr/>
+        </p:nvSpPr>
+        <p:spPr>
+          <a:xfrm>
+            <a:off x="7360919" y="3063240"/>
+            <a:ext cx="4480560" cy="548640"/>
+          </a:xfrm>
+          <a:prstGeom prst="rect">
+            <a:avLst/>
+          </a:prstGeom>
+          <a:noFill/>
+        </p:spPr>
+        <p:txBody>
+          <a:bodyPr wrap="square" lIns="0" rIns="0" tIns="0" bIns="0" anchor="t">
+            <a:spAutoFit/>
+          </a:bodyPr>
+          <a:lstStyle/>
+          <a:p>
+            <a:pPr algn="l"/>
+            <a:r>
+              <a:rPr sz="1200" b="0">
                 <a:solidFill>
                   <a:srgbClr val="222222"/>
                 </a:solidFill>
                 <a:latin typeface="Microsoft YaHei"/>
               </a:rPr>
-              <a:t>代币资产起点 = 6%</a:t>
-            </a:r>
-          </a:p>
-          <a:p>
-            <a:pPr algn="l">
-              <a:lnSpc>
-                <a:spcPct val="125000"/>
-              </a:lnSpc>
-            </a:pPr>
-            <a:r>
-              <a:rPr sz="1300">
-                <a:solidFill>
-                  <a:srgbClr val="C9A227"/>
-                </a:solidFill>
-                <a:latin typeface="Microsoft YaHei"/>
-              </a:rPr>
-              <a:t>●  </a:t>
-            </a:r>
-            <a:r>
-              <a:rPr sz="1300">
+              <a:t>美国改招高中生;个案出现 1 亿美金薪酬</a:t>
+            </a:r>
+          </a:p>
+        </p:txBody>
+      </p:sp>
+      <p:sp>
+        <p:nvSpPr>
+          <p:cNvPr id="26" name="Rectangle 25"/>
+          <p:cNvSpPr/>
+          <p:nvPr/>
+        </p:nvSpPr>
+        <p:spPr>
+          <a:xfrm>
+            <a:off x="548640" y="3749039"/>
+            <a:ext cx="5577840" cy="1097280"/>
+          </a:xfrm>
+          <a:prstGeom prst="rect">
+            <a:avLst/>
+          </a:prstGeom>
+          <a:solidFill>
+            <a:srgbClr val="F5F1E6"/>
+          </a:solidFill>
+          <a:ln>
+            <a:noFill/>
+          </a:ln>
+          <a:effectLst/>
+        </p:spPr>
+        <p:style>
+          <a:lnRef idx="1">
+            <a:schemeClr val="accent1"/>
+          </a:lnRef>
+          <a:fillRef idx="3">
+            <a:schemeClr val="accent1"/>
+          </a:fillRef>
+          <a:effectRef idx="2">
+            <a:schemeClr val="accent1"/>
+          </a:effectRef>
+          <a:fontRef idx="minor">
+            <a:schemeClr val="lt1"/>
+          </a:fontRef>
+        </p:style>
+        <p:txBody>
+          <a:bodyPr rtlCol="0" anchor="ctr"/>
+          <a:lstStyle/>
+          <a:p>
+            <a:pPr algn="ctr"/>
+          </a:p>
+        </p:txBody>
+      </p:sp>
+      <p:sp>
+        <p:nvSpPr>
+          <p:cNvPr id="27" name="Rectangle 26"/>
+          <p:cNvSpPr/>
+          <p:nvPr/>
+        </p:nvSpPr>
+        <p:spPr>
+          <a:xfrm>
+            <a:off x="548640" y="3749039"/>
+            <a:ext cx="822960" cy="1097280"/>
+          </a:xfrm>
+          <a:prstGeom prst="rect">
+            <a:avLst/>
+          </a:prstGeom>
+          <a:solidFill>
+            <a:srgbClr val="B01F24"/>
+          </a:solidFill>
+          <a:ln>
+            <a:noFill/>
+          </a:ln>
+          <a:effectLst/>
+        </p:spPr>
+        <p:style>
+          <a:lnRef idx="1">
+            <a:schemeClr val="accent1"/>
+          </a:lnRef>
+          <a:fillRef idx="3">
+            <a:schemeClr val="accent1"/>
+          </a:fillRef>
+          <a:effectRef idx="2">
+            <a:schemeClr val="accent1"/>
+          </a:effectRef>
+          <a:fontRef idx="minor">
+            <a:schemeClr val="lt1"/>
+          </a:fontRef>
+        </p:style>
+        <p:txBody>
+          <a:bodyPr rtlCol="0" anchor="ctr"/>
+          <a:lstStyle/>
+          <a:p>
+            <a:pPr algn="ctr"/>
+          </a:p>
+        </p:txBody>
+      </p:sp>
+      <p:sp>
+        <p:nvSpPr>
+          <p:cNvPr id="28" name="TextBox 27"/>
+          <p:cNvSpPr txBox="1"/>
+          <p:nvPr/>
+        </p:nvSpPr>
+        <p:spPr>
+          <a:xfrm>
+            <a:off x="548640" y="3749039"/>
+            <a:ext cx="822960" cy="1097280"/>
+          </a:xfrm>
+          <a:prstGeom prst="rect">
+            <a:avLst/>
+          </a:prstGeom>
+          <a:noFill/>
+        </p:spPr>
+        <p:txBody>
+          <a:bodyPr wrap="square" lIns="0" rIns="0" tIns="0" bIns="0" anchor="ctr">
+            <a:spAutoFit/>
+          </a:bodyPr>
+          <a:lstStyle/>
+          <a:p>
+            <a:pPr algn="ctr"/>
+            <a:r>
+              <a:rPr sz="2600" b="1">
+                <a:solidFill>
+                  <a:srgbClr val="FFFFFF"/>
+                </a:solidFill>
+                <a:latin typeface="Microsoft YaHei"/>
+              </a:rPr>
+              <a:t>05</a:t>
+            </a:r>
+          </a:p>
+        </p:txBody>
+      </p:sp>
+      <p:sp>
+        <p:nvSpPr>
+          <p:cNvPr id="29" name="TextBox 28"/>
+          <p:cNvSpPr txBox="1"/>
+          <p:nvPr/>
+        </p:nvSpPr>
+        <p:spPr>
+          <a:xfrm>
+            <a:off x="1554480" y="3840479"/>
+            <a:ext cx="4480560" cy="457200"/>
+          </a:xfrm>
+          <a:prstGeom prst="rect">
+            <a:avLst/>
+          </a:prstGeom>
+          <a:noFill/>
+        </p:spPr>
+        <p:txBody>
+          <a:bodyPr wrap="square" lIns="0" rIns="0" tIns="0" bIns="0" anchor="t">
+            <a:spAutoFit/>
+          </a:bodyPr>
+          <a:lstStyle/>
+          <a:p>
+            <a:pPr algn="l"/>
+            <a:r>
+              <a:rPr sz="1700" b="1">
+                <a:solidFill>
+                  <a:srgbClr val="0B1F3A"/>
+                </a:solidFill>
+                <a:latin typeface="Microsoft YaHei"/>
+              </a:rPr>
+              <a:t>软件 / 码农</a:t>
+            </a:r>
+          </a:p>
+        </p:txBody>
+      </p:sp>
+      <p:sp>
+        <p:nvSpPr>
+          <p:cNvPr id="30" name="TextBox 29"/>
+          <p:cNvSpPr txBox="1"/>
+          <p:nvPr/>
+        </p:nvSpPr>
+        <p:spPr>
+          <a:xfrm>
+            <a:off x="1554480" y="4297679"/>
+            <a:ext cx="4480560" cy="548640"/>
+          </a:xfrm>
+          <a:prstGeom prst="rect">
+            <a:avLst/>
+          </a:prstGeom>
+          <a:noFill/>
+        </p:spPr>
+        <p:txBody>
+          <a:bodyPr wrap="square" lIns="0" rIns="0" tIns="0" bIns="0" anchor="t">
+            <a:spAutoFit/>
+          </a:bodyPr>
+          <a:lstStyle/>
+          <a:p>
+            <a:pPr algn="l"/>
+            <a:r>
+              <a:rPr sz="1200" b="0">
                 <a:solidFill>
                   <a:srgbClr val="222222"/>
                 </a:solidFill>
                 <a:latin typeface="Microsoft YaHei"/>
               </a:rPr>
-              <a:t>马斯克代币基本一周抢完</a:t>
-            </a:r>
-          </a:p>
-        </p:txBody>
-      </p:sp>
-      <p:sp>
-        <p:nvSpPr>
-          <p:cNvPr id="15" name="TextBox 14"/>
+              <a:t>AI 出代码;五大行/地产软件开源后无价值</a:t>
+            </a:r>
+          </a:p>
+        </p:txBody>
+      </p:sp>
+      <p:sp>
+        <p:nvSpPr>
+          <p:cNvPr id="31" name="Rectangle 30"/>
+          <p:cNvSpPr/>
+          <p:nvPr/>
+        </p:nvSpPr>
+        <p:spPr>
+          <a:xfrm>
+            <a:off x="6355079" y="3749039"/>
+            <a:ext cx="5577840" cy="1097280"/>
+          </a:xfrm>
+          <a:prstGeom prst="rect">
+            <a:avLst/>
+          </a:prstGeom>
+          <a:solidFill>
+            <a:srgbClr val="F5F1E6"/>
+          </a:solidFill>
+          <a:ln>
+            <a:noFill/>
+          </a:ln>
+          <a:effectLst/>
+        </p:spPr>
+        <p:style>
+          <a:lnRef idx="1">
+            <a:schemeClr val="accent1"/>
+          </a:lnRef>
+          <a:fillRef idx="3">
+            <a:schemeClr val="accent1"/>
+          </a:fillRef>
+          <a:effectRef idx="2">
+            <a:schemeClr val="accent1"/>
+          </a:effectRef>
+          <a:fontRef idx="minor">
+            <a:schemeClr val="lt1"/>
+          </a:fontRef>
+        </p:style>
+        <p:txBody>
+          <a:bodyPr rtlCol="0" anchor="ctr"/>
+          <a:lstStyle/>
+          <a:p>
+            <a:pPr algn="ctr"/>
+          </a:p>
+        </p:txBody>
+      </p:sp>
+      <p:sp>
+        <p:nvSpPr>
+          <p:cNvPr id="32" name="Rectangle 31"/>
+          <p:cNvSpPr/>
+          <p:nvPr/>
+        </p:nvSpPr>
+        <p:spPr>
+          <a:xfrm>
+            <a:off x="6355079" y="3749039"/>
+            <a:ext cx="822960" cy="1097280"/>
+          </a:xfrm>
+          <a:prstGeom prst="rect">
+            <a:avLst/>
+          </a:prstGeom>
+          <a:solidFill>
+            <a:srgbClr val="B01F24"/>
+          </a:solidFill>
+          <a:ln>
+            <a:noFill/>
+          </a:ln>
+          <a:effectLst/>
+        </p:spPr>
+        <p:style>
+          <a:lnRef idx="1">
+            <a:schemeClr val="accent1"/>
+          </a:lnRef>
+          <a:fillRef idx="3">
+            <a:schemeClr val="accent1"/>
+          </a:fillRef>
+          <a:effectRef idx="2">
+            <a:schemeClr val="accent1"/>
+          </a:effectRef>
+          <a:fontRef idx="minor">
+            <a:schemeClr val="lt1"/>
+          </a:fontRef>
+        </p:style>
+        <p:txBody>
+          <a:bodyPr rtlCol="0" anchor="ctr"/>
+          <a:lstStyle/>
+          <a:p>
+            <a:pPr algn="ctr"/>
+          </a:p>
+        </p:txBody>
+      </p:sp>
+      <p:sp>
+        <p:nvSpPr>
+          <p:cNvPr id="33" name="TextBox 32"/>
+          <p:cNvSpPr txBox="1"/>
+          <p:nvPr/>
+        </p:nvSpPr>
+        <p:spPr>
+          <a:xfrm>
+            <a:off x="6355079" y="3749039"/>
+            <a:ext cx="822960" cy="1097280"/>
+          </a:xfrm>
+          <a:prstGeom prst="rect">
+            <a:avLst/>
+          </a:prstGeom>
+          <a:noFill/>
+        </p:spPr>
+        <p:txBody>
+          <a:bodyPr wrap="square" lIns="0" rIns="0" tIns="0" bIns="0" anchor="ctr">
+            <a:spAutoFit/>
+          </a:bodyPr>
+          <a:lstStyle/>
+          <a:p>
+            <a:pPr algn="ctr"/>
+            <a:r>
+              <a:rPr sz="2600" b="1">
+                <a:solidFill>
+                  <a:srgbClr val="FFFFFF"/>
+                </a:solidFill>
+                <a:latin typeface="Microsoft YaHei"/>
+              </a:rPr>
+              <a:t>06</a:t>
+            </a:r>
+          </a:p>
+        </p:txBody>
+      </p:sp>
+      <p:sp>
+        <p:nvSpPr>
+          <p:cNvPr id="34" name="TextBox 33"/>
+          <p:cNvSpPr txBox="1"/>
+          <p:nvPr/>
+        </p:nvSpPr>
+        <p:spPr>
+          <a:xfrm>
+            <a:off x="7360919" y="3840479"/>
+            <a:ext cx="4480560" cy="457200"/>
+          </a:xfrm>
+          <a:prstGeom prst="rect">
+            <a:avLst/>
+          </a:prstGeom>
+          <a:noFill/>
+        </p:spPr>
+        <p:txBody>
+          <a:bodyPr wrap="square" lIns="0" rIns="0" tIns="0" bIns="0" anchor="t">
+            <a:spAutoFit/>
+          </a:bodyPr>
+          <a:lstStyle/>
+          <a:p>
+            <a:pPr algn="l"/>
+            <a:r>
+              <a:rPr sz="1700" b="1">
+                <a:solidFill>
+                  <a:srgbClr val="0B1F3A"/>
+                </a:solidFill>
+                <a:latin typeface="Microsoft YaHei"/>
+              </a:rPr>
+              <a:t>传统车企</a:t>
+            </a:r>
+          </a:p>
+        </p:txBody>
+      </p:sp>
+      <p:sp>
+        <p:nvSpPr>
+          <p:cNvPr id="35" name="TextBox 34"/>
+          <p:cNvSpPr txBox="1"/>
+          <p:nvPr/>
+        </p:nvSpPr>
+        <p:spPr>
+          <a:xfrm>
+            <a:off x="7360919" y="4297679"/>
+            <a:ext cx="4480560" cy="548640"/>
+          </a:xfrm>
+          <a:prstGeom prst="rect">
+            <a:avLst/>
+          </a:prstGeom>
+          <a:noFill/>
+        </p:spPr>
+        <p:txBody>
+          <a:bodyPr wrap="square" lIns="0" rIns="0" tIns="0" bIns="0" anchor="t">
+            <a:spAutoFit/>
+          </a:bodyPr>
+          <a:lstStyle/>
+          <a:p>
+            <a:pPr algn="l"/>
+            <a:r>
+              <a:rPr sz="1200" b="0">
+                <a:solidFill>
+                  <a:srgbClr val="222222"/>
+                </a:solidFill>
+                <a:latin typeface="Microsoft YaHei"/>
+              </a:rPr>
+              <a:t>下一个全线崩溃的赛道</a:t>
+            </a:r>
+          </a:p>
+        </p:txBody>
+      </p:sp>
+      <p:sp>
+        <p:nvSpPr>
+          <p:cNvPr id="36" name="Rectangle 35"/>
+          <p:cNvSpPr/>
+          <p:nvPr/>
+        </p:nvSpPr>
+        <p:spPr>
+          <a:xfrm>
+            <a:off x="548640" y="4983480"/>
+            <a:ext cx="5577840" cy="1097280"/>
+          </a:xfrm>
+          <a:prstGeom prst="rect">
+            <a:avLst/>
+          </a:prstGeom>
+          <a:solidFill>
+            <a:srgbClr val="F5F1E6"/>
+          </a:solidFill>
+          <a:ln>
+            <a:noFill/>
+          </a:ln>
+          <a:effectLst/>
+        </p:spPr>
+        <p:style>
+          <a:lnRef idx="1">
+            <a:schemeClr val="accent1"/>
+          </a:lnRef>
+          <a:fillRef idx="3">
+            <a:schemeClr val="accent1"/>
+          </a:fillRef>
+          <a:effectRef idx="2">
+            <a:schemeClr val="accent1"/>
+          </a:effectRef>
+          <a:fontRef idx="minor">
+            <a:schemeClr val="lt1"/>
+          </a:fontRef>
+        </p:style>
+        <p:txBody>
+          <a:bodyPr rtlCol="0" anchor="ctr"/>
+          <a:lstStyle/>
+          <a:p>
+            <a:pPr algn="ctr"/>
+          </a:p>
+        </p:txBody>
+      </p:sp>
+      <p:sp>
+        <p:nvSpPr>
+          <p:cNvPr id="37" name="Rectangle 36"/>
+          <p:cNvSpPr/>
+          <p:nvPr/>
+        </p:nvSpPr>
+        <p:spPr>
+          <a:xfrm>
+            <a:off x="548640" y="4983480"/>
+            <a:ext cx="822960" cy="1097280"/>
+          </a:xfrm>
+          <a:prstGeom prst="rect">
+            <a:avLst/>
+          </a:prstGeom>
+          <a:solidFill>
+            <a:srgbClr val="B01F24"/>
+          </a:solidFill>
+          <a:ln>
+            <a:noFill/>
+          </a:ln>
+          <a:effectLst/>
+        </p:spPr>
+        <p:style>
+          <a:lnRef idx="1">
+            <a:schemeClr val="accent1"/>
+          </a:lnRef>
+          <a:fillRef idx="3">
+            <a:schemeClr val="accent1"/>
+          </a:fillRef>
+          <a:effectRef idx="2">
+            <a:schemeClr val="accent1"/>
+          </a:effectRef>
+          <a:fontRef idx="minor">
+            <a:schemeClr val="lt1"/>
+          </a:fontRef>
+        </p:style>
+        <p:txBody>
+          <a:bodyPr rtlCol="0" anchor="ctr"/>
+          <a:lstStyle/>
+          <a:p>
+            <a:pPr algn="ctr"/>
+          </a:p>
+        </p:txBody>
+      </p:sp>
+      <p:sp>
+        <p:nvSpPr>
+          <p:cNvPr id="38" name="TextBox 37"/>
+          <p:cNvSpPr txBox="1"/>
+          <p:nvPr/>
+        </p:nvSpPr>
+        <p:spPr>
+          <a:xfrm>
+            <a:off x="548640" y="4983480"/>
+            <a:ext cx="822960" cy="1097280"/>
+          </a:xfrm>
+          <a:prstGeom prst="rect">
+            <a:avLst/>
+          </a:prstGeom>
+          <a:noFill/>
+        </p:spPr>
+        <p:txBody>
+          <a:bodyPr wrap="square" lIns="0" rIns="0" tIns="0" bIns="0" anchor="ctr">
+            <a:spAutoFit/>
+          </a:bodyPr>
+          <a:lstStyle/>
+          <a:p>
+            <a:pPr algn="ctr"/>
+            <a:r>
+              <a:rPr sz="2600" b="1">
+                <a:solidFill>
+                  <a:srgbClr val="FFFFFF"/>
+                </a:solidFill>
+                <a:latin typeface="Microsoft YaHei"/>
+              </a:rPr>
+              <a:t>07</a:t>
+            </a:r>
+          </a:p>
+        </p:txBody>
+      </p:sp>
+      <p:sp>
+        <p:nvSpPr>
+          <p:cNvPr id="39" name="TextBox 38"/>
+          <p:cNvSpPr txBox="1"/>
+          <p:nvPr/>
+        </p:nvSpPr>
+        <p:spPr>
+          <a:xfrm>
+            <a:off x="1554480" y="5074920"/>
+            <a:ext cx="4480560" cy="457200"/>
+          </a:xfrm>
+          <a:prstGeom prst="rect">
+            <a:avLst/>
+          </a:prstGeom>
+          <a:noFill/>
+        </p:spPr>
+        <p:txBody>
+          <a:bodyPr wrap="square" lIns="0" rIns="0" tIns="0" bIns="0" anchor="t">
+            <a:spAutoFit/>
+          </a:bodyPr>
+          <a:lstStyle/>
+          <a:p>
+            <a:pPr algn="l"/>
+            <a:r>
+              <a:rPr sz="1700" b="1">
+                <a:solidFill>
+                  <a:srgbClr val="0B1F3A"/>
+                </a:solidFill>
+                <a:latin typeface="Microsoft YaHei"/>
+              </a:rPr>
+              <a:t>银行</a:t>
+            </a:r>
+          </a:p>
+        </p:txBody>
+      </p:sp>
+      <p:sp>
+        <p:nvSpPr>
+          <p:cNvPr id="40" name="TextBox 39"/>
+          <p:cNvSpPr txBox="1"/>
+          <p:nvPr/>
+        </p:nvSpPr>
+        <p:spPr>
+          <a:xfrm>
+            <a:off x="1554480" y="5532120"/>
+            <a:ext cx="4480560" cy="548640"/>
+          </a:xfrm>
+          <a:prstGeom prst="rect">
+            <a:avLst/>
+          </a:prstGeom>
+          <a:noFill/>
+        </p:spPr>
+        <p:txBody>
+          <a:bodyPr wrap="square" lIns="0" rIns="0" tIns="0" bIns="0" anchor="t">
+            <a:spAutoFit/>
+          </a:bodyPr>
+          <a:lstStyle/>
+          <a:p>
+            <a:pPr algn="l"/>
+            <a:r>
+              <a:rPr sz="1200" b="0">
+                <a:solidFill>
+                  <a:srgbClr val="222222"/>
+                </a:solidFill>
+                <a:latin typeface="Microsoft YaHei"/>
+              </a:rPr>
+              <a:t>玩银行的时代彻底结束</a:t>
+            </a:r>
+          </a:p>
+        </p:txBody>
+      </p:sp>
+      <p:sp>
+        <p:nvSpPr>
+          <p:cNvPr id="41" name="Rectangle 40"/>
+          <p:cNvSpPr/>
+          <p:nvPr/>
+        </p:nvSpPr>
+        <p:spPr>
+          <a:xfrm>
+            <a:off x="6355079" y="4983480"/>
+            <a:ext cx="5577840" cy="1097280"/>
+          </a:xfrm>
+          <a:prstGeom prst="rect">
+            <a:avLst/>
+          </a:prstGeom>
+          <a:solidFill>
+            <a:srgbClr val="F5F1E6"/>
+          </a:solidFill>
+          <a:ln>
+            <a:noFill/>
+          </a:ln>
+          <a:effectLst/>
+        </p:spPr>
+        <p:style>
+          <a:lnRef idx="1">
+            <a:schemeClr val="accent1"/>
+          </a:lnRef>
+          <a:fillRef idx="3">
+            <a:schemeClr val="accent1"/>
+          </a:fillRef>
+          <a:effectRef idx="2">
+            <a:schemeClr val="accent1"/>
+          </a:effectRef>
+          <a:fontRef idx="minor">
+            <a:schemeClr val="lt1"/>
+          </a:fontRef>
+        </p:style>
+        <p:txBody>
+          <a:bodyPr rtlCol="0" anchor="ctr"/>
+          <a:lstStyle/>
+          <a:p>
+            <a:pPr algn="ctr"/>
+          </a:p>
+        </p:txBody>
+      </p:sp>
+      <p:sp>
+        <p:nvSpPr>
+          <p:cNvPr id="42" name="Rectangle 41"/>
+          <p:cNvSpPr/>
+          <p:nvPr/>
+        </p:nvSpPr>
+        <p:spPr>
+          <a:xfrm>
+            <a:off x="6355079" y="4983480"/>
+            <a:ext cx="822960" cy="1097280"/>
+          </a:xfrm>
+          <a:prstGeom prst="rect">
+            <a:avLst/>
+          </a:prstGeom>
+          <a:solidFill>
+            <a:srgbClr val="B01F24"/>
+          </a:solidFill>
+          <a:ln>
+            <a:noFill/>
+          </a:ln>
+          <a:effectLst/>
+        </p:spPr>
+        <p:style>
+          <a:lnRef idx="1">
+            <a:schemeClr val="accent1"/>
+          </a:lnRef>
+          <a:fillRef idx="3">
+            <a:schemeClr val="accent1"/>
+          </a:fillRef>
+          <a:effectRef idx="2">
+            <a:schemeClr val="accent1"/>
+          </a:effectRef>
+          <a:fontRef idx="minor">
+            <a:schemeClr val="lt1"/>
+          </a:fontRef>
+        </p:style>
+        <p:txBody>
+          <a:bodyPr rtlCol="0" anchor="ctr"/>
+          <a:lstStyle/>
+          <a:p>
+            <a:pPr algn="ctr"/>
+          </a:p>
+        </p:txBody>
+      </p:sp>
+      <p:sp>
+        <p:nvSpPr>
+          <p:cNvPr id="43" name="TextBox 42"/>
+          <p:cNvSpPr txBox="1"/>
+          <p:nvPr/>
+        </p:nvSpPr>
+        <p:spPr>
+          <a:xfrm>
+            <a:off x="6355079" y="4983480"/>
+            <a:ext cx="822960" cy="1097280"/>
+          </a:xfrm>
+          <a:prstGeom prst="rect">
+            <a:avLst/>
+          </a:prstGeom>
+          <a:noFill/>
+        </p:spPr>
+        <p:txBody>
+          <a:bodyPr wrap="square" lIns="0" rIns="0" tIns="0" bIns="0" anchor="ctr">
+            <a:spAutoFit/>
+          </a:bodyPr>
+          <a:lstStyle/>
+          <a:p>
+            <a:pPr algn="ctr"/>
+            <a:r>
+              <a:rPr sz="2600" b="1">
+                <a:solidFill>
+                  <a:srgbClr val="FFFFFF"/>
+                </a:solidFill>
+                <a:latin typeface="Microsoft YaHei"/>
+              </a:rPr>
+              <a:t>08</a:t>
+            </a:r>
+          </a:p>
+        </p:txBody>
+      </p:sp>
+      <p:sp>
+        <p:nvSpPr>
+          <p:cNvPr id="44" name="TextBox 43"/>
+          <p:cNvSpPr txBox="1"/>
+          <p:nvPr/>
+        </p:nvSpPr>
+        <p:spPr>
+          <a:xfrm>
+            <a:off x="7360919" y="5074920"/>
+            <a:ext cx="4480560" cy="457200"/>
+          </a:xfrm>
+          <a:prstGeom prst="rect">
+            <a:avLst/>
+          </a:prstGeom>
+          <a:noFill/>
+        </p:spPr>
+        <p:txBody>
+          <a:bodyPr wrap="square" lIns="0" rIns="0" tIns="0" bIns="0" anchor="t">
+            <a:spAutoFit/>
+          </a:bodyPr>
+          <a:lstStyle/>
+          <a:p>
+            <a:pPr algn="l"/>
+            <a:r>
+              <a:rPr sz="1700" b="1">
+                <a:solidFill>
+                  <a:srgbClr val="0B1F3A"/>
+                </a:solidFill>
+                <a:latin typeface="Microsoft YaHei"/>
+              </a:rPr>
+              <a:t>国企(普遍)</a:t>
+            </a:r>
+          </a:p>
+        </p:txBody>
+      </p:sp>
+      <p:sp>
+        <p:nvSpPr>
+          <p:cNvPr id="45" name="TextBox 44"/>
+          <p:cNvSpPr txBox="1"/>
+          <p:nvPr/>
+        </p:nvSpPr>
+        <p:spPr>
+          <a:xfrm>
+            <a:off x="7360919" y="5532120"/>
+            <a:ext cx="4480560" cy="548640"/>
+          </a:xfrm>
+          <a:prstGeom prst="rect">
+            <a:avLst/>
+          </a:prstGeom>
+          <a:noFill/>
+        </p:spPr>
+        <p:txBody>
+          <a:bodyPr wrap="square" lIns="0" rIns="0" tIns="0" bIns="0" anchor="t">
+            <a:spAutoFit/>
+          </a:bodyPr>
+          <a:lstStyle/>
+          <a:p>
+            <a:pPr algn="l"/>
+            <a:r>
+              <a:rPr sz="1200" b="0">
+                <a:solidFill>
+                  <a:srgbClr val="222222"/>
+                </a:solidFill>
+                <a:latin typeface="Microsoft YaHei"/>
+              </a:rPr>
+              <a:t>三光:赔光/偷光/抢光</a:t>
+            </a:r>
+          </a:p>
+        </p:txBody>
+      </p:sp>
+      <p:sp>
+        <p:nvSpPr>
+          <p:cNvPr id="46" name="TextBox 45"/>
           <p:cNvSpPr txBox="1"/>
           <p:nvPr/>
         </p:nvSpPr>
@@ -7008,7 +7872,7 @@
       </p:sp>
       <p:sp>
         <p:nvSpPr>
-          <p:cNvPr id="16" name="TextBox 15"/>
+          <p:cNvPr id="47" name="TextBox 46"/>
           <p:cNvSpPr txBox="1"/>
           <p:nvPr/>
         </p:nvSpPr>
@@ -7036,7 +7900,7 @@
                 </a:solidFill>
                 <a:latin typeface="Microsoft YaHei"/>
               </a:rPr>
-              <a:t>12</a:t>
+              <a:t>11</a:t>
             </a:r>
           </a:p>
         </p:txBody>
@@ -7177,7 +8041,7 @@
                 </a:solidFill>
                 <a:latin typeface="Microsoft YaHei"/>
               </a:rPr>
-              <a:t>08 · 操作纪要</a:t>
+              <a:t>07 · AI · 外资 · 香港</a:t>
             </a:r>
           </a:p>
         </p:txBody>
@@ -7212,7 +8076,7 @@
                 </a:solidFill>
                 <a:latin typeface="Microsoft YaHei"/>
               </a:rPr>
-              <a:t>可执行金句 · 行动清单</a:t>
+              <a:t>其他重要趋势</a:t>
             </a:r>
           </a:p>
         </p:txBody>
@@ -7226,13 +8090,13 @@
         <p:spPr>
           <a:xfrm>
             <a:off x="548640" y="1280160"/>
-            <a:ext cx="11064240" cy="731520"/>
+            <a:ext cx="5532120" cy="4937760"/>
           </a:xfrm>
           <a:prstGeom prst="rect">
             <a:avLst/>
           </a:prstGeom>
           <a:solidFill>
-            <a:srgbClr val="C9A227"/>
+            <a:srgbClr val="0B1F3A"/>
           </a:solidFill>
           <a:ln>
             <a:noFill/>
@@ -7269,29 +8133,29 @@
         </p:nvSpPr>
         <p:spPr>
           <a:xfrm>
-            <a:off x="731520" y="1280160"/>
-            <a:ext cx="10698480" cy="731520"/>
-          </a:xfrm>
-          <a:prstGeom prst="rect">
-            <a:avLst/>
-          </a:prstGeom>
-          <a:noFill/>
-        </p:spPr>
-        <p:txBody>
-          <a:bodyPr wrap="square" lIns="0" rIns="0" tIns="0" bIns="0" anchor="ctr">
+            <a:off x="731520" y="1417320"/>
+            <a:ext cx="5303520" cy="457200"/>
+          </a:xfrm>
+          <a:prstGeom prst="rect">
+            <a:avLst/>
+          </a:prstGeom>
+          <a:noFill/>
+        </p:spPr>
+        <p:txBody>
+          <a:bodyPr wrap="square" lIns="0" rIns="0" tIns="0" bIns="0" anchor="t">
             <a:spAutoFit/>
           </a:bodyPr>
           <a:lstStyle/>
           <a:p>
             <a:pPr algn="l"/>
             <a:r>
-              <a:rPr sz="2200" b="1">
-                <a:solidFill>
-                  <a:srgbClr val="0B1F3A"/>
-                </a:solidFill>
-                <a:latin typeface="Microsoft YaHei"/>
-              </a:rPr>
-              <a:t>周一一只票:三安光电。不要问为什么,先上车。</a:t>
+              <a:rPr sz="2000" b="1">
+                <a:solidFill>
+                  <a:srgbClr val="C9A227"/>
+                </a:solidFill>
+                <a:latin typeface="Microsoft YaHei"/>
+              </a:rPr>
+              <a:t>AI 智能体</a:t>
             </a:r>
           </a:p>
         </p:txBody>
@@ -7304,8 +8168,8 @@
         </p:nvSpPr>
         <p:spPr>
           <a:xfrm>
-            <a:off x="822960" y="2286000"/>
-            <a:ext cx="10972800" cy="3840480"/>
+            <a:off x="777240" y="1965960"/>
+            <a:ext cx="5212080" cy="4114800"/>
           </a:xfrm>
           <a:prstGeom prst="rect">
             <a:avLst/>
@@ -7324,7 +8188,7 @@
               </a:lnSpc>
             </a:pPr>
             <a:r>
-              <a:rPr sz="1500">
+              <a:rPr sz="1300">
                 <a:solidFill>
                   <a:srgbClr val="C9A227"/>
                 </a:solidFill>
@@ -7333,13 +8197,13 @@
               <a:t>●  </a:t>
             </a:r>
             <a:r>
-              <a:rPr sz="1500">
-                <a:solidFill>
-                  <a:srgbClr val="222222"/>
-                </a:solidFill>
-                <a:latin typeface="Microsoft YaHei"/>
-              </a:rPr>
-              <a:t>现在站在光里 —— 只有三安光电还能站在光里。</a:t>
+              <a:rPr sz="1300">
+                <a:solidFill>
+                  <a:srgbClr val="FFFFFF"/>
+                </a:solidFill>
+                <a:latin typeface="Microsoft YaHei"/>
+              </a:rPr>
+              <a:t>「看不见的智能体」= 真正的爆发点(指节盖大小)</a:t>
             </a:r>
           </a:p>
           <a:p>
@@ -7349,7 +8213,7 @@
               </a:lnSpc>
             </a:pPr>
             <a:r>
-              <a:rPr sz="1500">
+              <a:rPr sz="1300">
                 <a:solidFill>
                   <a:srgbClr val="C9A227"/>
                 </a:solidFill>
@@ -7358,13 +8222,13 @@
               <a:t>●  </a:t>
             </a:r>
             <a:r>
-              <a:rPr sz="1500">
-                <a:solidFill>
-                  <a:srgbClr val="222222"/>
-                </a:solidFill>
-                <a:latin typeface="Microsoft YaHei"/>
-              </a:rPr>
-              <a:t>现在只买行业龙头。</a:t>
+              <a:rPr sz="1300">
+                <a:solidFill>
+                  <a:srgbClr val="FFFFFF"/>
+                </a:solidFill>
+                <a:latin typeface="Microsoft YaHei"/>
+              </a:rPr>
+              <a:t>看得见的机器人(酒店/产线)= 低价值</a:t>
             </a:r>
           </a:p>
           <a:p>
@@ -7374,7 +8238,7 @@
               </a:lnSpc>
             </a:pPr>
             <a:r>
-              <a:rPr sz="1500">
+              <a:rPr sz="1300">
                 <a:solidFill>
                   <a:srgbClr val="C9A227"/>
                 </a:solidFill>
@@ -7383,13 +8247,13 @@
               <a:t>●  </a:t>
             </a:r>
             <a:r>
-              <a:rPr sz="1500">
-                <a:solidFill>
-                  <a:srgbClr val="222222"/>
-                </a:solidFill>
-                <a:latin typeface="Microsoft YaHei"/>
-              </a:rPr>
-              <a:t>回撤即上车。</a:t>
+              <a:rPr sz="1300">
+                <a:solidFill>
+                  <a:srgbClr val="FFFFFF"/>
+                </a:solidFill>
+                <a:latin typeface="Microsoft YaHei"/>
+              </a:rPr>
+              <a:t>看不见的智能体 = 看得见的 × 10</a:t>
             </a:r>
           </a:p>
           <a:p>
@@ -7399,7 +8263,7 @@
               </a:lnSpc>
             </a:pPr>
             <a:r>
-              <a:rPr sz="1500">
+              <a:rPr sz="1300">
                 <a:solidFill>
                   <a:srgbClr val="C9A227"/>
                 </a:solidFill>
@@ -7408,13 +8272,13 @@
               <a:t>●  </a:t>
             </a:r>
             <a:r>
-              <a:rPr sz="1500">
-                <a:solidFill>
-                  <a:srgbClr val="222222"/>
-                </a:solidFill>
-                <a:latin typeface="Microsoft YaHei"/>
-              </a:rPr>
-              <a:t>便宜没好货:低市盈率股票多是垃圾或陷阱。</a:t>
+              <a:rPr sz="1300">
+                <a:solidFill>
+                  <a:srgbClr val="FFFFFF"/>
+                </a:solidFill>
+                <a:latin typeface="Microsoft YaHei"/>
+              </a:rPr>
+              <a:t>AI 时代中文重新重要:提示词越精准,完成度越高</a:t>
             </a:r>
           </a:p>
           <a:p>
@@ -7424,7 +8288,7 @@
               </a:lnSpc>
             </a:pPr>
             <a:r>
-              <a:rPr sz="1500">
+              <a:rPr sz="1300">
                 <a:solidFill>
                   <a:srgbClr val="C9A227"/>
                 </a:solidFill>
@@ -7433,13 +8297,13 @@
               <a:t>●  </a:t>
             </a:r>
             <a:r>
-              <a:rPr sz="1500">
-                <a:solidFill>
-                  <a:srgbClr val="222222"/>
-                </a:solidFill>
-                <a:latin typeface="Microsoft YaHei"/>
-              </a:rPr>
-              <a:t>在风险中寻找机会,在泡沫中兑现财富。</a:t>
+              <a:rPr sz="1300">
+                <a:solidFill>
+                  <a:srgbClr val="FFFFFF"/>
+                </a:solidFill>
+                <a:latin typeface="Microsoft YaHei"/>
+              </a:rPr>
+              <a:t>可用模型:DeepSeek、Kimi 2.6、赤浦、Cursor、Cloud 4.7</a:t>
             </a:r>
           </a:p>
           <a:p>
@@ -7449,7 +8313,7 @@
               </a:lnSpc>
             </a:pPr>
             <a:r>
-              <a:rPr sz="1500">
+              <a:rPr sz="1300">
                 <a:solidFill>
                   <a:srgbClr val="C9A227"/>
                 </a:solidFill>
@@ -7458,13 +8322,13 @@
               <a:t>●  </a:t>
             </a:r>
             <a:r>
-              <a:rPr sz="1500">
-                <a:solidFill>
-                  <a:srgbClr val="222222"/>
-                </a:solidFill>
-                <a:latin typeface="Microsoft YaHei"/>
-              </a:rPr>
-              <a:t>短线干不过量化,长线干不过国家队,只做中间一段。</a:t>
+              <a:rPr sz="1300">
+                <a:solidFill>
+                  <a:srgbClr val="FFFFFF"/>
+                </a:solidFill>
+                <a:latin typeface="Microsoft YaHei"/>
+              </a:rPr>
+              <a:t>豆包基本不能用</a:t>
             </a:r>
           </a:p>
           <a:p>
@@ -7474,7 +8338,7 @@
               </a:lnSpc>
             </a:pPr>
             <a:r>
-              <a:rPr sz="1500">
+              <a:rPr sz="1300">
                 <a:solidFill>
                   <a:srgbClr val="C9A227"/>
                 </a:solidFill>
@@ -7483,15 +8347,117 @@
               <a:t>●  </a:t>
             </a:r>
             <a:r>
-              <a:rPr sz="1500">
-                <a:solidFill>
-                  <a:srgbClr val="222222"/>
-                </a:solidFill>
-                <a:latin typeface="Microsoft YaHei"/>
-              </a:rPr>
-              <a:t>创造性毁灭:关注「创造」,远离「毁灭」。</a:t>
-            </a:r>
-          </a:p>
+              <a:rPr sz="1300">
+                <a:solidFill>
+                  <a:srgbClr val="FFFFFF"/>
+                </a:solidFill>
+                <a:latin typeface="Microsoft YaHei"/>
+              </a:rPr>
+              <a:t>大芯片新趋势:美国公司直接做「盘子那么大」芯片挑战英伟达</a:t>
+            </a:r>
+          </a:p>
+        </p:txBody>
+      </p:sp>
+      <p:sp>
+        <p:nvSpPr>
+          <p:cNvPr id="9" name="Rectangle 8"/>
+          <p:cNvSpPr/>
+          <p:nvPr/>
+        </p:nvSpPr>
+        <p:spPr>
+          <a:xfrm>
+            <a:off x="6172200" y="1280160"/>
+            <a:ext cx="5440680" cy="2377440"/>
+          </a:xfrm>
+          <a:prstGeom prst="rect">
+            <a:avLst/>
+          </a:prstGeom>
+          <a:solidFill>
+            <a:srgbClr val="F5F1E6"/>
+          </a:solidFill>
+          <a:ln>
+            <a:noFill/>
+          </a:ln>
+          <a:effectLst/>
+        </p:spPr>
+        <p:style>
+          <a:lnRef idx="1">
+            <a:schemeClr val="accent1"/>
+          </a:lnRef>
+          <a:fillRef idx="3">
+            <a:schemeClr val="accent1"/>
+          </a:fillRef>
+          <a:effectRef idx="2">
+            <a:schemeClr val="accent1"/>
+          </a:effectRef>
+          <a:fontRef idx="minor">
+            <a:schemeClr val="lt1"/>
+          </a:fontRef>
+        </p:style>
+        <p:txBody>
+          <a:bodyPr rtlCol="0" anchor="ctr"/>
+          <a:lstStyle/>
+          <a:p>
+            <a:pPr algn="ctr"/>
+          </a:p>
+        </p:txBody>
+      </p:sp>
+      <p:sp>
+        <p:nvSpPr>
+          <p:cNvPr id="10" name="TextBox 9"/>
+          <p:cNvSpPr txBox="1"/>
+          <p:nvPr/>
+        </p:nvSpPr>
+        <p:spPr>
+          <a:xfrm>
+            <a:off x="6355080" y="1371600"/>
+            <a:ext cx="5212080" cy="457200"/>
+          </a:xfrm>
+          <a:prstGeom prst="rect">
+            <a:avLst/>
+          </a:prstGeom>
+          <a:noFill/>
+        </p:spPr>
+        <p:txBody>
+          <a:bodyPr wrap="square" lIns="0" rIns="0" tIns="0" bIns="0" anchor="t">
+            <a:spAutoFit/>
+          </a:bodyPr>
+          <a:lstStyle/>
+          <a:p>
+            <a:pPr algn="l"/>
+            <a:r>
+              <a:rPr sz="1800" b="1">
+                <a:solidFill>
+                  <a:srgbClr val="0B1F3A"/>
+                </a:solidFill>
+                <a:latin typeface="Microsoft YaHei"/>
+              </a:rPr>
+              <a:t>外资回流 · 四大主流</a:t>
+            </a:r>
+          </a:p>
+        </p:txBody>
+      </p:sp>
+      <p:sp>
+        <p:nvSpPr>
+          <p:cNvPr id="11" name="TextBox 10"/>
+          <p:cNvSpPr txBox="1"/>
+          <p:nvPr/>
+        </p:nvSpPr>
+        <p:spPr>
+          <a:xfrm>
+            <a:off x="6400800" y="1874519"/>
+            <a:ext cx="5120640" cy="1828800"/>
+          </a:xfrm>
+          <a:prstGeom prst="rect">
+            <a:avLst/>
+          </a:prstGeom>
+          <a:noFill/>
+        </p:spPr>
+        <p:txBody>
+          <a:bodyPr wrap="square" lIns="0" rIns="0" tIns="0" bIns="0">
+            <a:spAutoFit/>
+          </a:bodyPr>
+          <a:lstStyle/>
           <a:p>
             <a:pPr algn="l">
               <a:lnSpc>
@@ -7499,7 +8465,7 @@
               </a:lnSpc>
             </a:pPr>
             <a:r>
-              <a:rPr sz="1500">
+              <a:rPr sz="1300">
                 <a:solidFill>
                   <a:srgbClr val="C9A227"/>
                 </a:solidFill>
@@ -7508,13 +8474,13 @@
               <a:t>●  </a:t>
             </a:r>
             <a:r>
-              <a:rPr sz="1500">
+              <a:rPr sz="1300">
                 <a:solidFill>
                   <a:srgbClr val="222222"/>
                 </a:solidFill>
                 <a:latin typeface="Microsoft YaHei"/>
               </a:rPr>
-              <a:t>穿透股价看企业,穿透产业看创新,穿透创新看企业家,穿透企业家看中国生态伙伴。</a:t>
+              <a:t>美国:贝莱德(14万亿)·重仓宁德/阳光电源</a:t>
             </a:r>
           </a:p>
           <a:p>
@@ -7524,7 +8490,7 @@
               </a:lnSpc>
             </a:pPr>
             <a:r>
-              <a:rPr sz="1500">
+              <a:rPr sz="1300">
                 <a:solidFill>
                   <a:srgbClr val="C9A227"/>
                 </a:solidFill>
@@ -7533,13 +8499,13 @@
               <a:t>●  </a:t>
             </a:r>
             <a:r>
-              <a:rPr sz="1500">
+              <a:rPr sz="1300">
                 <a:solidFill>
                   <a:srgbClr val="222222"/>
                 </a:solidFill>
                 <a:latin typeface="Microsoft YaHei"/>
               </a:rPr>
-              <a:t>5500只票只跟踪200只;一年内,3个月内不翻倍几乎不可能。</a:t>
+              <a:t>瑞士:欧洲钱通过瑞士进入</a:t>
             </a:r>
           </a:p>
           <a:p>
@@ -7549,7 +8515,7 @@
               </a:lnSpc>
             </a:pPr>
             <a:r>
-              <a:rPr sz="1500">
+              <a:rPr sz="1300">
                 <a:solidFill>
                   <a:srgbClr val="C9A227"/>
                 </a:solidFill>
@@ -7558,20 +8524,247 @@
               <a:t>●  </a:t>
             </a:r>
             <a:r>
-              <a:rPr sz="1500">
+              <a:rPr sz="1300">
                 <a:solidFill>
                   <a:srgbClr val="222222"/>
                 </a:solidFill>
                 <a:latin typeface="Microsoft YaHei"/>
               </a:rPr>
-              <a:t>能上链的就上链;不能上链的回避(传统行业未来没机会)。</a:t>
-            </a:r>
-          </a:p>
-        </p:txBody>
-      </p:sp>
-      <p:sp>
-        <p:nvSpPr>
-          <p:cNvPr id="9" name="TextBox 8"/>
+              <a:t>中东:阿布扎比</a:t>
+            </a:r>
+          </a:p>
+          <a:p>
+            <a:pPr algn="l">
+              <a:lnSpc>
+                <a:spcPct val="125000"/>
+              </a:lnSpc>
+            </a:pPr>
+            <a:r>
+              <a:rPr sz="1300">
+                <a:solidFill>
+                  <a:srgbClr val="C9A227"/>
+                </a:solidFill>
+                <a:latin typeface="Microsoft YaHei"/>
+              </a:rPr>
+              <a:t>●  </a:t>
+            </a:r>
+            <a:r>
+              <a:rPr sz="1300">
+                <a:solidFill>
+                  <a:srgbClr val="222222"/>
+                </a:solidFill>
+                <a:latin typeface="Microsoft YaHei"/>
+              </a:rPr>
+              <a:t>中国回流:含潘石屹等</a:t>
+            </a:r>
+          </a:p>
+        </p:txBody>
+      </p:sp>
+      <p:sp>
+        <p:nvSpPr>
+          <p:cNvPr id="12" name="Rectangle 11"/>
+          <p:cNvSpPr/>
+          <p:nvPr/>
+        </p:nvSpPr>
+        <p:spPr>
+          <a:xfrm>
+            <a:off x="6172200" y="3794760"/>
+            <a:ext cx="5440680" cy="2423160"/>
+          </a:xfrm>
+          <a:prstGeom prst="rect">
+            <a:avLst/>
+          </a:prstGeom>
+          <a:solidFill>
+            <a:srgbClr val="F5F1E6"/>
+          </a:solidFill>
+          <a:ln>
+            <a:noFill/>
+          </a:ln>
+          <a:effectLst/>
+        </p:spPr>
+        <p:style>
+          <a:lnRef idx="1">
+            <a:schemeClr val="accent1"/>
+          </a:lnRef>
+          <a:fillRef idx="3">
+            <a:schemeClr val="accent1"/>
+          </a:fillRef>
+          <a:effectRef idx="2">
+            <a:schemeClr val="accent1"/>
+          </a:effectRef>
+          <a:fontRef idx="minor">
+            <a:schemeClr val="lt1"/>
+          </a:fontRef>
+        </p:style>
+        <p:txBody>
+          <a:bodyPr rtlCol="0" anchor="ctr"/>
+          <a:lstStyle/>
+          <a:p>
+            <a:pPr algn="ctr"/>
+          </a:p>
+        </p:txBody>
+      </p:sp>
+      <p:sp>
+        <p:nvSpPr>
+          <p:cNvPr id="13" name="TextBox 12"/>
+          <p:cNvSpPr txBox="1"/>
+          <p:nvPr/>
+        </p:nvSpPr>
+        <p:spPr>
+          <a:xfrm>
+            <a:off x="6355080" y="3886200"/>
+            <a:ext cx="5212080" cy="457200"/>
+          </a:xfrm>
+          <a:prstGeom prst="rect">
+            <a:avLst/>
+          </a:prstGeom>
+          <a:noFill/>
+        </p:spPr>
+        <p:txBody>
+          <a:bodyPr wrap="square" lIns="0" rIns="0" tIns="0" bIns="0" anchor="t">
+            <a:spAutoFit/>
+          </a:bodyPr>
+          <a:lstStyle/>
+          <a:p>
+            <a:pPr algn="l"/>
+            <a:r>
+              <a:rPr sz="1800" b="1">
+                <a:solidFill>
+                  <a:srgbClr val="0B1F3A"/>
+                </a:solidFill>
+                <a:latin typeface="Microsoft YaHei"/>
+              </a:rPr>
+              <a:t>香港 · 全球资本市场枢纽</a:t>
+            </a:r>
+          </a:p>
+        </p:txBody>
+      </p:sp>
+      <p:sp>
+        <p:nvSpPr>
+          <p:cNvPr id="14" name="TextBox 13"/>
+          <p:cNvSpPr txBox="1"/>
+          <p:nvPr/>
+        </p:nvSpPr>
+        <p:spPr>
+          <a:xfrm>
+            <a:off x="6400800" y="4389120"/>
+            <a:ext cx="5120640" cy="1828800"/>
+          </a:xfrm>
+          <a:prstGeom prst="rect">
+            <a:avLst/>
+          </a:prstGeom>
+          <a:noFill/>
+        </p:spPr>
+        <p:txBody>
+          <a:bodyPr wrap="square" lIns="0" rIns="0" tIns="0" bIns="0">
+            <a:spAutoFit/>
+          </a:bodyPr>
+          <a:lstStyle/>
+          <a:p>
+            <a:pPr algn="l">
+              <a:lnSpc>
+                <a:spcPct val="125000"/>
+              </a:lnSpc>
+            </a:pPr>
+            <a:r>
+              <a:rPr sz="1300">
+                <a:solidFill>
+                  <a:srgbClr val="C9A227"/>
+                </a:solidFill>
+                <a:latin typeface="Microsoft YaHei"/>
+              </a:rPr>
+              <a:t>●  </a:t>
+            </a:r>
+            <a:r>
+              <a:rPr sz="1300">
+                <a:solidFill>
+                  <a:srgbClr val="222222"/>
+                </a:solidFill>
+                <a:latin typeface="Microsoft YaHei"/>
+              </a:rPr>
+              <a:t>由「金融自由港」升格为「全球资本枢纽」</a:t>
+            </a:r>
+          </a:p>
+          <a:p>
+            <a:pPr algn="l">
+              <a:lnSpc>
+                <a:spcPct val="125000"/>
+              </a:lnSpc>
+            </a:pPr>
+            <a:r>
+              <a:rPr sz="1300">
+                <a:solidFill>
+                  <a:srgbClr val="C9A227"/>
+                </a:solidFill>
+                <a:latin typeface="Microsoft YaHei"/>
+              </a:rPr>
+              <a:t>●  </a:t>
+            </a:r>
+            <a:r>
+              <a:rPr sz="1300">
+                <a:solidFill>
+                  <a:srgbClr val="222222"/>
+                </a:solidFill>
+                <a:latin typeface="Microsoft YaHei"/>
+              </a:rPr>
+              <a:t>下半年大量代币入场,代币市场爆发</a:t>
+            </a:r>
+          </a:p>
+          <a:p>
+            <a:pPr algn="l">
+              <a:lnSpc>
+                <a:spcPct val="125000"/>
+              </a:lnSpc>
+            </a:pPr>
+            <a:r>
+              <a:rPr sz="1300">
+                <a:solidFill>
+                  <a:srgbClr val="C9A227"/>
+                </a:solidFill>
+                <a:latin typeface="Microsoft YaHei"/>
+              </a:rPr>
+              <a:t>●  </a:t>
+            </a:r>
+            <a:r>
+              <a:rPr sz="1300">
+                <a:solidFill>
+                  <a:srgbClr val="222222"/>
+                </a:solidFill>
+                <a:latin typeface="Microsoft YaHei"/>
+              </a:rPr>
+              <a:t>代币资产起点 = 6%</a:t>
+            </a:r>
+          </a:p>
+          <a:p>
+            <a:pPr algn="l">
+              <a:lnSpc>
+                <a:spcPct val="125000"/>
+              </a:lnSpc>
+            </a:pPr>
+            <a:r>
+              <a:rPr sz="1300">
+                <a:solidFill>
+                  <a:srgbClr val="C9A227"/>
+                </a:solidFill>
+                <a:latin typeface="Microsoft YaHei"/>
+              </a:rPr>
+              <a:t>●  </a:t>
+            </a:r>
+            <a:r>
+              <a:rPr sz="1300">
+                <a:solidFill>
+                  <a:srgbClr val="222222"/>
+                </a:solidFill>
+                <a:latin typeface="Microsoft YaHei"/>
+              </a:rPr>
+              <a:t>马斯克代币基本一周抢完</a:t>
+            </a:r>
+          </a:p>
+        </p:txBody>
+      </p:sp>
+      <p:sp>
+        <p:nvSpPr>
+          <p:cNvPr id="15" name="TextBox 14"/>
           <p:cNvSpPr txBox="1"/>
           <p:nvPr/>
         </p:nvSpPr>
@@ -7606,7 +8799,7 @@
       </p:sp>
       <p:sp>
         <p:nvSpPr>
-          <p:cNvPr id="10" name="TextBox 9"/>
+          <p:cNvPr id="16" name="TextBox 15"/>
           <p:cNvSpPr txBox="1"/>
           <p:nvPr/>
         </p:nvSpPr>
@@ -7634,7 +8827,7 @@
                 </a:solidFill>
                 <a:latin typeface="Microsoft YaHei"/>
               </a:rPr>
-              <a:t>13</a:t>
+              <a:t>12</a:t>
             </a:r>
           </a:p>
         </p:txBody>
@@ -7666,6 +8859,604 @@
         <p:spPr>
           <a:xfrm>
             <a:off x="0" y="0"/>
+            <a:ext cx="12191695" cy="822960"/>
+          </a:xfrm>
+          <a:prstGeom prst="rect">
+            <a:avLst/>
+          </a:prstGeom>
+          <a:solidFill>
+            <a:srgbClr val="0B1F3A"/>
+          </a:solidFill>
+          <a:ln>
+            <a:noFill/>
+          </a:ln>
+          <a:effectLst/>
+        </p:spPr>
+        <p:style>
+          <a:lnRef idx="1">
+            <a:schemeClr val="accent1"/>
+          </a:lnRef>
+          <a:fillRef idx="3">
+            <a:schemeClr val="accent1"/>
+          </a:fillRef>
+          <a:effectRef idx="2">
+            <a:schemeClr val="accent1"/>
+          </a:effectRef>
+          <a:fontRef idx="minor">
+            <a:schemeClr val="lt1"/>
+          </a:fontRef>
+        </p:style>
+        <p:txBody>
+          <a:bodyPr rtlCol="0" anchor="ctr"/>
+          <a:lstStyle/>
+          <a:p>
+            <a:pPr algn="ctr"/>
+          </a:p>
+        </p:txBody>
+      </p:sp>
+      <p:sp>
+        <p:nvSpPr>
+          <p:cNvPr id="3" name="Rectangle 2"/>
+          <p:cNvSpPr/>
+          <p:nvPr/>
+        </p:nvSpPr>
+        <p:spPr>
+          <a:xfrm>
+            <a:off x="0" y="822960"/>
+            <a:ext cx="12191695" cy="54864"/>
+          </a:xfrm>
+          <a:prstGeom prst="rect">
+            <a:avLst/>
+          </a:prstGeom>
+          <a:solidFill>
+            <a:srgbClr val="C9A227"/>
+          </a:solidFill>
+          <a:ln>
+            <a:noFill/>
+          </a:ln>
+          <a:effectLst/>
+        </p:spPr>
+        <p:style>
+          <a:lnRef idx="1">
+            <a:schemeClr val="accent1"/>
+          </a:lnRef>
+          <a:fillRef idx="3">
+            <a:schemeClr val="accent1"/>
+          </a:fillRef>
+          <a:effectRef idx="2">
+            <a:schemeClr val="accent1"/>
+          </a:effectRef>
+          <a:fontRef idx="minor">
+            <a:schemeClr val="lt1"/>
+          </a:fontRef>
+        </p:style>
+        <p:txBody>
+          <a:bodyPr rtlCol="0" anchor="ctr"/>
+          <a:lstStyle/>
+          <a:p>
+            <a:pPr algn="ctr"/>
+          </a:p>
+        </p:txBody>
+      </p:sp>
+      <p:sp>
+        <p:nvSpPr>
+          <p:cNvPr id="4" name="TextBox 3"/>
+          <p:cNvSpPr txBox="1"/>
+          <p:nvPr/>
+        </p:nvSpPr>
+        <p:spPr>
+          <a:xfrm>
+            <a:off x="457200" y="137160"/>
+            <a:ext cx="10972800" cy="548640"/>
+          </a:xfrm>
+          <a:prstGeom prst="rect">
+            <a:avLst/>
+          </a:prstGeom>
+          <a:noFill/>
+        </p:spPr>
+        <p:txBody>
+          <a:bodyPr wrap="square" lIns="0" rIns="0" tIns="0" bIns="0" anchor="t">
+            <a:spAutoFit/>
+          </a:bodyPr>
+          <a:lstStyle/>
+          <a:p>
+            <a:pPr algn="l"/>
+            <a:r>
+              <a:rPr sz="2600" b="1">
+                <a:solidFill>
+                  <a:srgbClr val="FFFFFF"/>
+                </a:solidFill>
+                <a:latin typeface="Microsoft YaHei"/>
+              </a:rPr>
+              <a:t>08 · 操作纪要</a:t>
+            </a:r>
+          </a:p>
+        </p:txBody>
+      </p:sp>
+      <p:sp>
+        <p:nvSpPr>
+          <p:cNvPr id="5" name="TextBox 4"/>
+          <p:cNvSpPr txBox="1"/>
+          <p:nvPr/>
+        </p:nvSpPr>
+        <p:spPr>
+          <a:xfrm>
+            <a:off x="457200" y="502920"/>
+            <a:ext cx="10972800" cy="320040"/>
+          </a:xfrm>
+          <a:prstGeom prst="rect">
+            <a:avLst/>
+          </a:prstGeom>
+          <a:noFill/>
+        </p:spPr>
+        <p:txBody>
+          <a:bodyPr wrap="square" lIns="0" rIns="0" tIns="0" bIns="0" anchor="t">
+            <a:spAutoFit/>
+          </a:bodyPr>
+          <a:lstStyle/>
+          <a:p>
+            <a:pPr algn="l"/>
+            <a:r>
+              <a:rPr sz="1200" b="0">
+                <a:solidFill>
+                  <a:srgbClr val="F5F1E6"/>
+                </a:solidFill>
+                <a:latin typeface="Microsoft YaHei"/>
+              </a:rPr>
+              <a:t>可执行金句 · 行动清单</a:t>
+            </a:r>
+          </a:p>
+        </p:txBody>
+      </p:sp>
+      <p:sp>
+        <p:nvSpPr>
+          <p:cNvPr id="6" name="Rectangle 5"/>
+          <p:cNvSpPr/>
+          <p:nvPr/>
+        </p:nvSpPr>
+        <p:spPr>
+          <a:xfrm>
+            <a:off x="548640" y="1280160"/>
+            <a:ext cx="11064240" cy="731520"/>
+          </a:xfrm>
+          <a:prstGeom prst="rect">
+            <a:avLst/>
+          </a:prstGeom>
+          <a:solidFill>
+            <a:srgbClr val="C9A227"/>
+          </a:solidFill>
+          <a:ln>
+            <a:noFill/>
+          </a:ln>
+          <a:effectLst/>
+        </p:spPr>
+        <p:style>
+          <a:lnRef idx="1">
+            <a:schemeClr val="accent1"/>
+          </a:lnRef>
+          <a:fillRef idx="3">
+            <a:schemeClr val="accent1"/>
+          </a:fillRef>
+          <a:effectRef idx="2">
+            <a:schemeClr val="accent1"/>
+          </a:effectRef>
+          <a:fontRef idx="minor">
+            <a:schemeClr val="lt1"/>
+          </a:fontRef>
+        </p:style>
+        <p:txBody>
+          <a:bodyPr rtlCol="0" anchor="ctr"/>
+          <a:lstStyle/>
+          <a:p>
+            <a:pPr algn="ctr"/>
+          </a:p>
+        </p:txBody>
+      </p:sp>
+      <p:sp>
+        <p:nvSpPr>
+          <p:cNvPr id="7" name="TextBox 6"/>
+          <p:cNvSpPr txBox="1"/>
+          <p:nvPr/>
+        </p:nvSpPr>
+        <p:spPr>
+          <a:xfrm>
+            <a:off x="731520" y="1280160"/>
+            <a:ext cx="10698480" cy="731520"/>
+          </a:xfrm>
+          <a:prstGeom prst="rect">
+            <a:avLst/>
+          </a:prstGeom>
+          <a:noFill/>
+        </p:spPr>
+        <p:txBody>
+          <a:bodyPr wrap="square" lIns="0" rIns="0" tIns="0" bIns="0" anchor="ctr">
+            <a:spAutoFit/>
+          </a:bodyPr>
+          <a:lstStyle/>
+          <a:p>
+            <a:pPr algn="l"/>
+            <a:r>
+              <a:rPr sz="2200" b="1">
+                <a:solidFill>
+                  <a:srgbClr val="0B1F3A"/>
+                </a:solidFill>
+                <a:latin typeface="Microsoft YaHei"/>
+              </a:rPr>
+              <a:t>周一一只票:三安光电。不要问为什么,先上车。</a:t>
+            </a:r>
+          </a:p>
+        </p:txBody>
+      </p:sp>
+      <p:sp>
+        <p:nvSpPr>
+          <p:cNvPr id="8" name="TextBox 7"/>
+          <p:cNvSpPr txBox="1"/>
+          <p:nvPr/>
+        </p:nvSpPr>
+        <p:spPr>
+          <a:xfrm>
+            <a:off x="822960" y="2286000"/>
+            <a:ext cx="10972800" cy="3840480"/>
+          </a:xfrm>
+          <a:prstGeom prst="rect">
+            <a:avLst/>
+          </a:prstGeom>
+          <a:noFill/>
+        </p:spPr>
+        <p:txBody>
+          <a:bodyPr wrap="square" lIns="0" rIns="0" tIns="0" bIns="0">
+            <a:spAutoFit/>
+          </a:bodyPr>
+          <a:lstStyle/>
+          <a:p>
+            <a:pPr algn="l">
+              <a:lnSpc>
+                <a:spcPct val="125000"/>
+              </a:lnSpc>
+            </a:pPr>
+            <a:r>
+              <a:rPr sz="1500">
+                <a:solidFill>
+                  <a:srgbClr val="C9A227"/>
+                </a:solidFill>
+                <a:latin typeface="Microsoft YaHei"/>
+              </a:rPr>
+              <a:t>●  </a:t>
+            </a:r>
+            <a:r>
+              <a:rPr sz="1500">
+                <a:solidFill>
+                  <a:srgbClr val="222222"/>
+                </a:solidFill>
+                <a:latin typeface="Microsoft YaHei"/>
+              </a:rPr>
+              <a:t>现在站在光里 —— 只有三安光电还能站在光里。</a:t>
+            </a:r>
+          </a:p>
+          <a:p>
+            <a:pPr algn="l">
+              <a:lnSpc>
+                <a:spcPct val="125000"/>
+              </a:lnSpc>
+            </a:pPr>
+            <a:r>
+              <a:rPr sz="1500">
+                <a:solidFill>
+                  <a:srgbClr val="C9A227"/>
+                </a:solidFill>
+                <a:latin typeface="Microsoft YaHei"/>
+              </a:rPr>
+              <a:t>●  </a:t>
+            </a:r>
+            <a:r>
+              <a:rPr sz="1500">
+                <a:solidFill>
+                  <a:srgbClr val="222222"/>
+                </a:solidFill>
+                <a:latin typeface="Microsoft YaHei"/>
+              </a:rPr>
+              <a:t>现在只买行业龙头。</a:t>
+            </a:r>
+          </a:p>
+          <a:p>
+            <a:pPr algn="l">
+              <a:lnSpc>
+                <a:spcPct val="125000"/>
+              </a:lnSpc>
+            </a:pPr>
+            <a:r>
+              <a:rPr sz="1500">
+                <a:solidFill>
+                  <a:srgbClr val="C9A227"/>
+                </a:solidFill>
+                <a:latin typeface="Microsoft YaHei"/>
+              </a:rPr>
+              <a:t>●  </a:t>
+            </a:r>
+            <a:r>
+              <a:rPr sz="1500">
+                <a:solidFill>
+                  <a:srgbClr val="222222"/>
+                </a:solidFill>
+                <a:latin typeface="Microsoft YaHei"/>
+              </a:rPr>
+              <a:t>回撤即上车。</a:t>
+            </a:r>
+          </a:p>
+          <a:p>
+            <a:pPr algn="l">
+              <a:lnSpc>
+                <a:spcPct val="125000"/>
+              </a:lnSpc>
+            </a:pPr>
+            <a:r>
+              <a:rPr sz="1500">
+                <a:solidFill>
+                  <a:srgbClr val="C9A227"/>
+                </a:solidFill>
+                <a:latin typeface="Microsoft YaHei"/>
+              </a:rPr>
+              <a:t>●  </a:t>
+            </a:r>
+            <a:r>
+              <a:rPr sz="1500">
+                <a:solidFill>
+                  <a:srgbClr val="222222"/>
+                </a:solidFill>
+                <a:latin typeface="Microsoft YaHei"/>
+              </a:rPr>
+              <a:t>便宜没好货:低市盈率股票多是垃圾或陷阱。</a:t>
+            </a:r>
+          </a:p>
+          <a:p>
+            <a:pPr algn="l">
+              <a:lnSpc>
+                <a:spcPct val="125000"/>
+              </a:lnSpc>
+            </a:pPr>
+            <a:r>
+              <a:rPr sz="1500">
+                <a:solidFill>
+                  <a:srgbClr val="C9A227"/>
+                </a:solidFill>
+                <a:latin typeface="Microsoft YaHei"/>
+              </a:rPr>
+              <a:t>●  </a:t>
+            </a:r>
+            <a:r>
+              <a:rPr sz="1500">
+                <a:solidFill>
+                  <a:srgbClr val="222222"/>
+                </a:solidFill>
+                <a:latin typeface="Microsoft YaHei"/>
+              </a:rPr>
+              <a:t>在风险中寻找机会,在泡沫中兑现财富。</a:t>
+            </a:r>
+          </a:p>
+          <a:p>
+            <a:pPr algn="l">
+              <a:lnSpc>
+                <a:spcPct val="125000"/>
+              </a:lnSpc>
+            </a:pPr>
+            <a:r>
+              <a:rPr sz="1500">
+                <a:solidFill>
+                  <a:srgbClr val="C9A227"/>
+                </a:solidFill>
+                <a:latin typeface="Microsoft YaHei"/>
+              </a:rPr>
+              <a:t>●  </a:t>
+            </a:r>
+            <a:r>
+              <a:rPr sz="1500">
+                <a:solidFill>
+                  <a:srgbClr val="222222"/>
+                </a:solidFill>
+                <a:latin typeface="Microsoft YaHei"/>
+              </a:rPr>
+              <a:t>短线干不过量化,长线干不过国家队,只做中间一段。</a:t>
+            </a:r>
+          </a:p>
+          <a:p>
+            <a:pPr algn="l">
+              <a:lnSpc>
+                <a:spcPct val="125000"/>
+              </a:lnSpc>
+            </a:pPr>
+            <a:r>
+              <a:rPr sz="1500">
+                <a:solidFill>
+                  <a:srgbClr val="C9A227"/>
+                </a:solidFill>
+                <a:latin typeface="Microsoft YaHei"/>
+              </a:rPr>
+              <a:t>●  </a:t>
+            </a:r>
+            <a:r>
+              <a:rPr sz="1500">
+                <a:solidFill>
+                  <a:srgbClr val="222222"/>
+                </a:solidFill>
+                <a:latin typeface="Microsoft YaHei"/>
+              </a:rPr>
+              <a:t>创造性毁灭:关注「创造」,远离「毁灭」。</a:t>
+            </a:r>
+          </a:p>
+          <a:p>
+            <a:pPr algn="l">
+              <a:lnSpc>
+                <a:spcPct val="125000"/>
+              </a:lnSpc>
+            </a:pPr>
+            <a:r>
+              <a:rPr sz="1500">
+                <a:solidFill>
+                  <a:srgbClr val="C9A227"/>
+                </a:solidFill>
+                <a:latin typeface="Microsoft YaHei"/>
+              </a:rPr>
+              <a:t>●  </a:t>
+            </a:r>
+            <a:r>
+              <a:rPr sz="1500">
+                <a:solidFill>
+                  <a:srgbClr val="222222"/>
+                </a:solidFill>
+                <a:latin typeface="Microsoft YaHei"/>
+              </a:rPr>
+              <a:t>穿透股价看企业,穿透产业看创新,穿透创新看企业家,穿透企业家看中国生态伙伴。</a:t>
+            </a:r>
+          </a:p>
+          <a:p>
+            <a:pPr algn="l">
+              <a:lnSpc>
+                <a:spcPct val="125000"/>
+              </a:lnSpc>
+            </a:pPr>
+            <a:r>
+              <a:rPr sz="1500">
+                <a:solidFill>
+                  <a:srgbClr val="C9A227"/>
+                </a:solidFill>
+                <a:latin typeface="Microsoft YaHei"/>
+              </a:rPr>
+              <a:t>●  </a:t>
+            </a:r>
+            <a:r>
+              <a:rPr sz="1500">
+                <a:solidFill>
+                  <a:srgbClr val="222222"/>
+                </a:solidFill>
+                <a:latin typeface="Microsoft YaHei"/>
+              </a:rPr>
+              <a:t>5500只票只跟踪200只;一年内,3个月内不翻倍几乎不可能。</a:t>
+            </a:r>
+          </a:p>
+          <a:p>
+            <a:pPr algn="l">
+              <a:lnSpc>
+                <a:spcPct val="125000"/>
+              </a:lnSpc>
+            </a:pPr>
+            <a:r>
+              <a:rPr sz="1500">
+                <a:solidFill>
+                  <a:srgbClr val="C9A227"/>
+                </a:solidFill>
+                <a:latin typeface="Microsoft YaHei"/>
+              </a:rPr>
+              <a:t>●  </a:t>
+            </a:r>
+            <a:r>
+              <a:rPr sz="1500">
+                <a:solidFill>
+                  <a:srgbClr val="222222"/>
+                </a:solidFill>
+                <a:latin typeface="Microsoft YaHei"/>
+              </a:rPr>
+              <a:t>能上链的就上链;不能上链的回避(传统行业未来没机会)。</a:t>
+            </a:r>
+          </a:p>
+        </p:txBody>
+      </p:sp>
+      <p:sp>
+        <p:nvSpPr>
+          <p:cNvPr id="9" name="TextBox 8"/>
+          <p:cNvSpPr txBox="1"/>
+          <p:nvPr/>
+        </p:nvSpPr>
+        <p:spPr>
+          <a:xfrm>
+            <a:off x="457200" y="6492240"/>
+            <a:ext cx="7315200" cy="274320"/>
+          </a:xfrm>
+          <a:prstGeom prst="rect">
+            <a:avLst/>
+          </a:prstGeom>
+          <a:noFill/>
+        </p:spPr>
+        <p:txBody>
+          <a:bodyPr wrap="square" lIns="0" rIns="0" tIns="0" bIns="0" anchor="t">
+            <a:spAutoFit/>
+          </a:bodyPr>
+          <a:lstStyle/>
+          <a:p>
+            <a:pPr algn="l"/>
+            <a:r>
+              <a:rPr sz="1000" b="0">
+                <a:solidFill>
+                  <a:srgbClr val="6B6B6B"/>
+                </a:solidFill>
+                <a:latin typeface="Microsoft YaHei"/>
+              </a:rPr>
+              <a:t>说话人1 投资观点 · 2026-05-17 投资领域交流探讨</a:t>
+            </a:r>
+          </a:p>
+        </p:txBody>
+      </p:sp>
+      <p:sp>
+        <p:nvSpPr>
+          <p:cNvPr id="10" name="TextBox 9"/>
+          <p:cNvSpPr txBox="1"/>
+          <p:nvPr/>
+        </p:nvSpPr>
+        <p:spPr>
+          <a:xfrm>
+            <a:off x="10972800" y="6492240"/>
+            <a:ext cx="914400" cy="274320"/>
+          </a:xfrm>
+          <a:prstGeom prst="rect">
+            <a:avLst/>
+          </a:prstGeom>
+          <a:noFill/>
+        </p:spPr>
+        <p:txBody>
+          <a:bodyPr wrap="square" lIns="0" rIns="0" tIns="0" bIns="0" anchor="t">
+            <a:spAutoFit/>
+          </a:bodyPr>
+          <a:lstStyle/>
+          <a:p>
+            <a:pPr algn="r"/>
+            <a:r>
+              <a:rPr sz="1000" b="0">
+                <a:solidFill>
+                  <a:srgbClr val="6B6B6B"/>
+                </a:solidFill>
+                <a:latin typeface="Microsoft YaHei"/>
+              </a:rPr>
+              <a:t>13</a:t>
+            </a:r>
+          </a:p>
+        </p:txBody>
+      </p:sp>
+    </p:spTree>
+  </p:cSld>
+  <p:clrMapOvr>
+    <a:masterClrMapping/>
+  </p:clrMapOvr>
+</p:sld>
+</file>
+
+<file path=ppt/slides/slide15.xml><?xml version="1.0" encoding="utf-8"?>
+<p:sld xmlns:a="http://schemas.openxmlformats.org/drawingml/2006/main" xmlns:p="http://schemas.openxmlformats.org/presentationml/2006/main" xmlns:r="http://schemas.openxmlformats.org/officeDocument/2006/relationships">
+  <p:cSld>
+    <p:spTree>
+      <p:nvGrpSpPr>
+        <p:cNvPr id="1" name=""/>
+        <p:cNvGrpSpPr/>
+        <p:nvPr/>
+      </p:nvGrpSpPr>
+      <p:grpSpPr/>
+      <p:sp>
+        <p:nvSpPr>
+          <p:cNvPr id="2" name="Rectangle 1"/>
+          <p:cNvSpPr/>
+          <p:nvPr/>
+        </p:nvSpPr>
+        <p:spPr>
+          <a:xfrm>
+            <a:off x="0" y="0"/>
             <a:ext cx="12191695" cy="6858000"/>
           </a:xfrm>
           <a:prstGeom prst="rect">
@@ -16924,7 +18715,7 @@
                 </a:solidFill>
                 <a:latin typeface="Microsoft YaHei"/>
               </a:rPr>
-              <a:t>04 · 重点股票</a:t>
+              <a:t>04 · 重点股票 · 案例深读</a:t>
             </a:r>
           </a:p>
         </p:txBody>
@@ -16959,7 +18750,7 @@
                 </a:solidFill>
                 <a:latin typeface="Microsoft YaHei"/>
               </a:rPr>
-              <a:t>回避清单 · 看空逻辑</a:t>
+              <a:t>三安光电(600703):为什么在「三重打击」下还要买?</a:t>
             </a:r>
           </a:p>
         </p:txBody>
@@ -16972,8 +18763,131 @@
         </p:nvSpPr>
         <p:spPr>
           <a:xfrm>
-            <a:off x="548640" y="1234440"/>
-            <a:ext cx="457200" cy="530352"/>
+            <a:off x="548640" y="1280160"/>
+            <a:ext cx="11064240" cy="640080"/>
+          </a:xfrm>
+          <a:prstGeom prst="rect">
+            <a:avLst/>
+          </a:prstGeom>
+          <a:solidFill>
+            <a:srgbClr val="0B1F3A"/>
+          </a:solidFill>
+          <a:ln>
+            <a:noFill/>
+          </a:ln>
+          <a:effectLst/>
+        </p:spPr>
+        <p:style>
+          <a:lnRef idx="1">
+            <a:schemeClr val="accent1"/>
+          </a:lnRef>
+          <a:fillRef idx="3">
+            <a:schemeClr val="accent1"/>
+          </a:fillRef>
+          <a:effectRef idx="2">
+            <a:schemeClr val="accent1"/>
+          </a:effectRef>
+          <a:fontRef idx="minor">
+            <a:schemeClr val="lt1"/>
+          </a:fontRef>
+        </p:style>
+        <p:txBody>
+          <a:bodyPr rtlCol="0" anchor="ctr"/>
+          <a:lstStyle/>
+          <a:p>
+            <a:pPr algn="ctr"/>
+          </a:p>
+        </p:txBody>
+      </p:sp>
+      <p:sp>
+        <p:nvSpPr>
+          <p:cNvPr id="7" name="TextBox 6"/>
+          <p:cNvSpPr txBox="1"/>
+          <p:nvPr/>
+        </p:nvSpPr>
+        <p:spPr>
+          <a:xfrm>
+            <a:off x="731520" y="1280160"/>
+            <a:ext cx="10698480" cy="640080"/>
+          </a:xfrm>
+          <a:prstGeom prst="rect">
+            <a:avLst/>
+          </a:prstGeom>
+          <a:noFill/>
+        </p:spPr>
+        <p:txBody>
+          <a:bodyPr wrap="square" lIns="0" rIns="0" tIns="0" bIns="0" anchor="ctr">
+            <a:spAutoFit/>
+          </a:bodyPr>
+          <a:lstStyle/>
+          <a:p>
+            <a:pPr algn="l"/>
+            <a:r>
+              <a:rPr sz="1800" b="1">
+                <a:solidFill>
+                  <a:srgbClr val="C9A227"/>
+                </a:solidFill>
+                <a:latin typeface="Microsoft YaHei"/>
+              </a:rPr>
+              <a:t>近期股价低迷的根源 = 治理 + 股权 + 业绩 三重打击集中爆发</a:t>
+            </a:r>
+          </a:p>
+        </p:txBody>
+      </p:sp>
+      <p:sp>
+        <p:nvSpPr>
+          <p:cNvPr id="8" name="Rectangle 7"/>
+          <p:cNvSpPr/>
+          <p:nvPr/>
+        </p:nvSpPr>
+        <p:spPr>
+          <a:xfrm>
+            <a:off x="548640" y="2057400"/>
+            <a:ext cx="3611880" cy="2468880"/>
+          </a:xfrm>
+          <a:prstGeom prst="rect">
+            <a:avLst/>
+          </a:prstGeom>
+          <a:solidFill>
+            <a:srgbClr val="F5F1E6"/>
+          </a:solidFill>
+          <a:ln>
+            <a:noFill/>
+          </a:ln>
+          <a:effectLst/>
+        </p:spPr>
+        <p:style>
+          <a:lnRef idx="1">
+            <a:schemeClr val="accent1"/>
+          </a:lnRef>
+          <a:fillRef idx="3">
+            <a:schemeClr val="accent1"/>
+          </a:fillRef>
+          <a:effectRef idx="2">
+            <a:schemeClr val="accent1"/>
+          </a:effectRef>
+          <a:fontRef idx="minor">
+            <a:schemeClr val="lt1"/>
+          </a:fontRef>
+        </p:style>
+        <p:txBody>
+          <a:bodyPr rtlCol="0" anchor="ctr"/>
+          <a:lstStyle/>
+          <a:p>
+            <a:pPr algn="ctr"/>
+          </a:p>
+        </p:txBody>
+      </p:sp>
+      <p:sp>
+        <p:nvSpPr>
+          <p:cNvPr id="9" name="Rectangle 8"/>
+          <p:cNvSpPr/>
+          <p:nvPr/>
+        </p:nvSpPr>
+        <p:spPr>
+          <a:xfrm>
+            <a:off x="548640" y="2057400"/>
+            <a:ext cx="3611880" cy="640080"/>
           </a:xfrm>
           <a:prstGeom prst="rect">
             <a:avLst/>
@@ -17010,14 +18924,14 @@
       </p:sp>
       <p:sp>
         <p:nvSpPr>
-          <p:cNvPr id="7" name="TextBox 6"/>
-          <p:cNvSpPr txBox="1"/>
-          <p:nvPr/>
-        </p:nvSpPr>
-        <p:spPr>
-          <a:xfrm>
-            <a:off x="548640" y="1234440"/>
-            <a:ext cx="457200" cy="530352"/>
+          <p:cNvPr id="10" name="TextBox 9"/>
+          <p:cNvSpPr txBox="1"/>
+          <p:nvPr/>
+        </p:nvSpPr>
+        <p:spPr>
+          <a:xfrm>
+            <a:off x="731520" y="2103120"/>
+            <a:ext cx="3383280" cy="640080"/>
           </a:xfrm>
           <a:prstGeom prst="rect">
             <a:avLst/>
@@ -17030,29 +18944,112 @@
           </a:bodyPr>
           <a:lstStyle/>
           <a:p>
-            <a:pPr algn="ctr"/>
-            <a:r>
-              <a:rPr sz="2200" b="1">
+            <a:pPr algn="l"/>
+            <a:r>
+              <a:rPr sz="1400" b="1">
                 <a:solidFill>
                   <a:srgbClr val="FFFFFF"/>
                 </a:solidFill>
                 <a:latin typeface="Microsoft YaHei"/>
               </a:rPr>
-              <a:t>✕</a:t>
-            </a:r>
-          </a:p>
-        </p:txBody>
-      </p:sp>
-      <p:sp>
-        <p:nvSpPr>
-          <p:cNvPr id="8" name="Rectangle 7"/>
+              <a:t>🌪️ 第一重</a:t>
+            </a:r>
+          </a:p>
+          <a:p>
+            <a:pPr algn="l"/>
+            <a:r>
+              <a:rPr sz="1400" b="1">
+                <a:solidFill>
+                  <a:srgbClr val="FFFFFF"/>
+                </a:solidFill>
+                <a:latin typeface="Microsoft YaHei"/>
+              </a:rPr>
+              <a:t>管理层动荡</a:t>
+            </a:r>
+          </a:p>
+        </p:txBody>
+      </p:sp>
+      <p:sp>
+        <p:nvSpPr>
+          <p:cNvPr id="11" name="TextBox 10"/>
+          <p:cNvSpPr txBox="1"/>
+          <p:nvPr/>
+        </p:nvSpPr>
+        <p:spPr>
+          <a:xfrm>
+            <a:off x="777240" y="2834640"/>
+            <a:ext cx="3291840" cy="1691640"/>
+          </a:xfrm>
+          <a:prstGeom prst="rect">
+            <a:avLst/>
+          </a:prstGeom>
+          <a:noFill/>
+        </p:spPr>
+        <p:txBody>
+          <a:bodyPr wrap="square" lIns="0" rIns="0" tIns="0" bIns="0" anchor="t">
+            <a:spAutoFit/>
+          </a:bodyPr>
+          <a:lstStyle/>
+          <a:p>
+            <a:pPr algn="l"/>
+            <a:r>
+              <a:rPr sz="1100" b="0">
+                <a:solidFill>
+                  <a:srgbClr val="222222"/>
+                </a:solidFill>
+                <a:latin typeface="Microsoft YaHei"/>
+              </a:rPr>
+              <a:t>2026年3–4月</a:t>
+            </a:r>
+          </a:p>
+          <a:p>
+            <a:pPr algn="l"/>
+            <a:r>
+              <a:rPr sz="1100" b="0">
+                <a:solidFill>
+                  <a:srgbClr val="222222"/>
+                </a:solidFill>
+                <a:latin typeface="Microsoft YaHei"/>
+              </a:rPr>
+              <a:t>实控人林秀成、副董事长林科闯</a:t>
+            </a:r>
+          </a:p>
+          <a:p>
+            <a:pPr algn="l"/>
+            <a:r>
+              <a:rPr sz="1100" b="0">
+                <a:solidFill>
+                  <a:srgbClr val="222222"/>
+                </a:solidFill>
+                <a:latin typeface="Microsoft YaHei"/>
+              </a:rPr>
+              <a:t>相继被监委留置</a:t>
+            </a:r>
+          </a:p>
+          <a:p>
+            <a:pPr algn="l"/>
+            <a:r>
+              <a:rPr sz="1100" b="0">
+                <a:solidFill>
+                  <a:srgbClr val="222222"/>
+                </a:solidFill>
+                <a:latin typeface="Microsoft YaHei"/>
+              </a:rPr>
+              <a:t>林科闯主导重庆碳化硅项目</a:t>
+            </a:r>
+          </a:p>
+        </p:txBody>
+      </p:sp>
+      <p:sp>
+        <p:nvSpPr>
+          <p:cNvPr id="12" name="Rectangle 11"/>
           <p:cNvSpPr/>
           <p:nvPr/>
         </p:nvSpPr>
         <p:spPr>
           <a:xfrm>
-            <a:off x="1005840" y="1234440"/>
-            <a:ext cx="10607040" cy="530352"/>
+            <a:off x="4251959" y="2057400"/>
+            <a:ext cx="3611880" cy="2468880"/>
           </a:xfrm>
           <a:prstGeom prst="rect">
             <a:avLst/>
@@ -17089,84 +19086,14 @@
       </p:sp>
       <p:sp>
         <p:nvSpPr>
-          <p:cNvPr id="9" name="TextBox 8"/>
-          <p:cNvSpPr txBox="1"/>
-          <p:nvPr/>
-        </p:nvSpPr>
-        <p:spPr>
-          <a:xfrm>
-            <a:off x="1188720" y="1271016"/>
-            <a:ext cx="2743200" cy="457200"/>
-          </a:xfrm>
-          <a:prstGeom prst="rect">
-            <a:avLst/>
-          </a:prstGeom>
-          <a:noFill/>
-        </p:spPr>
-        <p:txBody>
-          <a:bodyPr wrap="square" lIns="0" rIns="0" tIns="0" bIns="0" anchor="ctr">
-            <a:spAutoFit/>
-          </a:bodyPr>
-          <a:lstStyle/>
-          <a:p>
-            <a:pPr algn="l"/>
-            <a:r>
-              <a:rPr sz="1400" b="1">
-                <a:solidFill>
-                  <a:srgbClr val="0B1F3A"/>
-                </a:solidFill>
-                <a:latin typeface="Microsoft YaHei"/>
-              </a:rPr>
-              <a:t>华为及关联平台</a:t>
-            </a:r>
-          </a:p>
-        </p:txBody>
-      </p:sp>
-      <p:sp>
-        <p:nvSpPr>
-          <p:cNvPr id="10" name="TextBox 9"/>
-          <p:cNvSpPr txBox="1"/>
-          <p:nvPr/>
-        </p:nvSpPr>
-        <p:spPr>
-          <a:xfrm>
-            <a:off x="4023360" y="1271016"/>
-            <a:ext cx="7498079" cy="457200"/>
-          </a:xfrm>
-          <a:prstGeom prst="rect">
-            <a:avLst/>
-          </a:prstGeom>
-          <a:noFill/>
-        </p:spPr>
-        <p:txBody>
-          <a:bodyPr wrap="square" lIns="0" rIns="0" tIns="0" bIns="0" anchor="ctr">
-            <a:spAutoFit/>
-          </a:bodyPr>
-          <a:lstStyle/>
-          <a:p>
-            <a:pPr algn="l"/>
-            <a:r>
-              <a:rPr sz="1100" b="0">
-                <a:solidFill>
-                  <a:srgbClr val="222222"/>
-                </a:solidFill>
-                <a:latin typeface="Microsoft YaHei"/>
-              </a:rPr>
-              <a:t>中国最无耻的公司;压榨供应链(同芯片国内2000元/欧洲2000欧元);赛力斯卖一辆车给华为14万;机柜90%仍是电信号→被光模块时代淘汰;AI迭代落后阿里/腾讯。</a:t>
-            </a:r>
-          </a:p>
-        </p:txBody>
-      </p:sp>
-      <p:sp>
-        <p:nvSpPr>
-          <p:cNvPr id="11" name="Rectangle 10"/>
+          <p:cNvPr id="13" name="Rectangle 12"/>
           <p:cNvSpPr/>
           <p:nvPr/>
         </p:nvSpPr>
         <p:spPr>
           <a:xfrm>
-            <a:off x="548640" y="1837944"/>
-            <a:ext cx="457200" cy="530352"/>
+            <a:off x="4251959" y="2057400"/>
+            <a:ext cx="3611880" cy="640080"/>
           </a:xfrm>
           <a:prstGeom prst="rect">
             <a:avLst/>
@@ -17203,14 +19130,14 @@
       </p:sp>
       <p:sp>
         <p:nvSpPr>
-          <p:cNvPr id="12" name="TextBox 11"/>
-          <p:cNvSpPr txBox="1"/>
-          <p:nvPr/>
-        </p:nvSpPr>
-        <p:spPr>
-          <a:xfrm>
-            <a:off x="548640" y="1837944"/>
-            <a:ext cx="457200" cy="530352"/>
+          <p:cNvPr id="14" name="TextBox 13"/>
+          <p:cNvSpPr txBox="1"/>
+          <p:nvPr/>
+        </p:nvSpPr>
+        <p:spPr>
+          <a:xfrm>
+            <a:off x="4434839" y="2103120"/>
+            <a:ext cx="3383280" cy="640080"/>
           </a:xfrm>
           <a:prstGeom prst="rect">
             <a:avLst/>
@@ -17223,29 +19150,124 @@
           </a:bodyPr>
           <a:lstStyle/>
           <a:p>
-            <a:pPr algn="ctr"/>
-            <a:r>
-              <a:rPr sz="2200" b="1">
+            <a:pPr algn="l"/>
+            <a:r>
+              <a:rPr sz="1400" b="1">
                 <a:solidFill>
                   <a:srgbClr val="FFFFFF"/>
                 </a:solidFill>
                 <a:latin typeface="Microsoft YaHei"/>
               </a:rPr>
-              <a:t>✕</a:t>
-            </a:r>
-          </a:p>
-        </p:txBody>
-      </p:sp>
-      <p:sp>
-        <p:nvSpPr>
-          <p:cNvPr id="13" name="Rectangle 12"/>
+              <a:t>🔗 第二重</a:t>
+            </a:r>
+          </a:p>
+          <a:p>
+            <a:pPr algn="l"/>
+            <a:r>
+              <a:rPr sz="1400" b="1">
+                <a:solidFill>
+                  <a:srgbClr val="FFFFFF"/>
+                </a:solidFill>
+                <a:latin typeface="Microsoft YaHei"/>
+              </a:rPr>
+              <a:t>股权危机·被动减持</a:t>
+            </a:r>
+          </a:p>
+        </p:txBody>
+      </p:sp>
+      <p:sp>
+        <p:nvSpPr>
+          <p:cNvPr id="15" name="TextBox 14"/>
+          <p:cNvSpPr txBox="1"/>
+          <p:nvPr/>
+        </p:nvSpPr>
+        <p:spPr>
+          <a:xfrm>
+            <a:off x="4480559" y="2834640"/>
+            <a:ext cx="3291840" cy="1691640"/>
+          </a:xfrm>
+          <a:prstGeom prst="rect">
+            <a:avLst/>
+          </a:prstGeom>
+          <a:noFill/>
+        </p:spPr>
+        <p:txBody>
+          <a:bodyPr wrap="square" lIns="0" rIns="0" tIns="0" bIns="0" anchor="t">
+            <a:spAutoFit/>
+          </a:bodyPr>
+          <a:lstStyle/>
+          <a:p>
+            <a:pPr algn="l"/>
+            <a:r>
+              <a:rPr sz="1100" b="0">
+                <a:solidFill>
+                  <a:srgbClr val="222222"/>
+                </a:solidFill>
+                <a:latin typeface="Microsoft YaHei"/>
+              </a:rPr>
+              <a:t>控股股东及一致行动人</a:t>
+            </a:r>
+          </a:p>
+          <a:p>
+            <a:pPr algn="l"/>
+            <a:r>
+              <a:rPr sz="1100" b="0">
+                <a:solidFill>
+                  <a:srgbClr val="222222"/>
+                </a:solidFill>
+                <a:latin typeface="Microsoft YaHei"/>
+              </a:rPr>
+              <a:t>100%股份司法冻结</a:t>
+            </a:r>
+          </a:p>
+          <a:p>
+            <a:pPr algn="l"/>
+            <a:r>
+              <a:rPr sz="1100" b="0">
+                <a:solidFill>
+                  <a:srgbClr val="222222"/>
+                </a:solidFill>
+                <a:latin typeface="Microsoft YaHei"/>
+              </a:rPr>
+              <a:t>4月中起15天内</a:t>
+            </a:r>
+          </a:p>
+          <a:p>
+            <a:pPr algn="l"/>
+            <a:r>
+              <a:rPr sz="1100" b="0">
+                <a:solidFill>
+                  <a:srgbClr val="222222"/>
+                </a:solidFill>
+                <a:latin typeface="Microsoft YaHei"/>
+              </a:rPr>
+              <a:t>5972万股司法强卖</a:t>
+            </a:r>
+          </a:p>
+          <a:p>
+            <a:pPr algn="l"/>
+            <a:r>
+              <a:rPr sz="1100" b="0">
+                <a:solidFill>
+                  <a:srgbClr val="222222"/>
+                </a:solidFill>
+                <a:latin typeface="Microsoft YaHei"/>
+              </a:rPr>
+              <a:t>套现约8.45亿元</a:t>
+            </a:r>
+          </a:p>
+        </p:txBody>
+      </p:sp>
+      <p:sp>
+        <p:nvSpPr>
+          <p:cNvPr id="16" name="Rectangle 15"/>
           <p:cNvSpPr/>
           <p:nvPr/>
         </p:nvSpPr>
         <p:spPr>
           <a:xfrm>
-            <a:off x="1005840" y="1837944"/>
-            <a:ext cx="10607040" cy="530352"/>
+            <a:off x="7955279" y="2057400"/>
+            <a:ext cx="3611880" cy="2468880"/>
           </a:xfrm>
           <a:prstGeom prst="rect">
             <a:avLst/>
@@ -17282,84 +19304,14 @@
       </p:sp>
       <p:sp>
         <p:nvSpPr>
-          <p:cNvPr id="14" name="TextBox 13"/>
-          <p:cNvSpPr txBox="1"/>
-          <p:nvPr/>
-        </p:nvSpPr>
-        <p:spPr>
-          <a:xfrm>
-            <a:off x="1188720" y="1874520"/>
-            <a:ext cx="2743200" cy="457200"/>
-          </a:xfrm>
-          <a:prstGeom prst="rect">
-            <a:avLst/>
-          </a:prstGeom>
-          <a:noFill/>
-        </p:spPr>
-        <p:txBody>
-          <a:bodyPr wrap="square" lIns="0" rIns="0" tIns="0" bIns="0" anchor="ctr">
-            <a:spAutoFit/>
-          </a:bodyPr>
-          <a:lstStyle/>
-          <a:p>
-            <a:pPr algn="l"/>
-            <a:r>
-              <a:rPr sz="1400" b="1">
-                <a:solidFill>
-                  <a:srgbClr val="0B1F3A"/>
-                </a:solidFill>
-                <a:latin typeface="Microsoft YaHei"/>
-              </a:rPr>
-              <a:t>比亚迪</a:t>
-            </a:r>
-          </a:p>
-        </p:txBody>
-      </p:sp>
-      <p:sp>
-        <p:nvSpPr>
-          <p:cNvPr id="15" name="TextBox 14"/>
-          <p:cNvSpPr txBox="1"/>
-          <p:nvPr/>
-        </p:nvSpPr>
-        <p:spPr>
-          <a:xfrm>
-            <a:off x="4023360" y="1874520"/>
-            <a:ext cx="7498079" cy="457200"/>
-          </a:xfrm>
-          <a:prstGeom prst="rect">
-            <a:avLst/>
-          </a:prstGeom>
-          <a:noFill/>
-        </p:spPr>
-        <p:txBody>
-          <a:bodyPr wrap="square" lIns="0" rIns="0" tIns="0" bIns="0" anchor="ctr">
-            <a:spAutoFit/>
-          </a:bodyPr>
-          <a:lstStyle/>
-          <a:p>
-            <a:pPr algn="l"/>
-            <a:r>
-              <a:rPr sz="1100" b="0">
-                <a:solidFill>
-                  <a:srgbClr val="222222"/>
-                </a:solidFill>
-                <a:latin typeface="Microsoft YaHei"/>
-              </a:rPr>
-              <a:t>事实上已破产;拖欠/压榨供应商,业内口碑差;钠电池替代锂电池后冲击最大。</a:t>
-            </a:r>
-          </a:p>
-        </p:txBody>
-      </p:sp>
-      <p:sp>
-        <p:nvSpPr>
-          <p:cNvPr id="16" name="Rectangle 15"/>
+          <p:cNvPr id="17" name="Rectangle 16"/>
           <p:cNvSpPr/>
           <p:nvPr/>
         </p:nvSpPr>
         <p:spPr>
           <a:xfrm>
-            <a:off x="548640" y="2441448"/>
-            <a:ext cx="457200" cy="530352"/>
+            <a:off x="7955279" y="2057400"/>
+            <a:ext cx="3611880" cy="640080"/>
           </a:xfrm>
           <a:prstGeom prst="rect">
             <a:avLst/>
@@ -17396,14 +19348,14 @@
       </p:sp>
       <p:sp>
         <p:nvSpPr>
-          <p:cNvPr id="17" name="TextBox 16"/>
-          <p:cNvSpPr txBox="1"/>
-          <p:nvPr/>
-        </p:nvSpPr>
-        <p:spPr>
-          <a:xfrm>
-            <a:off x="548640" y="2441448"/>
-            <a:ext cx="457200" cy="530352"/>
+          <p:cNvPr id="18" name="TextBox 17"/>
+          <p:cNvSpPr txBox="1"/>
+          <p:nvPr/>
+        </p:nvSpPr>
+        <p:spPr>
+          <a:xfrm>
+            <a:off x="8138159" y="2103120"/>
+            <a:ext cx="3383280" cy="640080"/>
           </a:xfrm>
           <a:prstGeom prst="rect">
             <a:avLst/>
@@ -17416,35 +19368,130 @@
           </a:bodyPr>
           <a:lstStyle/>
           <a:p>
-            <a:pPr algn="ctr"/>
-            <a:r>
-              <a:rPr sz="2200" b="1">
+            <a:pPr algn="l"/>
+            <a:r>
+              <a:rPr sz="1400" b="1">
                 <a:solidFill>
                   <a:srgbClr val="FFFFFF"/>
                 </a:solidFill>
                 <a:latin typeface="Microsoft YaHei"/>
               </a:rPr>
-              <a:t>✕</a:t>
-            </a:r>
-          </a:p>
-        </p:txBody>
-      </p:sp>
-      <p:sp>
-        <p:nvSpPr>
-          <p:cNvPr id="18" name="Rectangle 17"/>
+              <a:t>📉 第三重</a:t>
+            </a:r>
+          </a:p>
+          <a:p>
+            <a:pPr algn="l"/>
+            <a:r>
+              <a:rPr sz="1400" b="1">
+                <a:solidFill>
+                  <a:srgbClr val="FFFFFF"/>
+                </a:solidFill>
+                <a:latin typeface="Microsoft YaHei"/>
+              </a:rPr>
+              <a:t>业绩首亏</a:t>
+            </a:r>
+          </a:p>
+        </p:txBody>
+      </p:sp>
+      <p:sp>
+        <p:nvSpPr>
+          <p:cNvPr id="19" name="TextBox 18"/>
+          <p:cNvSpPr txBox="1"/>
+          <p:nvPr/>
+        </p:nvSpPr>
+        <p:spPr>
+          <a:xfrm>
+            <a:off x="8183879" y="2834640"/>
+            <a:ext cx="3291840" cy="1691640"/>
+          </a:xfrm>
+          <a:prstGeom prst="rect">
+            <a:avLst/>
+          </a:prstGeom>
+          <a:noFill/>
+        </p:spPr>
+        <p:txBody>
+          <a:bodyPr wrap="square" lIns="0" rIns="0" tIns="0" bIns="0" anchor="t">
+            <a:spAutoFit/>
+          </a:bodyPr>
+          <a:lstStyle/>
+          <a:p>
+            <a:pPr algn="l"/>
+            <a:r>
+              <a:rPr sz="1100" b="0">
+                <a:solidFill>
+                  <a:srgbClr val="222222"/>
+                </a:solidFill>
+                <a:latin typeface="Microsoft YaHei"/>
+              </a:rPr>
+              <a:t>2025归母净利润 -3.53亿元</a:t>
+            </a:r>
+          </a:p>
+          <a:p>
+            <a:pPr algn="l"/>
+            <a:r>
+              <a:rPr sz="1100" b="0">
+                <a:solidFill>
+                  <a:srgbClr val="222222"/>
+                </a:solidFill>
+                <a:latin typeface="Microsoft YaHei"/>
+              </a:rPr>
+              <a:t>(2006上市18年来首亏)</a:t>
+            </a:r>
+          </a:p>
+          <a:p>
+            <a:pPr algn="l"/>
+            <a:r>
+              <a:rPr sz="1100" b="0">
+                <a:solidFill>
+                  <a:srgbClr val="222222"/>
+                </a:solidFill>
+                <a:latin typeface="Microsoft YaHei"/>
+              </a:rPr>
+              <a:t>2026 Q1 营收-32.59%</a:t>
+            </a:r>
+          </a:p>
+          <a:p>
+            <a:pPr algn="l"/>
+            <a:r>
+              <a:rPr sz="1100" b="0">
+                <a:solidFill>
+                  <a:srgbClr val="222222"/>
+                </a:solidFill>
+                <a:latin typeface="Microsoft YaHei"/>
+              </a:rPr>
+              <a:t>归母净利润-68.15%</a:t>
+            </a:r>
+          </a:p>
+          <a:p>
+            <a:pPr algn="l"/>
+            <a:r>
+              <a:rPr sz="1100" b="0">
+                <a:solidFill>
+                  <a:srgbClr val="222222"/>
+                </a:solidFill>
+                <a:latin typeface="Microsoft YaHei"/>
+              </a:rPr>
+              <a:t>Lumileds收购被CFIUS否决</a:t>
+            </a:r>
+          </a:p>
+        </p:txBody>
+      </p:sp>
+      <p:sp>
+        <p:nvSpPr>
+          <p:cNvPr id="20" name="Rectangle 19"/>
           <p:cNvSpPr/>
           <p:nvPr/>
         </p:nvSpPr>
         <p:spPr>
           <a:xfrm>
-            <a:off x="1005840" y="2441448"/>
-            <a:ext cx="10607040" cy="530352"/>
+            <a:off x="548640" y="4663440"/>
+            <a:ext cx="11064240" cy="1600200"/>
           </a:xfrm>
           <a:prstGeom prst="rect">
             <a:avLst/>
           </a:prstGeom>
           <a:solidFill>
-            <a:srgbClr val="F5F1E6"/>
+            <a:srgbClr val="0B1F3A"/>
           </a:solidFill>
           <a:ln>
             <a:noFill/>
@@ -17475,115 +19522,36 @@
       </p:sp>
       <p:sp>
         <p:nvSpPr>
-          <p:cNvPr id="19" name="TextBox 18"/>
-          <p:cNvSpPr txBox="1"/>
-          <p:nvPr/>
-        </p:nvSpPr>
-        <p:spPr>
-          <a:xfrm>
-            <a:off x="1188720" y="2478024"/>
-            <a:ext cx="2743200" cy="457200"/>
-          </a:xfrm>
-          <a:prstGeom prst="rect">
-            <a:avLst/>
-          </a:prstGeom>
-          <a:noFill/>
-        </p:spPr>
-        <p:txBody>
-          <a:bodyPr wrap="square" lIns="0" rIns="0" tIns="0" bIns="0" anchor="ctr">
+          <p:cNvPr id="21" name="TextBox 20"/>
+          <p:cNvSpPr txBox="1"/>
+          <p:nvPr/>
+        </p:nvSpPr>
+        <p:spPr>
+          <a:xfrm>
+            <a:off x="731520" y="4754880"/>
+            <a:ext cx="10698480" cy="411480"/>
+          </a:xfrm>
+          <a:prstGeom prst="rect">
+            <a:avLst/>
+          </a:prstGeom>
+          <a:noFill/>
+        </p:spPr>
+        <p:txBody>
+          <a:bodyPr wrap="square" lIns="0" rIns="0" tIns="0" bIns="0" anchor="t">
             <a:spAutoFit/>
           </a:bodyPr>
           <a:lstStyle/>
           <a:p>
             <a:pPr algn="l"/>
             <a:r>
-              <a:rPr sz="1400" b="1">
-                <a:solidFill>
-                  <a:srgbClr val="0B1F3A"/>
-                </a:solidFill>
-                <a:latin typeface="Microsoft YaHei"/>
-              </a:rPr>
-              <a:t>银行业(整体)</a:t>
-            </a:r>
-          </a:p>
-        </p:txBody>
-      </p:sp>
-      <p:sp>
-        <p:nvSpPr>
-          <p:cNvPr id="20" name="TextBox 19"/>
-          <p:cNvSpPr txBox="1"/>
-          <p:nvPr/>
-        </p:nvSpPr>
-        <p:spPr>
-          <a:xfrm>
-            <a:off x="4023360" y="2478024"/>
-            <a:ext cx="7498079" cy="457200"/>
-          </a:xfrm>
-          <a:prstGeom prst="rect">
-            <a:avLst/>
-          </a:prstGeom>
-          <a:noFill/>
-        </p:spPr>
-        <p:txBody>
-          <a:bodyPr wrap="square" lIns="0" rIns="0" tIns="0" bIns="0" anchor="ctr">
-            <a:spAutoFit/>
-          </a:bodyPr>
-          <a:lstStyle/>
-          <a:p>
-            <a:pPr algn="l"/>
-            <a:r>
-              <a:rPr sz="1100" b="0">
-                <a:solidFill>
-                  <a:srgbClr val="222222"/>
-                </a:solidFill>
-                <a:latin typeface="Microsoft YaHei"/>
-              </a:rPr>
-              <a:t>「玩银行的时代彻底结束」;特斯拉版微信(年息6%)进一步消灭银行。</a:t>
-            </a:r>
-          </a:p>
-        </p:txBody>
-      </p:sp>
-      <p:sp>
-        <p:nvSpPr>
-          <p:cNvPr id="21" name="Rectangle 20"/>
-          <p:cNvSpPr/>
-          <p:nvPr/>
-        </p:nvSpPr>
-        <p:spPr>
-          <a:xfrm>
-            <a:off x="548640" y="3044952"/>
-            <a:ext cx="457200" cy="530352"/>
-          </a:xfrm>
-          <a:prstGeom prst="rect">
-            <a:avLst/>
-          </a:prstGeom>
-          <a:solidFill>
-            <a:srgbClr val="B01F24"/>
-          </a:solidFill>
-          <a:ln>
-            <a:noFill/>
-          </a:ln>
-          <a:effectLst/>
-        </p:spPr>
-        <p:style>
-          <a:lnRef idx="1">
-            <a:schemeClr val="accent1"/>
-          </a:lnRef>
-          <a:fillRef idx="3">
-            <a:schemeClr val="accent1"/>
-          </a:fillRef>
-          <a:effectRef idx="2">
-            <a:schemeClr val="accent1"/>
-          </a:effectRef>
-          <a:fontRef idx="minor">
-            <a:schemeClr val="lt1"/>
-          </a:fontRef>
-        </p:style>
-        <p:txBody>
-          <a:bodyPr rtlCol="0" anchor="ctr"/>
-          <a:lstStyle/>
-          <a:p>
-            <a:pPr algn="ctr"/>
+              <a:rPr sz="1500" b="1">
+                <a:solidFill>
+                  <a:srgbClr val="C9A227"/>
+                </a:solidFill>
+                <a:latin typeface="Microsoft YaHei"/>
+              </a:rPr>
+              <a:t>为什么老师在「三重打击」下还要买?</a:t>
+            </a:r>
           </a:p>
         </p:txBody>
       </p:sp>
@@ -17595,922 +19563,124 @@
         </p:nvSpPr>
         <p:spPr>
           <a:xfrm>
-            <a:off x="548640" y="3044952"/>
-            <a:ext cx="457200" cy="530352"/>
-          </a:xfrm>
-          <a:prstGeom prst="rect">
-            <a:avLst/>
-          </a:prstGeom>
-          <a:noFill/>
-        </p:spPr>
-        <p:txBody>
-          <a:bodyPr wrap="square" lIns="0" rIns="0" tIns="0" bIns="0" anchor="ctr">
-            <a:spAutoFit/>
-          </a:bodyPr>
-          <a:lstStyle/>
-          <a:p>
-            <a:pPr algn="ctr"/>
-            <a:r>
-              <a:rPr sz="2200" b="1">
+            <a:off x="777240" y="5166360"/>
+            <a:ext cx="10789920" cy="1051560"/>
+          </a:xfrm>
+          <a:prstGeom prst="rect">
+            <a:avLst/>
+          </a:prstGeom>
+          <a:noFill/>
+        </p:spPr>
+        <p:txBody>
+          <a:bodyPr wrap="square" lIns="0" rIns="0" tIns="0" bIns="0">
+            <a:spAutoFit/>
+          </a:bodyPr>
+          <a:lstStyle/>
+          <a:p>
+            <a:pPr algn="l">
+              <a:lnSpc>
+                <a:spcPct val="125000"/>
+              </a:lnSpc>
+            </a:pPr>
+            <a:r>
+              <a:rPr sz="1200">
+                <a:solidFill>
+                  <a:srgbClr val="C9A227"/>
+                </a:solidFill>
+                <a:latin typeface="Microsoft YaHei"/>
+              </a:rPr>
+              <a:t>●  </a:t>
+            </a:r>
+            <a:r>
+              <a:rPr sz="1200">
                 <a:solidFill>
                   <a:srgbClr val="FFFFFF"/>
                 </a:solidFill>
                 <a:latin typeface="Microsoft YaHei"/>
               </a:rPr>
-              <a:t>✕</a:t>
-            </a:r>
-          </a:p>
-        </p:txBody>
-      </p:sp>
-      <p:sp>
-        <p:nvSpPr>
-          <p:cNvPr id="23" name="Rectangle 22"/>
-          <p:cNvSpPr/>
-          <p:nvPr/>
-        </p:nvSpPr>
-        <p:spPr>
-          <a:xfrm>
-            <a:off x="1005840" y="3044952"/>
-            <a:ext cx="10607040" cy="530352"/>
-          </a:xfrm>
-          <a:prstGeom prst="rect">
-            <a:avLst/>
-          </a:prstGeom>
-          <a:solidFill>
-            <a:srgbClr val="F5F1E6"/>
-          </a:solidFill>
-          <a:ln>
-            <a:noFill/>
-          </a:ln>
-          <a:effectLst/>
-        </p:spPr>
-        <p:style>
-          <a:lnRef idx="1">
-            <a:schemeClr val="accent1"/>
-          </a:lnRef>
-          <a:fillRef idx="3">
-            <a:schemeClr val="accent1"/>
-          </a:fillRef>
-          <a:effectRef idx="2">
-            <a:schemeClr val="accent1"/>
-          </a:effectRef>
-          <a:fontRef idx="minor">
-            <a:schemeClr val="lt1"/>
-          </a:fontRef>
-        </p:style>
-        <p:txBody>
-          <a:bodyPr rtlCol="0" anchor="ctr"/>
-          <a:lstStyle/>
-          <a:p>
-            <a:pPr algn="ctr"/>
-          </a:p>
-        </p:txBody>
-      </p:sp>
-      <p:sp>
-        <p:nvSpPr>
-          <p:cNvPr id="24" name="TextBox 23"/>
-          <p:cNvSpPr txBox="1"/>
-          <p:nvPr/>
-        </p:nvSpPr>
-        <p:spPr>
-          <a:xfrm>
-            <a:off x="1188720" y="3081528"/>
-            <a:ext cx="2743200" cy="457200"/>
-          </a:xfrm>
-          <a:prstGeom prst="rect">
-            <a:avLst/>
-          </a:prstGeom>
-          <a:noFill/>
-        </p:spPr>
-        <p:txBody>
-          <a:bodyPr wrap="square" lIns="0" rIns="0" tIns="0" bIns="0" anchor="ctr">
-            <a:spAutoFit/>
-          </a:bodyPr>
-          <a:lstStyle/>
-          <a:p>
-            <a:pPr algn="l"/>
-            <a:r>
-              <a:rPr sz="1400" b="1">
-                <a:solidFill>
-                  <a:srgbClr val="0B1F3A"/>
-                </a:solidFill>
-                <a:latin typeface="Microsoft YaHei"/>
-              </a:rPr>
-              <a:t>传统汽车</a:t>
-            </a:r>
-          </a:p>
-        </p:txBody>
-      </p:sp>
-      <p:sp>
-        <p:nvSpPr>
-          <p:cNvPr id="25" name="TextBox 24"/>
-          <p:cNvSpPr txBox="1"/>
-          <p:nvPr/>
-        </p:nvSpPr>
-        <p:spPr>
-          <a:xfrm>
-            <a:off x="4023360" y="3081528"/>
-            <a:ext cx="7498079" cy="457200"/>
-          </a:xfrm>
-          <a:prstGeom prst="rect">
-            <a:avLst/>
-          </a:prstGeom>
-          <a:noFill/>
-        </p:spPr>
-        <p:txBody>
-          <a:bodyPr wrap="square" lIns="0" rIns="0" tIns="0" bIns="0" anchor="ctr">
-            <a:spAutoFit/>
-          </a:bodyPr>
-          <a:lstStyle/>
-          <a:p>
-            <a:pPr algn="l"/>
-            <a:r>
-              <a:rPr sz="1100" b="0">
-                <a:solidFill>
-                  <a:srgbClr val="222222"/>
-                </a:solidFill>
-                <a:latin typeface="Microsoft YaHei"/>
-              </a:rPr>
-              <a:t>房地产之后下一个全线崩溃赛道;特斯拉无人驾驶/机器人化将摧毁传统车企。</a:t>
-            </a:r>
-          </a:p>
-        </p:txBody>
-      </p:sp>
-      <p:sp>
-        <p:nvSpPr>
-          <p:cNvPr id="26" name="Rectangle 25"/>
-          <p:cNvSpPr/>
-          <p:nvPr/>
-        </p:nvSpPr>
-        <p:spPr>
-          <a:xfrm>
-            <a:off x="548640" y="3648456"/>
-            <a:ext cx="457200" cy="530352"/>
-          </a:xfrm>
-          <a:prstGeom prst="rect">
-            <a:avLst/>
-          </a:prstGeom>
-          <a:solidFill>
-            <a:srgbClr val="B01F24"/>
-          </a:solidFill>
-          <a:ln>
-            <a:noFill/>
-          </a:ln>
-          <a:effectLst/>
-        </p:spPr>
-        <p:style>
-          <a:lnRef idx="1">
-            <a:schemeClr val="accent1"/>
-          </a:lnRef>
-          <a:fillRef idx="3">
-            <a:schemeClr val="accent1"/>
-          </a:fillRef>
-          <a:effectRef idx="2">
-            <a:schemeClr val="accent1"/>
-          </a:effectRef>
-          <a:fontRef idx="minor">
-            <a:schemeClr val="lt1"/>
-          </a:fontRef>
-        </p:style>
-        <p:txBody>
-          <a:bodyPr rtlCol="0" anchor="ctr"/>
-          <a:lstStyle/>
-          <a:p>
-            <a:pPr algn="ctr"/>
-          </a:p>
-        </p:txBody>
-      </p:sp>
-      <p:sp>
-        <p:nvSpPr>
-          <p:cNvPr id="27" name="TextBox 26"/>
-          <p:cNvSpPr txBox="1"/>
-          <p:nvPr/>
-        </p:nvSpPr>
-        <p:spPr>
-          <a:xfrm>
-            <a:off x="548640" y="3648456"/>
-            <a:ext cx="457200" cy="530352"/>
-          </a:xfrm>
-          <a:prstGeom prst="rect">
-            <a:avLst/>
-          </a:prstGeom>
-          <a:noFill/>
-        </p:spPr>
-        <p:txBody>
-          <a:bodyPr wrap="square" lIns="0" rIns="0" tIns="0" bIns="0" anchor="ctr">
-            <a:spAutoFit/>
-          </a:bodyPr>
-          <a:lstStyle/>
-          <a:p>
-            <a:pPr algn="ctr"/>
-            <a:r>
-              <a:rPr sz="2200" b="1">
+              <a:t>① 利空已充分定价 + 刚回撤,正是上车机会</a:t>
+            </a:r>
+          </a:p>
+          <a:p>
+            <a:pPr algn="l">
+              <a:lnSpc>
+                <a:spcPct val="125000"/>
+              </a:lnSpc>
+            </a:pPr>
+            <a:r>
+              <a:rPr sz="1200">
+                <a:solidFill>
+                  <a:srgbClr val="C9A227"/>
+                </a:solidFill>
+                <a:latin typeface="Microsoft YaHei"/>
+              </a:rPr>
+              <a:t>●  </a:t>
+            </a:r>
+            <a:r>
+              <a:rPr sz="1200">
                 <a:solidFill>
                   <a:srgbClr val="FFFFFF"/>
                 </a:solidFill>
                 <a:latin typeface="Microsoft YaHei"/>
               </a:rPr>
-              <a:t>✕</a:t>
-            </a:r>
-          </a:p>
-        </p:txBody>
-      </p:sp>
-      <p:sp>
-        <p:nvSpPr>
-          <p:cNvPr id="28" name="Rectangle 27"/>
-          <p:cNvSpPr/>
-          <p:nvPr/>
-        </p:nvSpPr>
-        <p:spPr>
-          <a:xfrm>
-            <a:off x="1005840" y="3648456"/>
-            <a:ext cx="10607040" cy="530352"/>
-          </a:xfrm>
-          <a:prstGeom prst="rect">
-            <a:avLst/>
-          </a:prstGeom>
-          <a:solidFill>
-            <a:srgbClr val="F5F1E6"/>
-          </a:solidFill>
-          <a:ln>
-            <a:noFill/>
-          </a:ln>
-          <a:effectLst/>
-        </p:spPr>
-        <p:style>
-          <a:lnRef idx="1">
-            <a:schemeClr val="accent1"/>
-          </a:lnRef>
-          <a:fillRef idx="3">
-            <a:schemeClr val="accent1"/>
-          </a:fillRef>
-          <a:effectRef idx="2">
-            <a:schemeClr val="accent1"/>
-          </a:effectRef>
-          <a:fontRef idx="minor">
-            <a:schemeClr val="lt1"/>
-          </a:fontRef>
-        </p:style>
-        <p:txBody>
-          <a:bodyPr rtlCol="0" anchor="ctr"/>
-          <a:lstStyle/>
-          <a:p>
-            <a:pPr algn="ctr"/>
-          </a:p>
-        </p:txBody>
-      </p:sp>
-      <p:sp>
-        <p:nvSpPr>
-          <p:cNvPr id="29" name="TextBox 28"/>
-          <p:cNvSpPr txBox="1"/>
-          <p:nvPr/>
-        </p:nvSpPr>
-        <p:spPr>
-          <a:xfrm>
-            <a:off x="1188720" y="3685032"/>
-            <a:ext cx="2743200" cy="457200"/>
-          </a:xfrm>
-          <a:prstGeom prst="rect">
-            <a:avLst/>
-          </a:prstGeom>
-          <a:noFill/>
-        </p:spPr>
-        <p:txBody>
-          <a:bodyPr wrap="square" lIns="0" rIns="0" tIns="0" bIns="0" anchor="ctr">
-            <a:spAutoFit/>
-          </a:bodyPr>
-          <a:lstStyle/>
-          <a:p>
-            <a:pPr algn="l"/>
-            <a:r>
-              <a:rPr sz="1400" b="1">
-                <a:solidFill>
-                  <a:srgbClr val="0B1F3A"/>
-                </a:solidFill>
-                <a:latin typeface="Microsoft YaHei"/>
-              </a:rPr>
-              <a:t>房地产</a:t>
-            </a:r>
-          </a:p>
-        </p:txBody>
-      </p:sp>
-      <p:sp>
-        <p:nvSpPr>
-          <p:cNvPr id="30" name="TextBox 29"/>
-          <p:cNvSpPr txBox="1"/>
-          <p:nvPr/>
-        </p:nvSpPr>
-        <p:spPr>
-          <a:xfrm>
-            <a:off x="4023360" y="3685032"/>
-            <a:ext cx="7498079" cy="457200"/>
-          </a:xfrm>
-          <a:prstGeom prst="rect">
-            <a:avLst/>
-          </a:prstGeom>
-          <a:noFill/>
-        </p:spPr>
-        <p:txBody>
-          <a:bodyPr wrap="square" lIns="0" rIns="0" tIns="0" bIns="0" anchor="ctr">
-            <a:spAutoFit/>
-          </a:bodyPr>
-          <a:lstStyle/>
-          <a:p>
-            <a:pPr algn="l"/>
-            <a:r>
-              <a:rPr sz="1100" b="0">
-                <a:solidFill>
-                  <a:srgbClr val="222222"/>
-                </a:solidFill>
-                <a:latin typeface="Microsoft YaHei"/>
-              </a:rPr>
-              <a:t>「50年起不来」;万科类大窟窿太多;商铺99%必死无疑。</a:t>
-            </a:r>
-          </a:p>
-        </p:txBody>
-      </p:sp>
-      <p:sp>
-        <p:nvSpPr>
-          <p:cNvPr id="31" name="Rectangle 30"/>
-          <p:cNvSpPr/>
-          <p:nvPr/>
-        </p:nvSpPr>
-        <p:spPr>
-          <a:xfrm>
-            <a:off x="548640" y="4251960"/>
-            <a:ext cx="457200" cy="530352"/>
-          </a:xfrm>
-          <a:prstGeom prst="rect">
-            <a:avLst/>
-          </a:prstGeom>
-          <a:solidFill>
-            <a:srgbClr val="B01F24"/>
-          </a:solidFill>
-          <a:ln>
-            <a:noFill/>
-          </a:ln>
-          <a:effectLst/>
-        </p:spPr>
-        <p:style>
-          <a:lnRef idx="1">
-            <a:schemeClr val="accent1"/>
-          </a:lnRef>
-          <a:fillRef idx="3">
-            <a:schemeClr val="accent1"/>
-          </a:fillRef>
-          <a:effectRef idx="2">
-            <a:schemeClr val="accent1"/>
-          </a:effectRef>
-          <a:fontRef idx="minor">
-            <a:schemeClr val="lt1"/>
-          </a:fontRef>
-        </p:style>
-        <p:txBody>
-          <a:bodyPr rtlCol="0" anchor="ctr"/>
-          <a:lstStyle/>
-          <a:p>
-            <a:pPr algn="ctr"/>
-          </a:p>
-        </p:txBody>
-      </p:sp>
-      <p:sp>
-        <p:nvSpPr>
-          <p:cNvPr id="32" name="TextBox 31"/>
-          <p:cNvSpPr txBox="1"/>
-          <p:nvPr/>
-        </p:nvSpPr>
-        <p:spPr>
-          <a:xfrm>
-            <a:off x="548640" y="4251960"/>
-            <a:ext cx="457200" cy="530352"/>
-          </a:xfrm>
-          <a:prstGeom prst="rect">
-            <a:avLst/>
-          </a:prstGeom>
-          <a:noFill/>
-        </p:spPr>
-        <p:txBody>
-          <a:bodyPr wrap="square" lIns="0" rIns="0" tIns="0" bIns="0" anchor="ctr">
-            <a:spAutoFit/>
-          </a:bodyPr>
-          <a:lstStyle/>
-          <a:p>
-            <a:pPr algn="ctr"/>
-            <a:r>
-              <a:rPr sz="2200" b="1">
+              <a:t>② 磷化铟卡光通信「咽喉材料」;后面8个万亿赛道(SiC/InP/Mini-Micro LED/滤波器…)都是领袖</a:t>
+            </a:r>
+          </a:p>
+          <a:p>
+            <a:pPr algn="l">
+              <a:lnSpc>
+                <a:spcPct val="125000"/>
+              </a:lnSpc>
+            </a:pPr>
+            <a:r>
+              <a:rPr sz="1200">
+                <a:solidFill>
+                  <a:srgbClr val="C9A227"/>
+                </a:solidFill>
+                <a:latin typeface="Microsoft YaHei"/>
+              </a:rPr>
+              <a:t>●  </a:t>
+            </a:r>
+            <a:r>
+              <a:rPr sz="1200">
                 <a:solidFill>
                   <a:srgbClr val="FFFFFF"/>
                 </a:solidFill>
                 <a:latin typeface="Microsoft YaHei"/>
               </a:rPr>
-              <a:t>✕</a:t>
-            </a:r>
-          </a:p>
-        </p:txBody>
-      </p:sp>
-      <p:sp>
-        <p:nvSpPr>
-          <p:cNvPr id="33" name="Rectangle 32"/>
-          <p:cNvSpPr/>
-          <p:nvPr/>
-        </p:nvSpPr>
-        <p:spPr>
-          <a:xfrm>
-            <a:off x="1005840" y="4251960"/>
-            <a:ext cx="10607040" cy="530352"/>
-          </a:xfrm>
-          <a:prstGeom prst="rect">
-            <a:avLst/>
-          </a:prstGeom>
-          <a:solidFill>
-            <a:srgbClr val="F5F1E6"/>
-          </a:solidFill>
-          <a:ln>
-            <a:noFill/>
-          </a:ln>
-          <a:effectLst/>
-        </p:spPr>
-        <p:style>
-          <a:lnRef idx="1">
-            <a:schemeClr val="accent1"/>
-          </a:lnRef>
-          <a:fillRef idx="3">
-            <a:schemeClr val="accent1"/>
-          </a:fillRef>
-          <a:effectRef idx="2">
-            <a:schemeClr val="accent1"/>
-          </a:effectRef>
-          <a:fontRef idx="minor">
-            <a:schemeClr val="lt1"/>
-          </a:fontRef>
-        </p:style>
-        <p:txBody>
-          <a:bodyPr rtlCol="0" anchor="ctr"/>
-          <a:lstStyle/>
-          <a:p>
-            <a:pPr algn="ctr"/>
-          </a:p>
-        </p:txBody>
-      </p:sp>
-      <p:sp>
-        <p:nvSpPr>
-          <p:cNvPr id="34" name="TextBox 33"/>
-          <p:cNvSpPr txBox="1"/>
-          <p:nvPr/>
-        </p:nvSpPr>
-        <p:spPr>
-          <a:xfrm>
-            <a:off x="1188720" y="4288536"/>
-            <a:ext cx="2743200" cy="457200"/>
-          </a:xfrm>
-          <a:prstGeom prst="rect">
-            <a:avLst/>
-          </a:prstGeom>
-          <a:noFill/>
-        </p:spPr>
-        <p:txBody>
-          <a:bodyPr wrap="square" lIns="0" rIns="0" tIns="0" bIns="0" anchor="ctr">
-            <a:spAutoFit/>
-          </a:bodyPr>
-          <a:lstStyle/>
-          <a:p>
-            <a:pPr algn="l"/>
-            <a:r>
-              <a:rPr sz="1400" b="1">
-                <a:solidFill>
-                  <a:srgbClr val="0B1F3A"/>
-                </a:solidFill>
-                <a:latin typeface="Microsoft YaHei"/>
-              </a:rPr>
-              <a:t>国企(整体)</a:t>
-            </a:r>
-          </a:p>
-        </p:txBody>
-      </p:sp>
-      <p:sp>
-        <p:nvSpPr>
-          <p:cNvPr id="35" name="TextBox 34"/>
-          <p:cNvSpPr txBox="1"/>
-          <p:nvPr/>
-        </p:nvSpPr>
-        <p:spPr>
-          <a:xfrm>
-            <a:off x="4023360" y="4288536"/>
-            <a:ext cx="7498079" cy="457200"/>
-          </a:xfrm>
-          <a:prstGeom prst="rect">
-            <a:avLst/>
-          </a:prstGeom>
-          <a:noFill/>
-        </p:spPr>
-        <p:txBody>
-          <a:bodyPr wrap="square" lIns="0" rIns="0" tIns="0" bIns="0" anchor="ctr">
-            <a:spAutoFit/>
-          </a:bodyPr>
-          <a:lstStyle/>
-          <a:p>
-            <a:pPr algn="l"/>
-            <a:r>
-              <a:rPr sz="1100" b="0">
-                <a:solidFill>
-                  <a:srgbClr val="222222"/>
-                </a:solidFill>
-                <a:latin typeface="Microsoft YaHei"/>
-              </a:rPr>
-              <a:t>三光:赔光/偷光/抢光;万科即深圳国资委窟窿;基本都是烂账。</a:t>
-            </a:r>
-          </a:p>
-        </p:txBody>
-      </p:sp>
-      <p:sp>
-        <p:nvSpPr>
-          <p:cNvPr id="36" name="Rectangle 35"/>
-          <p:cNvSpPr/>
-          <p:nvPr/>
-        </p:nvSpPr>
-        <p:spPr>
-          <a:xfrm>
-            <a:off x="548640" y="4855464"/>
-            <a:ext cx="457200" cy="530352"/>
-          </a:xfrm>
-          <a:prstGeom prst="rect">
-            <a:avLst/>
-          </a:prstGeom>
-          <a:solidFill>
-            <a:srgbClr val="B01F24"/>
-          </a:solidFill>
-          <a:ln>
-            <a:noFill/>
-          </a:ln>
-          <a:effectLst/>
-        </p:spPr>
-        <p:style>
-          <a:lnRef idx="1">
-            <a:schemeClr val="accent1"/>
-          </a:lnRef>
-          <a:fillRef idx="3">
-            <a:schemeClr val="accent1"/>
-          </a:fillRef>
-          <a:effectRef idx="2">
-            <a:schemeClr val="accent1"/>
-          </a:effectRef>
-          <a:fontRef idx="minor">
-            <a:schemeClr val="lt1"/>
-          </a:fontRef>
-        </p:style>
-        <p:txBody>
-          <a:bodyPr rtlCol="0" anchor="ctr"/>
-          <a:lstStyle/>
-          <a:p>
-            <a:pPr algn="ctr"/>
-          </a:p>
-        </p:txBody>
-      </p:sp>
-      <p:sp>
-        <p:nvSpPr>
-          <p:cNvPr id="37" name="TextBox 36"/>
-          <p:cNvSpPr txBox="1"/>
-          <p:nvPr/>
-        </p:nvSpPr>
-        <p:spPr>
-          <a:xfrm>
-            <a:off x="548640" y="4855464"/>
-            <a:ext cx="457200" cy="530352"/>
-          </a:xfrm>
-          <a:prstGeom prst="rect">
-            <a:avLst/>
-          </a:prstGeom>
-          <a:noFill/>
-        </p:spPr>
-        <p:txBody>
-          <a:bodyPr wrap="square" lIns="0" rIns="0" tIns="0" bIns="0" anchor="ctr">
-            <a:spAutoFit/>
-          </a:bodyPr>
-          <a:lstStyle/>
-          <a:p>
-            <a:pPr algn="ctr"/>
-            <a:r>
-              <a:rPr sz="2200" b="1">
+              <a:t>③ 治理崩塌 ≠ 资产基本面崩塌:福建国资委想抢这块「肥肉」→ 国资接盘预期</a:t>
+            </a:r>
+          </a:p>
+          <a:p>
+            <a:pPr algn="l">
+              <a:lnSpc>
+                <a:spcPct val="125000"/>
+              </a:lnSpc>
+            </a:pPr>
+            <a:r>
+              <a:rPr sz="1200">
+                <a:solidFill>
+                  <a:srgbClr val="C9A227"/>
+                </a:solidFill>
+                <a:latin typeface="Microsoft YaHei"/>
+              </a:rPr>
+              <a:t>●  </a:t>
+            </a:r>
+            <a:r>
+              <a:rPr sz="1200">
                 <a:solidFill>
                   <a:srgbClr val="FFFFFF"/>
                 </a:solidFill>
                 <a:latin typeface="Microsoft YaHei"/>
               </a:rPr>
-              <a:t>✕</a:t>
-            </a:r>
-          </a:p>
-        </p:txBody>
-      </p:sp>
-      <p:sp>
-        <p:nvSpPr>
-          <p:cNvPr id="38" name="Rectangle 37"/>
-          <p:cNvSpPr/>
-          <p:nvPr/>
-        </p:nvSpPr>
-        <p:spPr>
-          <a:xfrm>
-            <a:off x="1005840" y="4855464"/>
-            <a:ext cx="10607040" cy="530352"/>
-          </a:xfrm>
-          <a:prstGeom prst="rect">
-            <a:avLst/>
-          </a:prstGeom>
-          <a:solidFill>
-            <a:srgbClr val="F5F1E6"/>
-          </a:solidFill>
-          <a:ln>
-            <a:noFill/>
-          </a:ln>
-          <a:effectLst/>
-        </p:spPr>
-        <p:style>
-          <a:lnRef idx="1">
-            <a:schemeClr val="accent1"/>
-          </a:lnRef>
-          <a:fillRef idx="3">
-            <a:schemeClr val="accent1"/>
-          </a:fillRef>
-          <a:effectRef idx="2">
-            <a:schemeClr val="accent1"/>
-          </a:effectRef>
-          <a:fontRef idx="minor">
-            <a:schemeClr val="lt1"/>
-          </a:fontRef>
-        </p:style>
-        <p:txBody>
-          <a:bodyPr rtlCol="0" anchor="ctr"/>
-          <a:lstStyle/>
-          <a:p>
-            <a:pPr algn="ctr"/>
-          </a:p>
-        </p:txBody>
-      </p:sp>
-      <p:sp>
-        <p:nvSpPr>
-          <p:cNvPr id="39" name="TextBox 38"/>
-          <p:cNvSpPr txBox="1"/>
-          <p:nvPr/>
-        </p:nvSpPr>
-        <p:spPr>
-          <a:xfrm>
-            <a:off x="1188720" y="4892040"/>
-            <a:ext cx="2743200" cy="457200"/>
-          </a:xfrm>
-          <a:prstGeom prst="rect">
-            <a:avLst/>
-          </a:prstGeom>
-          <a:noFill/>
-        </p:spPr>
-        <p:txBody>
-          <a:bodyPr wrap="square" lIns="0" rIns="0" tIns="0" bIns="0" anchor="ctr">
-            <a:spAutoFit/>
-          </a:bodyPr>
-          <a:lstStyle/>
-          <a:p>
-            <a:pPr algn="l"/>
-            <a:r>
-              <a:rPr sz="1400" b="1">
-                <a:solidFill>
-                  <a:srgbClr val="0B1F3A"/>
-                </a:solidFill>
-                <a:latin typeface="Microsoft YaHei"/>
-              </a:rPr>
-              <a:t>东山精密(谨慎)</a:t>
-            </a:r>
-          </a:p>
-        </p:txBody>
-      </p:sp>
-      <p:sp>
-        <p:nvSpPr>
-          <p:cNvPr id="40" name="TextBox 39"/>
-          <p:cNvSpPr txBox="1"/>
-          <p:nvPr/>
-        </p:nvSpPr>
-        <p:spPr>
-          <a:xfrm>
-            <a:off x="4023360" y="4892040"/>
-            <a:ext cx="7498079" cy="457200"/>
-          </a:xfrm>
-          <a:prstGeom prst="rect">
-            <a:avLst/>
-          </a:prstGeom>
-          <a:noFill/>
-        </p:spPr>
-        <p:txBody>
-          <a:bodyPr wrap="square" lIns="0" rIns="0" tIns="0" bIns="0" anchor="ctr">
-            <a:spAutoFit/>
-          </a:bodyPr>
-          <a:lstStyle/>
-          <a:p>
-            <a:pPr algn="l"/>
-            <a:r>
-              <a:rPr sz="1100" b="0">
-                <a:solidFill>
-                  <a:srgbClr val="222222"/>
-                </a:solidFill>
-                <a:latin typeface="Microsoft YaHei"/>
-              </a:rPr>
-              <a:t>唯一不太确定项;华西村出身;财报水分大;卖不动产59亿、有600亿债。</a:t>
-            </a:r>
-          </a:p>
-        </p:txBody>
-      </p:sp>
-      <p:sp>
-        <p:nvSpPr>
-          <p:cNvPr id="41" name="Rectangle 40"/>
-          <p:cNvSpPr/>
-          <p:nvPr/>
-        </p:nvSpPr>
-        <p:spPr>
-          <a:xfrm>
-            <a:off x="548640" y="5458968"/>
-            <a:ext cx="457200" cy="530352"/>
-          </a:xfrm>
-          <a:prstGeom prst="rect">
-            <a:avLst/>
-          </a:prstGeom>
-          <a:solidFill>
-            <a:srgbClr val="B01F24"/>
-          </a:solidFill>
-          <a:ln>
-            <a:noFill/>
-          </a:ln>
-          <a:effectLst/>
-        </p:spPr>
-        <p:style>
-          <a:lnRef idx="1">
-            <a:schemeClr val="accent1"/>
-          </a:lnRef>
-          <a:fillRef idx="3">
-            <a:schemeClr val="accent1"/>
-          </a:fillRef>
-          <a:effectRef idx="2">
-            <a:schemeClr val="accent1"/>
-          </a:effectRef>
-          <a:fontRef idx="minor">
-            <a:schemeClr val="lt1"/>
-          </a:fontRef>
-        </p:style>
-        <p:txBody>
-          <a:bodyPr rtlCol="0" anchor="ctr"/>
-          <a:lstStyle/>
-          <a:p>
-            <a:pPr algn="ctr"/>
-          </a:p>
-        </p:txBody>
-      </p:sp>
-      <p:sp>
-        <p:nvSpPr>
-          <p:cNvPr id="42" name="TextBox 41"/>
-          <p:cNvSpPr txBox="1"/>
-          <p:nvPr/>
-        </p:nvSpPr>
-        <p:spPr>
-          <a:xfrm>
-            <a:off x="548640" y="5458968"/>
-            <a:ext cx="457200" cy="530352"/>
-          </a:xfrm>
-          <a:prstGeom prst="rect">
-            <a:avLst/>
-          </a:prstGeom>
-          <a:noFill/>
-        </p:spPr>
-        <p:txBody>
-          <a:bodyPr wrap="square" lIns="0" rIns="0" tIns="0" bIns="0" anchor="ctr">
-            <a:spAutoFit/>
-          </a:bodyPr>
-          <a:lstStyle/>
-          <a:p>
-            <a:pPr algn="ctr"/>
-            <a:r>
-              <a:rPr sz="2200" b="1">
-                <a:solidFill>
-                  <a:srgbClr val="FFFFFF"/>
-                </a:solidFill>
-                <a:latin typeface="Microsoft YaHei"/>
-              </a:rPr>
-              <a:t>✕</a:t>
-            </a:r>
-          </a:p>
-        </p:txBody>
-      </p:sp>
-      <p:sp>
-        <p:nvSpPr>
-          <p:cNvPr id="43" name="Rectangle 42"/>
-          <p:cNvSpPr/>
-          <p:nvPr/>
-        </p:nvSpPr>
-        <p:spPr>
-          <a:xfrm>
-            <a:off x="1005840" y="5458968"/>
-            <a:ext cx="10607040" cy="530352"/>
-          </a:xfrm>
-          <a:prstGeom prst="rect">
-            <a:avLst/>
-          </a:prstGeom>
-          <a:solidFill>
-            <a:srgbClr val="F5F1E6"/>
-          </a:solidFill>
-          <a:ln>
-            <a:noFill/>
-          </a:ln>
-          <a:effectLst/>
-        </p:spPr>
-        <p:style>
-          <a:lnRef idx="1">
-            <a:schemeClr val="accent1"/>
-          </a:lnRef>
-          <a:fillRef idx="3">
-            <a:schemeClr val="accent1"/>
-          </a:fillRef>
-          <a:effectRef idx="2">
-            <a:schemeClr val="accent1"/>
-          </a:effectRef>
-          <a:fontRef idx="minor">
-            <a:schemeClr val="lt1"/>
-          </a:fontRef>
-        </p:style>
-        <p:txBody>
-          <a:bodyPr rtlCol="0" anchor="ctr"/>
-          <a:lstStyle/>
-          <a:p>
-            <a:pPr algn="ctr"/>
-          </a:p>
-        </p:txBody>
-      </p:sp>
-      <p:sp>
-        <p:nvSpPr>
-          <p:cNvPr id="44" name="TextBox 43"/>
-          <p:cNvSpPr txBox="1"/>
-          <p:nvPr/>
-        </p:nvSpPr>
-        <p:spPr>
-          <a:xfrm>
-            <a:off x="1188720" y="5495544"/>
-            <a:ext cx="2743200" cy="457200"/>
-          </a:xfrm>
-          <a:prstGeom prst="rect">
-            <a:avLst/>
-          </a:prstGeom>
-          <a:noFill/>
-        </p:spPr>
-        <p:txBody>
-          <a:bodyPr wrap="square" lIns="0" rIns="0" tIns="0" bIns="0" anchor="ctr">
-            <a:spAutoFit/>
-          </a:bodyPr>
-          <a:lstStyle/>
-          <a:p>
-            <a:pPr algn="l"/>
-            <a:r>
-              <a:rPr sz="1400" b="1">
-                <a:solidFill>
-                  <a:srgbClr val="0B1F3A"/>
-                </a:solidFill>
-                <a:latin typeface="Microsoft YaHei"/>
-              </a:rPr>
-              <a:t>青龙行者</a:t>
-            </a:r>
-          </a:p>
-        </p:txBody>
-      </p:sp>
-      <p:sp>
-        <p:nvSpPr>
-          <p:cNvPr id="45" name="TextBox 44"/>
-          <p:cNvSpPr txBox="1"/>
-          <p:nvPr/>
-        </p:nvSpPr>
-        <p:spPr>
-          <a:xfrm>
-            <a:off x="4023360" y="5495544"/>
-            <a:ext cx="7498079" cy="457200"/>
-          </a:xfrm>
-          <a:prstGeom prst="rect">
-            <a:avLst/>
-          </a:prstGeom>
-          <a:noFill/>
-        </p:spPr>
-        <p:txBody>
-          <a:bodyPr wrap="square" lIns="0" rIns="0" tIns="0" bIns="0" anchor="ctr">
-            <a:spAutoFit/>
-          </a:bodyPr>
-          <a:lstStyle/>
-          <a:p>
-            <a:pPr algn="l"/>
-            <a:r>
-              <a:rPr sz="1100" b="0">
-                <a:solidFill>
-                  <a:srgbClr val="222222"/>
-                </a:solidFill>
-                <a:latin typeface="Microsoft YaHei"/>
-              </a:rPr>
-              <a:t>15种品种中3种被淘汰,不要碰。</a:t>
-            </a:r>
-          </a:p>
-        </p:txBody>
-      </p:sp>
-      <p:sp>
-        <p:nvSpPr>
-          <p:cNvPr id="46" name="TextBox 45"/>
+              <a:t>④ 被动减持 = 出清信号;15天卖完后筹码集中度反而上升</a:t>
+            </a:r>
+          </a:p>
+        </p:txBody>
+      </p:sp>
+      <p:sp>
+        <p:nvSpPr>
+          <p:cNvPr id="23" name="TextBox 22"/>
           <p:cNvSpPr txBox="1"/>
           <p:nvPr/>
         </p:nvSpPr>
@@ -18545,7 +19715,7 @@
       </p:sp>
       <p:sp>
         <p:nvSpPr>
-          <p:cNvPr id="47" name="TextBox 46"/>
+          <p:cNvPr id="24" name="TextBox 23"/>
           <p:cNvSpPr txBox="1"/>
           <p:nvPr/>
         </p:nvSpPr>
